--- a/hotstock-mbb/Ngan_hang_MBB_Hotstock.pptx
+++ b/hotstock-mbb/Ngan_hang_MBB_Hotstock.pptx
@@ -348,7 +348,7 @@
                   <c:v>1133797</c:v>
                 </c:pt>
                 <c:pt idx="3">
-                  <c:v>1500000</c:v>
+                  <c:v>1615764</c:v>
                 </c:pt>
                 <c:pt idx="4">
                   <c:v>2100000</c:v>
@@ -2787,7 +2787,7 @@
           <a:p>
             <a:r>
               <a:rPr lang="en-US"/>
-              <a:t>Tổng tài sản tăng từ 728.532 tỷ (2022) lên gần 1,5 triệu tỷ (2025), mục tiêu vượt 2,1 triệu tỷ năm 2026. Vốn điều lệ lên tối đa 102.687 tỷ.</a:t>
+              <a:t>Tổng tài sản tăng từ 728.532 tỷ (2022) lên 1.615.764 tỷ cuối 2025, tăng 43%. Mục tiêu vượt 2,1 triệu tỷ năm 2026, vốn điều lệ lên tối đa 102.687 tỷ.</a:t>
             </a:r>
           </a:p>
         </p:txBody>
@@ -2880,7 +2880,7 @@
           <a:p>
             <a:r>
               <a:rPr lang="en-US"/>
-              <a:t>CASA ~38% cuối 2025, cao nhất hệ thống, số dư tăng ~27%. Nhận chuyển giao MBV nên được giao room tín dụng nhóm cao nhất 2026-2028. ROE trên 21%.</a:t>
+              <a:t>CASA ~38% cuối 2025, dẫn đầu hệ thống. Nhận chuyển giao MBV nên được giao room tín dụng nhóm cao nhất 2026-2028, mục tiêu 30-35%. ROE 2025 đạt 21,1%.</a:t>
             </a:r>
           </a:p>
         </p:txBody>
@@ -3078,7 +3078,7 @@
           <a:p>
             <a:r>
               <a:rPr lang="en-US"/>
-              <a:t>Tổng tài sản vượt 1,6 triệu tỷ cuối quý I/2026, mục tiêu vượt 2,1 triệu tỷ. Vốn điều lệ lên tối đa 102.687 tỷ, cổ tức 25% gồm 10% tiền mặt và 15% cổ phiếu.</a:t>
+              <a:t>Tổng tài sản 1.615.764 tỷ cuối 2025, tăng 43%; mục tiêu vượt 2,1 triệu tỷ. Vốn điều lệ lên tối đa 102.687 tỷ, cổ tức 25% gồm 10% tiền mặt và 15% cổ phiếu.</a:t>
             </a:r>
           </a:p>
         </p:txBody>
@@ -6929,7 +6929,7 @@
                 <a:ea typeface="Lora" pitchFamily="34" charset="-122"/>
                 <a:cs typeface="Lora" pitchFamily="34" charset="-120"/>
               </a:rPr>
-              <a:t>21,6%</a:t>
+              <a:t>21,1%</a:t>
             </a:r>
             <a:endParaRPr lang="en-US" sz="4650" dirty="0"/>
           </a:p>
@@ -7014,7 +7014,7 @@
                 <a:ea typeface="Calibri" pitchFamily="34" charset="-122"/>
                 <a:cs typeface="Calibri" pitchFamily="34" charset="-120"/>
               </a:rPr>
-              <a:t>ROE thuộc nhóm cao nhất trong các ngân hàng lớn</a:t>
+              <a:t>ROE 2025 thuộc nhóm cao nhất khối ngân hàng lớn</a:t>
             </a:r>
             <a:endParaRPr lang="en-US" sz="1800" dirty="0"/>
           </a:p>
@@ -7628,7 +7628,7 @@
                 <a:ea typeface="Calibri" pitchFamily="34" charset="-122"/>
                 <a:cs typeface="Calibri" pitchFamily="34" charset="-120"/>
               </a:rPr>
-              <a:t>MBB đặt mục tiêu tổng tài sản vượt 2,1 triệu tỷ đồng và nâng vốn điều lệ lên hơn 102.000 tỷ đồng ngay trong năm 2026.</a:t>
+              <a:t>Sau khi tổng tài sản tăng 43% trong năm 2025, MBB đặt mục tiêu vượt 2,1 triệu tỷ đồng và nâng vốn điều lệ lên hơn 102.000 tỷ đồng năm 2026.</a:t>
             </a:r>
             <a:endParaRPr lang="en-US" sz="1800" dirty="0"/>
           </a:p>
@@ -7917,7 +7917,7 @@
                 <a:ea typeface="Calibri" pitchFamily="34" charset="-122"/>
                 <a:cs typeface="Calibri" pitchFamily="34" charset="-120"/>
               </a:rPr>
-              <a:t>Tổng tài sản đã vượt 1,6 triệu tỷ đồng cuối quý I/2026, mục tiêu vượt 2,1 triệu tỷ trong năm.</a:t>
+              <a:t>Tổng tài sản đạt 1.615.764 tỷ đồng cuối 2025, tăng 43%; mục tiêu vượt 2,1 triệu tỷ năm 2026.</a:t>
             </a:r>
             <a:endParaRPr lang="en-US" sz="1875" dirty="0"/>
           </a:p>
@@ -7958,7 +7958,7 @@
                 <a:ea typeface="Calibri" pitchFamily="34" charset="-122"/>
                 <a:cs typeface="Calibri" pitchFamily="34" charset="-120"/>
               </a:rPr>
-              <a:t>Tín dụng tăng trưởng quanh mức 30%</a:t>
+              <a:t>Tín dụng mục tiêu tăng 30–35% năm 2026</a:t>
             </a:r>
             <a:endParaRPr lang="en-US" sz="1800" dirty="0"/>
           </a:p>

--- a/hotstock-mbb/Ngan_hang_MBB_Hotstock.pptx
+++ b/hotstock-mbb/Ngan_hang_MBB_Hotstock.pptx
@@ -10,8 +10,6 @@
   <p:sldIdLst>
     <p:sldId id="256" r:id="rId2"/>
     <p:sldId id="257" r:id="rId3"/>
-    <p:sldId id="260" r:id="rId4"/>
-    <p:sldId id="258" r:id="rId5"/>
     <p:sldId id="261" r:id="rId6"/>
     <p:sldId id="259" r:id="rId7"/>
   </p:sldIdLst>
@@ -115,846 +113,6 @@
     </p:ext>
   </p:extLst>
 </p:presentation>
-</file>
-
-<file path=ppt/charts/chart1.xml><?xml version="1.0" encoding="utf-8"?>
-<c:chartSpace xmlns:c="http://schemas.openxmlformats.org/drawingml/2006/chart" xmlns:a="http://schemas.openxmlformats.org/drawingml/2006/main" xmlns:r="http://schemas.openxmlformats.org/officeDocument/2006/relationships" xmlns:c16r2="http://schemas.microsoft.com/office/drawing/2015/06/chart">
-  <c:date1904 val="0"/>
-  <c:lang val="en-US"/>
-  <c:roundedCorners val="0"/>
-  <mc:AlternateContent xmlns:mc="http://schemas.openxmlformats.org/markup-compatibility/2006">
-    <mc:Choice xmlns:c14="http://schemas.microsoft.com/office/drawing/2007/8/2/chart" Requires="c14">
-      <c14:style val="102"/>
-    </mc:Choice>
-    <mc:Fallback>
-      <c:style val="2"/>
-    </mc:Fallback>
-  </mc:AlternateContent>
-  <c:chart>
-    <c:title>
-      <c:tx>
-        <c:rich>
-          <a:bodyPr rot="0" spcFirstLastPara="1" vertOverflow="ellipsis" vert="horz" wrap="square" anchor="ctr" anchorCtr="1"/>
-          <a:lstStyle/>
-          <a:p>
-            <a:pPr>
-              <a:defRPr sz="2000" b="0" i="0" u="none" strike="noStrike" kern="1200" spc="0" baseline="0">
-                <a:solidFill>
-                  <a:schemeClr val="tx1">
-                    <a:lumMod val="65000"/>
-                    <a:lumOff val="35000"/>
-                  </a:schemeClr>
-                </a:solidFill>
-                <a:latin typeface="SVN-Gilroy" panose="00000500000000000000" pitchFamily="50" charset="0"/>
-                <a:ea typeface="+mn-ea"/>
-                <a:cs typeface="+mn-cs"/>
-              </a:defRPr>
-            </a:pPr>
-            <a:r>
-              <a:rPr lang="en-US" sz="2000" dirty="0"/>
-              <a:t>(</a:t>
-            </a:r>
-            <a:r>
-              <a:rPr lang="en-US" sz="2000" dirty="0" err="1"/>
-              <a:t>tỷ</a:t>
-            </a:r>
-            <a:r>
-              <a:rPr lang="en-US" sz="2000" dirty="0"/>
-              <a:t>)</a:t>
-            </a:r>
-          </a:p>
-        </c:rich>
-      </c:tx>
-      <c:layout>
-        <c:manualLayout>
-          <c:xMode val="edge"/>
-          <c:yMode val="edge"/>
-          <c:x val="0.10400338039772977"/>
-          <c:y val="0"/>
-        </c:manualLayout>
-      </c:layout>
-      <c:overlay val="0"/>
-      <c:spPr>
-        <a:noFill/>
-        <a:ln>
-          <a:noFill/>
-        </a:ln>
-        <a:effectLst/>
-      </c:spPr>
-      <c:txPr>
-        <a:bodyPr rot="0" spcFirstLastPara="1" vertOverflow="ellipsis" vert="horz" wrap="square" anchor="ctr" anchorCtr="1"/>
-        <a:lstStyle/>
-        <a:p>
-          <a:pPr>
-            <a:defRPr sz="2000" b="0" i="0" u="none" strike="noStrike" kern="1200" spc="0" baseline="0">
-              <a:solidFill>
-                <a:schemeClr val="tx1">
-                  <a:lumMod val="65000"/>
-                  <a:lumOff val="35000"/>
-                </a:schemeClr>
-              </a:solidFill>
-              <a:latin typeface="SVN-Gilroy" panose="00000500000000000000" pitchFamily="50" charset="0"/>
-              <a:ea typeface="+mn-ea"/>
-              <a:cs typeface="+mn-cs"/>
-            </a:defRPr>
-          </a:pPr>
-          <a:endParaRPr lang="en-US"/>
-        </a:p>
-      </c:txPr>
-    </c:title>
-    <c:autoTitleDeleted val="0"/>
-    <c:plotArea>
-      <c:layout>
-        <c:manualLayout>
-          <c:layoutTarget val="inner"/>
-          <c:xMode val="edge"/>
-          <c:yMode val="edge"/>
-          <c:x val="0.19350292938477487"/>
-          <c:y val="6.6842304124126797E-2"/>
-          <c:w val="0.70109743898128518"/>
-          <c:h val="0.74238649348333208"/>
-        </c:manualLayout>
-      </c:layout>
-      <c:barChart>
-        <c:barDir val="col"/>
-        <c:grouping val="clustered"/>
-        <c:varyColors val="0"/>
-        <c:ser>
-          <c:idx val="0"/>
-          <c:order val="1"/>
-          <c:tx>
-            <c:v>Vốn Chủ Sở Hữu</c:v>
-          </c:tx>
-          <c:spPr>
-            <a:solidFill>
-              <a:schemeClr val="tx2">
-                <a:lumMod val="50000"/>
-              </a:schemeClr>
-            </a:solidFill>
-            <a:ln>
-              <a:noFill/>
-            </a:ln>
-            <a:effectLst/>
-          </c:spPr>
-          <c:invertIfNegative val="0"/>
-          <c:cat>
-            <c:strRef>
-              <c:f>'Bảng cân đối kế toán'!$U$11:$Z$11</c:f>
-              <c:strCache>
-                <c:ptCount val="5"/>
-                <c:pt idx="0">
-                  <c:v>2022</c:v>
-                </c:pt>
-                <c:pt idx="1">
-                  <c:v>2023</c:v>
-                </c:pt>
-                <c:pt idx="2">
-                  <c:v>2024</c:v>
-                </c:pt>
-                <c:pt idx="3">
-                  <c:v>2025</c:v>
-                </c:pt>
-                <c:pt idx="4">
-                  <c:v>2026F</c:v>
-                </c:pt>
-              </c:strCache>
-              <c:extLst/>
-            </c:strRef>
-          </c:cat>
-          <c:val>
-            <c:numRef>
-              <c:f>'Bảng cân đối kế toán'!$U$78:$Z$78</c:f>
-              <c:numCache>
-                <c:formatCode>#,##0.00</c:formatCode>
-                <c:ptCount val="5"/>
-                <c:pt idx="0">
-                  <c:v>79613</c:v>
-                </c:pt>
-                <c:pt idx="1">
-                  <c:v>96711</c:v>
-                </c:pt>
-                <c:pt idx="2">
-                  <c:v>118356</c:v>
-                </c:pt>
-                <c:pt idx="3">
-                  <c:v>144549</c:v>
-                </c:pt>
-                <c:pt idx="4">
-                  <c:v>175134</c:v>
-                </c:pt>
-              </c:numCache>
-              <c:extLst/>
-            </c:numRef>
-          </c:val>
-          <c:extLst>
-            <c:ext xmlns:c16="http://schemas.microsoft.com/office/drawing/2014/chart" uri="{C3380CC4-5D6E-409C-BE32-E72D297353CC}">
-              <c16:uniqueId val="{00000000-A8C8-4EBE-B846-449102666032}"/>
-            </c:ext>
-          </c:extLst>
-        </c:ser>
-        <c:ser>
-          <c:idx val="3"/>
-          <c:order val="3"/>
-          <c:tx>
-            <c:v>Tổng Tài Sản</c:v>
-          </c:tx>
-          <c:spPr>
-            <a:solidFill>
-              <a:schemeClr val="accent4"/>
-            </a:solidFill>
-            <a:ln>
-              <a:noFill/>
-            </a:ln>
-            <a:effectLst/>
-          </c:spPr>
-          <c:invertIfNegative val="0"/>
-          <c:cat>
-            <c:strRef>
-              <c:f>'Bảng cân đối kế toán'!$U$11:$Z$11</c:f>
-              <c:strCache>
-                <c:ptCount val="5"/>
-                <c:pt idx="0">
-                  <c:v>2022</c:v>
-                </c:pt>
-                <c:pt idx="1">
-                  <c:v>2023</c:v>
-                </c:pt>
-                <c:pt idx="2">
-                  <c:v>2024</c:v>
-                </c:pt>
-                <c:pt idx="3">
-                  <c:v>2025</c:v>
-                </c:pt>
-                <c:pt idx="4">
-                  <c:v>2026F</c:v>
-                </c:pt>
-              </c:strCache>
-              <c:extLst/>
-            </c:strRef>
-          </c:cat>
-          <c:val>
-            <c:numRef>
-              <c:f>'Bảng cân đối kế toán'!$U$15:$Z$15</c:f>
-              <c:numCache>
-                <c:formatCode>#,##0.00</c:formatCode>
-                <c:ptCount val="5"/>
-                <c:pt idx="0">
-                  <c:v>728532</c:v>
-                </c:pt>
-                <c:pt idx="1">
-                  <c:v>944954</c:v>
-                </c:pt>
-                <c:pt idx="2">
-                  <c:v>1133797</c:v>
-                </c:pt>
-                <c:pt idx="3">
-                  <c:v>1615764</c:v>
-                </c:pt>
-                <c:pt idx="4">
-                  <c:v>2100000</c:v>
-                </c:pt>
-              </c:numCache>
-              <c:extLst/>
-            </c:numRef>
-          </c:val>
-          <c:extLst>
-            <c:ext xmlns:c16="http://schemas.microsoft.com/office/drawing/2014/chart" uri="{C3380CC4-5D6E-409C-BE32-E72D297353CC}">
-              <c16:uniqueId val="{00000001-A8C8-4EBE-B846-449102666032}"/>
-            </c:ext>
-          </c:extLst>
-        </c:ser>
-        <c:dLbls>
-          <c:showLegendKey val="0"/>
-          <c:showVal val="0"/>
-          <c:showCatName val="0"/>
-          <c:showSerName val="0"/>
-          <c:showPercent val="0"/>
-          <c:showBubbleSize val="0"/>
-        </c:dLbls>
-        <c:gapWidth val="75"/>
-        <c:axId val="1777538735"/>
-        <c:axId val="1777536335"/>
-        <c:extLst>
-          <c:ext xmlns:c15="http://schemas.microsoft.com/office/drawing/2012/chart" uri="{02D57815-91ED-43cb-92C2-25804820EDAC}">
-            <c15:filteredBarSeries>
-              <c15:ser>
-                <c:idx val="1"/>
-                <c:order val="0"/>
-                <c:tx>
-                  <c:v>Vốn Điều Lệ</c:v>
-                </c:tx>
-                <c:spPr>
-                  <a:solidFill>
-                    <a:schemeClr val="accent2"/>
-                  </a:solidFill>
-                  <a:ln>
-                    <a:noFill/>
-                  </a:ln>
-                  <a:effectLst/>
-                </c:spPr>
-                <c:invertIfNegative val="0"/>
-                <c:cat>
-                  <c:strRef>
-                    <c:extLst>
-                      <c:ext uri="{02D57815-91ED-43cb-92C2-25804820EDAC}">
-                        <c15:formulaRef>
-                          <c15:sqref>'Bảng cân đối kế toán'!$U$11:$Z$11</c15:sqref>
-                        </c15:formulaRef>
-                      </c:ext>
-                    </c:extLst>
-                    <c:strCache>
-                      <c:ptCount val="5"/>
-                      <c:pt idx="0">
-                        <c:v>2022</c:v>
-                      </c:pt>
-                      <c:pt idx="1">
-                        <c:v>2023</c:v>
-                      </c:pt>
-                      <c:pt idx="2">
-                        <c:v>2024</c:v>
-                      </c:pt>
-                      <c:pt idx="3">
-                        <c:v>2025</c:v>
-                      </c:pt>
-                      <c:pt idx="4">
-                        <c:v>2026F</c:v>
-                      </c:pt>
-                    </c:strCache>
-                  </c:strRef>
-                </c:cat>
-                <c:val>
-                  <c:numRef>
-                    <c:extLst>
-                      <c:ext uri="{02D57815-91ED-43cb-92C2-25804820EDAC}">
-                        <c15:formulaRef>
-                          <c15:sqref>'Bảng cân đối kế toán'!$U$80:$Z$80</c15:sqref>
-                        </c15:formulaRef>
-                      </c:ext>
-                    </c:extLst>
-                    <c:numCache>
-                      <c:formatCode>#,##0.00</c:formatCode>
-                      <c:ptCount val="5"/>
-                      <c:pt idx="0">
-                        <c:v>45340</c:v>
-                      </c:pt>
-                      <c:pt idx="1">
-                        <c:v>52141</c:v>
-                      </c:pt>
-                      <c:pt idx="2">
-                        <c:v>53063</c:v>
-                      </c:pt>
-                      <c:pt idx="3">
-                        <c:v>80550</c:v>
-                      </c:pt>
-                      <c:pt idx="4">
-                        <c:v>102687</c:v>
-                      </c:pt>
-                    </c:numCache>
-                  </c:numRef>
-                </c:val>
-                <c:extLst>
-                  <c:ext xmlns:c16="http://schemas.microsoft.com/office/drawing/2014/chart" uri="{C3380CC4-5D6E-409C-BE32-E72D297353CC}">
-                    <c16:uniqueId val="{00000006-A8C8-4EBE-B846-449102666032}"/>
-                  </c:ext>
-                </c:extLst>
-              </c15:ser>
-            </c15:filteredBarSeries>
-          </c:ext>
-        </c:extLst>
-      </c:barChart>
-      <c:lineChart>
-        <c:grouping val="standard"/>
-        <c:varyColors val="0"/>
-        <c:ser>
-          <c:idx val="2"/>
-          <c:order val="2"/>
-          <c:tx>
-            <c:strRef>
-              <c:f>'Bảng cân đối kế toán'!$A$81</c:f>
-              <c:strCache>
-                <c:ptCount val="1"/>
-                <c:pt idx="0">
-                  <c:v>Tăng trưởng VCSH (%)</c:v>
-                </c:pt>
-              </c:strCache>
-            </c:strRef>
-          </c:tx>
-          <c:spPr>
-            <a:ln w="28575" cap="rnd">
-              <a:solidFill>
-                <a:srgbClr val="00B0F0"/>
-              </a:solidFill>
-              <a:round/>
-            </a:ln>
-            <a:effectLst/>
-          </c:spPr>
-          <c:marker>
-            <c:symbol val="none"/>
-          </c:marker>
-          <c:dLbls>
-            <c:dLbl>
-              <c:idx val="0"/>
-              <c:layout>
-                <c:manualLayout>
-                  <c:x val="-5.7820869971127925E-2"/>
-                  <c:y val="-4.635804381938799E-2"/>
-                </c:manualLayout>
-              </c:layout>
-              <c:dLblPos val="r"/>
-              <c:showLegendKey val="0"/>
-              <c:showVal val="1"/>
-              <c:showCatName val="0"/>
-              <c:showSerName val="0"/>
-              <c:showPercent val="0"/>
-              <c:showBubbleSize val="0"/>
-              <c:extLst>
-                <c:ext xmlns:c15="http://schemas.microsoft.com/office/drawing/2012/chart" uri="{CE6537A1-D6FC-4f65-9D91-7224C49458BB}"/>
-                <c:ext xmlns:c16="http://schemas.microsoft.com/office/drawing/2014/chart" uri="{C3380CC4-5D6E-409C-BE32-E72D297353CC}">
-                  <c16:uniqueId val="{00000008-A8C8-4EBE-B846-449102666032}"/>
-                </c:ext>
-              </c:extLst>
-            </c:dLbl>
-            <c:dLbl>
-              <c:idx val="2"/>
-              <c:layout>
-                <c:manualLayout>
-                  <c:x val="-3.8021453001759027E-2"/>
-                  <c:y val="-3.2377934103046645E-2"/>
-                </c:manualLayout>
-              </c:layout>
-              <c:dLblPos val="r"/>
-              <c:showLegendKey val="0"/>
-              <c:showVal val="1"/>
-              <c:showCatName val="0"/>
-              <c:showSerName val="0"/>
-              <c:showPercent val="0"/>
-              <c:showBubbleSize val="0"/>
-              <c:extLst>
-                <c:ext xmlns:c15="http://schemas.microsoft.com/office/drawing/2012/chart" uri="{CE6537A1-D6FC-4f65-9D91-7224C49458BB}"/>
-                <c:ext xmlns:c16="http://schemas.microsoft.com/office/drawing/2014/chart" uri="{C3380CC4-5D6E-409C-BE32-E72D297353CC}">
-                  <c16:uniqueId val="{00000007-A8C8-4EBE-B846-449102666032}"/>
-                </c:ext>
-              </c:extLst>
-            </c:dLbl>
-            <c:dLbl>
-              <c:idx val="3"/>
-              <c:layout>
-                <c:manualLayout>
-                  <c:x val="-3.9194526570950836E-2"/>
-                  <c:y val="-6.7240585029063771E-2"/>
-                </c:manualLayout>
-              </c:layout>
-              <c:dLblPos val="r"/>
-              <c:showLegendKey val="0"/>
-              <c:showVal val="1"/>
-              <c:showCatName val="0"/>
-              <c:showSerName val="0"/>
-              <c:showPercent val="0"/>
-              <c:showBubbleSize val="0"/>
-              <c:extLst>
-                <c:ext xmlns:c15="http://schemas.microsoft.com/office/drawing/2012/chart" uri="{CE6537A1-D6FC-4f65-9D91-7224C49458BB}"/>
-                <c:ext xmlns:c16="http://schemas.microsoft.com/office/drawing/2014/chart" uri="{C3380CC4-5D6E-409C-BE32-E72D297353CC}">
-                  <c16:uniqueId val="{00000002-A8C8-4EBE-B846-449102666032}"/>
-                </c:ext>
-              </c:extLst>
-            </c:dLbl>
-            <c:dLbl>
-              <c:idx val="4"/>
-              <c:layout>
-                <c:manualLayout>
-                  <c:x val="-4.284946517574497E-2"/>
-                  <c:y val="-7.8819638421524577E-2"/>
-                </c:manualLayout>
-              </c:layout>
-              <c:dLblPos val="r"/>
-              <c:showLegendKey val="0"/>
-              <c:showVal val="1"/>
-              <c:showCatName val="0"/>
-              <c:showSerName val="0"/>
-              <c:showPercent val="0"/>
-              <c:showBubbleSize val="0"/>
-              <c:extLst>
-                <c:ext xmlns:c15="http://schemas.microsoft.com/office/drawing/2012/chart" uri="{CE6537A1-D6FC-4f65-9D91-7224C49458BB}"/>
-                <c:ext xmlns:c16="http://schemas.microsoft.com/office/drawing/2014/chart" uri="{C3380CC4-5D6E-409C-BE32-E72D297353CC}">
-                  <c16:uniqueId val="{00000003-A8C8-4EBE-B846-449102666032}"/>
-                </c:ext>
-              </c:extLst>
-            </c:dLbl>
-            <c:dLbl>
-              <c:idx val="5"/>
-              <c:layout>
-                <c:manualLayout>
-                  <c:x val="-3.1731465385855424E-2"/>
-                  <c:y val="-2.7373054824596406E-2"/>
-                </c:manualLayout>
-              </c:layout>
-              <c:dLblPos val="r"/>
-              <c:showLegendKey val="0"/>
-              <c:showVal val="1"/>
-              <c:showCatName val="0"/>
-              <c:showSerName val="0"/>
-              <c:showPercent val="0"/>
-              <c:showBubbleSize val="0"/>
-              <c:extLst>
-                <c:ext xmlns:c15="http://schemas.microsoft.com/office/drawing/2012/chart" uri="{CE6537A1-D6FC-4f65-9D91-7224C49458BB}"/>
-                <c:ext xmlns:c16="http://schemas.microsoft.com/office/drawing/2014/chart" uri="{C3380CC4-5D6E-409C-BE32-E72D297353CC}">
-                  <c16:uniqueId val="{00000004-A8C8-4EBE-B846-449102666032}"/>
-                </c:ext>
-              </c:extLst>
-            </c:dLbl>
-            <c:spPr>
-              <a:noFill/>
-              <a:ln>
-                <a:noFill/>
-              </a:ln>
-              <a:effectLst/>
-            </c:spPr>
-            <c:txPr>
-              <a:bodyPr rot="0" spcFirstLastPara="1" vertOverflow="ellipsis" vert="horz" wrap="square" anchor="ctr" anchorCtr="1"/>
-              <a:lstStyle/>
-              <a:p>
-                <a:pPr>
-                  <a:defRPr sz="2000" b="0" i="0" u="none" strike="noStrike" kern="1200" baseline="0">
-                    <a:solidFill>
-                      <a:schemeClr val="tx1">
-                        <a:lumMod val="75000"/>
-                        <a:lumOff val="25000"/>
-                      </a:schemeClr>
-                    </a:solidFill>
-                    <a:latin typeface="SVN-Gilroy" panose="00000500000000000000" pitchFamily="50" charset="0"/>
-                    <a:ea typeface="+mn-ea"/>
-                    <a:cs typeface="+mn-cs"/>
-                  </a:defRPr>
-                </a:pPr>
-                <a:endParaRPr lang="en-US"/>
-              </a:p>
-            </c:txPr>
-            <c:dLblPos val="t"/>
-            <c:showLegendKey val="0"/>
-            <c:showVal val="1"/>
-            <c:showCatName val="0"/>
-            <c:showSerName val="0"/>
-            <c:showPercent val="0"/>
-            <c:showBubbleSize val="0"/>
-            <c:showLeaderLines val="0"/>
-            <c:extLst>
-              <c:ext xmlns:c15="http://schemas.microsoft.com/office/drawing/2012/chart" uri="{CE6537A1-D6FC-4f65-9D91-7224C49458BB}">
-                <c15:showLeaderLines val="1"/>
-                <c15:leaderLines>
-                  <c:spPr>
-                    <a:ln w="9525" cap="flat" cmpd="sng" algn="ctr">
-                      <a:solidFill>
-                        <a:schemeClr val="tx1">
-                          <a:lumMod val="35000"/>
-                          <a:lumOff val="65000"/>
-                        </a:schemeClr>
-                      </a:solidFill>
-                      <a:round/>
-                    </a:ln>
-                    <a:effectLst/>
-                  </c:spPr>
-                </c15:leaderLines>
-              </c:ext>
-            </c:extLst>
-          </c:dLbls>
-          <c:cat>
-            <c:strRef>
-              <c:f>'Bảng cân đối kế toán'!$U$11:$Z$11</c:f>
-              <c:strCache>
-                <c:ptCount val="5"/>
-                <c:pt idx="0">
-                  <c:v>2022</c:v>
-                </c:pt>
-                <c:pt idx="1">
-                  <c:v>2023</c:v>
-                </c:pt>
-                <c:pt idx="2">
-                  <c:v>2024</c:v>
-                </c:pt>
-                <c:pt idx="3">
-                  <c:v>2025</c:v>
-                </c:pt>
-                <c:pt idx="4">
-                  <c:v>2026F</c:v>
-                </c:pt>
-              </c:strCache>
-              <c:extLst/>
-            </c:strRef>
-          </c:cat>
-          <c:val>
-            <c:numRef>
-              <c:f>'Bảng cân đối kế toán'!$U$81:$Z$81</c:f>
-              <c:numCache>
-                <c:formatCode>0.0%</c:formatCode>
-                <c:ptCount val="5"/>
-                <c:pt idx="0">
-                  <c:v>0.274</c:v>
-                </c:pt>
-                <c:pt idx="1">
-                  <c:v>0.215</c:v>
-                </c:pt>
-                <c:pt idx="2">
-                  <c:v>0.224</c:v>
-                </c:pt>
-                <c:pt idx="3">
-                  <c:v>0.221</c:v>
-                </c:pt>
-                <c:pt idx="4">
-                  <c:v>0.212</c:v>
-                </c:pt>
-              </c:numCache>
-              <c:extLst/>
-            </c:numRef>
-          </c:val>
-          <c:smooth val="0"/>
-          <c:extLst>
-            <c:ext xmlns:c16="http://schemas.microsoft.com/office/drawing/2014/chart" uri="{C3380CC4-5D6E-409C-BE32-E72D297353CC}">
-              <c16:uniqueId val="{00000005-A8C8-4EBE-B846-449102666032}"/>
-            </c:ext>
-          </c:extLst>
-        </c:ser>
-        <c:dLbls>
-          <c:showLegendKey val="0"/>
-          <c:showVal val="1"/>
-          <c:showCatName val="0"/>
-          <c:showSerName val="0"/>
-          <c:showPercent val="0"/>
-          <c:showBubbleSize val="0"/>
-        </c:dLbls>
-        <c:marker val="1"/>
-        <c:smooth val="0"/>
-        <c:axId val="1777533935"/>
-        <c:axId val="1777535375"/>
-      </c:lineChart>
-      <c:catAx>
-        <c:axId val="1777538735"/>
-        <c:scaling>
-          <c:orientation val="minMax"/>
-        </c:scaling>
-        <c:delete val="0"/>
-        <c:axPos val="b"/>
-        <c:numFmt formatCode="General" sourceLinked="1"/>
-        <c:majorTickMark val="none"/>
-        <c:minorTickMark val="none"/>
-        <c:tickLblPos val="nextTo"/>
-        <c:spPr>
-          <a:noFill/>
-          <a:ln w="9525" cap="flat" cmpd="sng" algn="ctr">
-            <a:solidFill>
-              <a:schemeClr val="tx1">
-                <a:lumMod val="15000"/>
-                <a:lumOff val="85000"/>
-              </a:schemeClr>
-            </a:solidFill>
-            <a:round/>
-          </a:ln>
-          <a:effectLst/>
-        </c:spPr>
-        <c:txPr>
-          <a:bodyPr rot="-60000000" spcFirstLastPara="1" vertOverflow="ellipsis" vert="horz" wrap="square" anchor="ctr" anchorCtr="1"/>
-          <a:lstStyle/>
-          <a:p>
-            <a:pPr>
-              <a:defRPr sz="2000" b="0" i="0" u="none" strike="noStrike" kern="1200" baseline="0">
-                <a:solidFill>
-                  <a:schemeClr val="tx1">
-                    <a:lumMod val="65000"/>
-                    <a:lumOff val="35000"/>
-                  </a:schemeClr>
-                </a:solidFill>
-                <a:latin typeface="SVN-Gilroy" panose="00000500000000000000" pitchFamily="50" charset="0"/>
-                <a:ea typeface="+mn-ea"/>
-                <a:cs typeface="+mn-cs"/>
-              </a:defRPr>
-            </a:pPr>
-            <a:endParaRPr lang="en-US"/>
-          </a:p>
-        </c:txPr>
-        <c:crossAx val="1777536335"/>
-        <c:crosses val="autoZero"/>
-        <c:auto val="1"/>
-        <c:lblAlgn val="ctr"/>
-        <c:lblOffset val="100"/>
-        <c:noMultiLvlLbl val="0"/>
-      </c:catAx>
-      <c:valAx>
-        <c:axId val="1777536335"/>
-        <c:scaling>
-          <c:orientation val="minMax"/>
-        </c:scaling>
-        <c:delete val="0"/>
-        <c:axPos val="l"/>
-        <c:numFmt formatCode="#,##0" sourceLinked="0"/>
-        <c:majorTickMark val="none"/>
-        <c:minorTickMark val="none"/>
-        <c:tickLblPos val="nextTo"/>
-        <c:spPr>
-          <a:noFill/>
-          <a:ln>
-            <a:noFill/>
-          </a:ln>
-          <a:effectLst/>
-        </c:spPr>
-        <c:txPr>
-          <a:bodyPr rot="-60000000" spcFirstLastPara="1" vertOverflow="ellipsis" vert="horz" wrap="square" anchor="ctr" anchorCtr="1"/>
-          <a:lstStyle/>
-          <a:p>
-            <a:pPr>
-              <a:defRPr sz="2000" b="0" i="0" u="none" strike="noStrike" kern="1200" baseline="0">
-                <a:solidFill>
-                  <a:schemeClr val="tx1">
-                    <a:lumMod val="65000"/>
-                    <a:lumOff val="35000"/>
-                  </a:schemeClr>
-                </a:solidFill>
-                <a:latin typeface="SVN-Gilroy" panose="00000500000000000000" pitchFamily="50" charset="0"/>
-                <a:ea typeface="+mn-ea"/>
-                <a:cs typeface="+mn-cs"/>
-              </a:defRPr>
-            </a:pPr>
-            <a:endParaRPr lang="en-US"/>
-          </a:p>
-        </c:txPr>
-        <c:crossAx val="1777538735"/>
-        <c:crosses val="autoZero"/>
-        <c:crossBetween val="between"/>
-      </c:valAx>
-      <c:valAx>
-        <c:axId val="1777535375"/>
-        <c:scaling>
-          <c:orientation val="minMax"/>
-        </c:scaling>
-        <c:delete val="0"/>
-        <c:axPos val="r"/>
-        <c:numFmt formatCode="0%" sourceLinked="0"/>
-        <c:majorTickMark val="out"/>
-        <c:minorTickMark val="none"/>
-        <c:tickLblPos val="nextTo"/>
-        <c:spPr>
-          <a:noFill/>
-          <a:ln>
-            <a:noFill/>
-          </a:ln>
-          <a:effectLst/>
-        </c:spPr>
-        <c:txPr>
-          <a:bodyPr rot="-60000000" spcFirstLastPara="1" vertOverflow="ellipsis" vert="horz" wrap="square" anchor="ctr" anchorCtr="1"/>
-          <a:lstStyle/>
-          <a:p>
-            <a:pPr>
-              <a:defRPr sz="2000" b="0" i="0" u="none" strike="noStrike" kern="1200" baseline="0">
-                <a:solidFill>
-                  <a:schemeClr val="tx1">
-                    <a:lumMod val="65000"/>
-                    <a:lumOff val="35000"/>
-                  </a:schemeClr>
-                </a:solidFill>
-                <a:latin typeface="SVN-Gilroy" panose="00000500000000000000" pitchFamily="50" charset="0"/>
-                <a:ea typeface="+mn-ea"/>
-                <a:cs typeface="+mn-cs"/>
-              </a:defRPr>
-            </a:pPr>
-            <a:endParaRPr lang="en-US"/>
-          </a:p>
-        </c:txPr>
-        <c:crossAx val="1777533935"/>
-        <c:crosses val="max"/>
-        <c:crossBetween val="between"/>
-      </c:valAx>
-      <c:catAx>
-        <c:axId val="1777533935"/>
-        <c:scaling>
-          <c:orientation val="minMax"/>
-        </c:scaling>
-        <c:delete val="1"/>
-        <c:axPos val="b"/>
-        <c:numFmt formatCode="General" sourceLinked="1"/>
-        <c:majorTickMark val="out"/>
-        <c:minorTickMark val="none"/>
-        <c:tickLblPos val="nextTo"/>
-        <c:crossAx val="1777535375"/>
-        <c:crosses val="autoZero"/>
-        <c:auto val="1"/>
-        <c:lblAlgn val="ctr"/>
-        <c:lblOffset val="100"/>
-        <c:noMultiLvlLbl val="0"/>
-      </c:catAx>
-      <c:spPr>
-        <a:noFill/>
-        <a:ln>
-          <a:noFill/>
-        </a:ln>
-        <a:effectLst/>
-      </c:spPr>
-    </c:plotArea>
-    <c:legend>
-      <c:legendPos val="b"/>
-      <c:layout>
-        <c:manualLayout>
-          <c:xMode val="edge"/>
-          <c:yMode val="edge"/>
-          <c:x val="7.067939680704562E-4"/>
-          <c:y val="0.89671386619055182"/>
-          <c:w val="0.9992932060319295"/>
-          <c:h val="8.465192114669369E-2"/>
-        </c:manualLayout>
-      </c:layout>
-      <c:overlay val="0"/>
-      <c:spPr>
-        <a:noFill/>
-        <a:ln>
-          <a:noFill/>
-        </a:ln>
-        <a:effectLst/>
-      </c:spPr>
-      <c:txPr>
-        <a:bodyPr rot="0" spcFirstLastPara="1" vertOverflow="ellipsis" vert="horz" wrap="square" anchor="ctr" anchorCtr="1"/>
-        <a:lstStyle/>
-        <a:p>
-          <a:pPr>
-            <a:defRPr sz="2000" b="0" i="0" u="none" strike="noStrike" kern="1200" baseline="0">
-              <a:solidFill>
-                <a:schemeClr val="tx1">
-                  <a:lumMod val="65000"/>
-                  <a:lumOff val="35000"/>
-                </a:schemeClr>
-              </a:solidFill>
-              <a:latin typeface="SVN-Gilroy" panose="00000500000000000000" pitchFamily="50" charset="0"/>
-              <a:ea typeface="+mn-ea"/>
-              <a:cs typeface="+mn-cs"/>
-            </a:defRPr>
-          </a:pPr>
-          <a:endParaRPr lang="en-US"/>
-        </a:p>
-      </c:txPr>
-    </c:legend>
-    <c:plotVisOnly val="1"/>
-    <c:dispBlanksAs val="gap"/>
-    <c:showDLblsOverMax val="0"/>
-  </c:chart>
-  <c:spPr>
-    <a:noFill/>
-    <a:ln>
-      <a:noFill/>
-    </a:ln>
-    <a:effectLst/>
-  </c:spPr>
-  <c:txPr>
-    <a:bodyPr/>
-    <a:lstStyle/>
-    <a:p>
-      <a:pPr>
-        <a:defRPr sz="2000">
-          <a:latin typeface="SVN-Gilroy" panose="00000500000000000000" pitchFamily="50" charset="0"/>
-        </a:defRPr>
-      </a:pPr>
-      <a:endParaRPr lang="en-US"/>
-    </a:p>
-  </c:txPr>
-  <c:externalData r:id="rId3">
-    <c:autoUpdate val="0"/>
-  </c:externalData>
-</c:chartSpace>
 </file>
 
 <file path=ppt/charts/chart2.xml><?xml version="1.0" encoding="utf-8"?>
@@ -1336,46 +494,6 @@
 </c:chartSpace>
 </file>
 
-<file path=ppt/charts/colors1.xml><?xml version="1.0" encoding="utf-8"?>
-<cs:colorStyle xmlns:cs="http://schemas.microsoft.com/office/drawing/2012/chartStyle" xmlns:a="http://schemas.openxmlformats.org/drawingml/2006/main" meth="cycle" id="10">
-  <a:schemeClr val="accent1"/>
-  <a:schemeClr val="accent2"/>
-  <a:schemeClr val="accent3"/>
-  <a:schemeClr val="accent4"/>
-  <a:schemeClr val="accent5"/>
-  <a:schemeClr val="accent6"/>
-  <cs:variation/>
-  <cs:variation>
-    <a:lumMod val="60000"/>
-  </cs:variation>
-  <cs:variation>
-    <a:lumMod val="80000"/>
-    <a:lumOff val="20000"/>
-  </cs:variation>
-  <cs:variation>
-    <a:lumMod val="80000"/>
-  </cs:variation>
-  <cs:variation>
-    <a:lumMod val="60000"/>
-    <a:lumOff val="40000"/>
-  </cs:variation>
-  <cs:variation>
-    <a:lumMod val="50000"/>
-  </cs:variation>
-  <cs:variation>
-    <a:lumMod val="70000"/>
-    <a:lumOff val="30000"/>
-  </cs:variation>
-  <cs:variation>
-    <a:lumMod val="70000"/>
-  </cs:variation>
-  <cs:variation>
-    <a:lumMod val="50000"/>
-    <a:lumOff val="50000"/>
-  </cs:variation>
-</cs:colorStyle>
-</file>
-
 <file path=ppt/charts/colors2.xml><?xml version="1.0" encoding="utf-8"?>
 <cs:colorStyle xmlns:cs="http://schemas.microsoft.com/office/drawing/2012/chartStyle" xmlns:a="http://schemas.openxmlformats.org/drawingml/2006/main" meth="cycle" id="10">
   <a:schemeClr val="accent1"/>
@@ -1414,509 +532,6 @@
     <a:lumOff val="50000"/>
   </cs:variation>
 </cs:colorStyle>
-</file>
-
-<file path=ppt/charts/style1.xml><?xml version="1.0" encoding="utf-8"?>
-<cs:chartStyle xmlns:cs="http://schemas.microsoft.com/office/drawing/2012/chartStyle" xmlns:a="http://schemas.openxmlformats.org/drawingml/2006/main" id="201">
-  <cs:axisTitle>
-    <cs:lnRef idx="0"/>
-    <cs:fillRef idx="0"/>
-    <cs:effectRef idx="0"/>
-    <cs:fontRef idx="minor">
-      <a:schemeClr val="tx1">
-        <a:lumMod val="65000"/>
-        <a:lumOff val="35000"/>
-      </a:schemeClr>
-    </cs:fontRef>
-    <cs:defRPr sz="1000" kern="1200"/>
-  </cs:axisTitle>
-  <cs:categoryAxis>
-    <cs:lnRef idx="0"/>
-    <cs:fillRef idx="0"/>
-    <cs:effectRef idx="0"/>
-    <cs:fontRef idx="minor">
-      <a:schemeClr val="tx1">
-        <a:lumMod val="65000"/>
-        <a:lumOff val="35000"/>
-      </a:schemeClr>
-    </cs:fontRef>
-    <cs:spPr>
-      <a:ln w="9525" cap="flat" cmpd="sng" algn="ctr">
-        <a:solidFill>
-          <a:schemeClr val="tx1">
-            <a:lumMod val="15000"/>
-            <a:lumOff val="85000"/>
-          </a:schemeClr>
-        </a:solidFill>
-        <a:round/>
-      </a:ln>
-    </cs:spPr>
-    <cs:defRPr sz="900" kern="1200"/>
-  </cs:categoryAxis>
-  <cs:chartArea mods="allowNoFillOverride allowNoLineOverride">
-    <cs:lnRef idx="0"/>
-    <cs:fillRef idx="0"/>
-    <cs:effectRef idx="0"/>
-    <cs:fontRef idx="minor">
-      <a:schemeClr val="tx1"/>
-    </cs:fontRef>
-    <cs:spPr>
-      <a:solidFill>
-        <a:schemeClr val="bg1"/>
-      </a:solidFill>
-      <a:ln w="9525" cap="flat" cmpd="sng" algn="ctr">
-        <a:solidFill>
-          <a:schemeClr val="tx1">
-            <a:lumMod val="15000"/>
-            <a:lumOff val="85000"/>
-          </a:schemeClr>
-        </a:solidFill>
-        <a:round/>
-      </a:ln>
-    </cs:spPr>
-    <cs:defRPr sz="1000" kern="1200"/>
-  </cs:chartArea>
-  <cs:dataLabel>
-    <cs:lnRef idx="0"/>
-    <cs:fillRef idx="0"/>
-    <cs:effectRef idx="0"/>
-    <cs:fontRef idx="minor">
-      <a:schemeClr val="tx1">
-        <a:lumMod val="75000"/>
-        <a:lumOff val="25000"/>
-      </a:schemeClr>
-    </cs:fontRef>
-    <cs:defRPr sz="900" kern="1200"/>
-  </cs:dataLabel>
-  <cs:dataLabelCallout>
-    <cs:lnRef idx="0"/>
-    <cs:fillRef idx="0"/>
-    <cs:effectRef idx="0"/>
-    <cs:fontRef idx="minor">
-      <a:schemeClr val="dk1">
-        <a:lumMod val="65000"/>
-        <a:lumOff val="35000"/>
-      </a:schemeClr>
-    </cs:fontRef>
-    <cs:spPr>
-      <a:solidFill>
-        <a:schemeClr val="lt1"/>
-      </a:solidFill>
-      <a:ln>
-        <a:solidFill>
-          <a:schemeClr val="dk1">
-            <a:lumMod val="25000"/>
-            <a:lumOff val="75000"/>
-          </a:schemeClr>
-        </a:solidFill>
-      </a:ln>
-    </cs:spPr>
-    <cs:defRPr sz="900" kern="1200"/>
-    <cs:bodyPr rot="0" spcFirstLastPara="1" vertOverflow="clip" horzOverflow="clip" vert="horz" wrap="square" lIns="36576" tIns="18288" rIns="36576" bIns="18288" anchor="ctr" anchorCtr="1">
-      <a:spAutoFit/>
-    </cs:bodyPr>
-  </cs:dataLabelCallout>
-  <cs:dataPoint>
-    <cs:lnRef idx="0"/>
-    <cs:fillRef idx="1">
-      <cs:styleClr val="auto"/>
-    </cs:fillRef>
-    <cs:effectRef idx="0"/>
-    <cs:fontRef idx="minor">
-      <a:schemeClr val="tx1"/>
-    </cs:fontRef>
-  </cs:dataPoint>
-  <cs:dataPoint3D>
-    <cs:lnRef idx="0"/>
-    <cs:fillRef idx="1">
-      <cs:styleClr val="auto"/>
-    </cs:fillRef>
-    <cs:effectRef idx="0"/>
-    <cs:fontRef idx="minor">
-      <a:schemeClr val="tx1"/>
-    </cs:fontRef>
-  </cs:dataPoint3D>
-  <cs:dataPointLine>
-    <cs:lnRef idx="0">
-      <cs:styleClr val="auto"/>
-    </cs:lnRef>
-    <cs:fillRef idx="1"/>
-    <cs:effectRef idx="0"/>
-    <cs:fontRef idx="minor">
-      <a:schemeClr val="tx1"/>
-    </cs:fontRef>
-    <cs:spPr>
-      <a:ln w="28575" cap="rnd">
-        <a:solidFill>
-          <a:schemeClr val="phClr"/>
-        </a:solidFill>
-        <a:round/>
-      </a:ln>
-    </cs:spPr>
-  </cs:dataPointLine>
-  <cs:dataPointMarker>
-    <cs:lnRef idx="0">
-      <cs:styleClr val="auto"/>
-    </cs:lnRef>
-    <cs:fillRef idx="1">
-      <cs:styleClr val="auto"/>
-    </cs:fillRef>
-    <cs:effectRef idx="0"/>
-    <cs:fontRef idx="minor">
-      <a:schemeClr val="tx1"/>
-    </cs:fontRef>
-    <cs:spPr>
-      <a:ln w="9525">
-        <a:solidFill>
-          <a:schemeClr val="phClr"/>
-        </a:solidFill>
-      </a:ln>
-    </cs:spPr>
-  </cs:dataPointMarker>
-  <cs:dataPointMarkerLayout symbol="circle" size="5"/>
-  <cs:dataPointWireframe>
-    <cs:lnRef idx="0">
-      <cs:styleClr val="auto"/>
-    </cs:lnRef>
-    <cs:fillRef idx="1"/>
-    <cs:effectRef idx="0"/>
-    <cs:fontRef idx="minor">
-      <a:schemeClr val="tx1"/>
-    </cs:fontRef>
-    <cs:spPr>
-      <a:ln w="9525" cap="rnd">
-        <a:solidFill>
-          <a:schemeClr val="phClr"/>
-        </a:solidFill>
-        <a:round/>
-      </a:ln>
-    </cs:spPr>
-  </cs:dataPointWireframe>
-  <cs:dataTable>
-    <cs:lnRef idx="0"/>
-    <cs:fillRef idx="0"/>
-    <cs:effectRef idx="0"/>
-    <cs:fontRef idx="minor">
-      <a:schemeClr val="tx1">
-        <a:lumMod val="65000"/>
-        <a:lumOff val="35000"/>
-      </a:schemeClr>
-    </cs:fontRef>
-    <cs:spPr>
-      <a:noFill/>
-      <a:ln w="9525" cap="flat" cmpd="sng" algn="ctr">
-        <a:solidFill>
-          <a:schemeClr val="tx1">
-            <a:lumMod val="15000"/>
-            <a:lumOff val="85000"/>
-          </a:schemeClr>
-        </a:solidFill>
-        <a:round/>
-      </a:ln>
-    </cs:spPr>
-    <cs:defRPr sz="900" kern="1200"/>
-  </cs:dataTable>
-  <cs:downBar>
-    <cs:lnRef idx="0"/>
-    <cs:fillRef idx="0"/>
-    <cs:effectRef idx="0"/>
-    <cs:fontRef idx="minor">
-      <a:schemeClr val="dk1"/>
-    </cs:fontRef>
-    <cs:spPr>
-      <a:solidFill>
-        <a:schemeClr val="dk1">
-          <a:lumMod val="65000"/>
-          <a:lumOff val="35000"/>
-        </a:schemeClr>
-      </a:solidFill>
-      <a:ln w="9525">
-        <a:solidFill>
-          <a:schemeClr val="tx1">
-            <a:lumMod val="65000"/>
-            <a:lumOff val="35000"/>
-          </a:schemeClr>
-        </a:solidFill>
-      </a:ln>
-    </cs:spPr>
-  </cs:downBar>
-  <cs:dropLine>
-    <cs:lnRef idx="0"/>
-    <cs:fillRef idx="0"/>
-    <cs:effectRef idx="0"/>
-    <cs:fontRef idx="minor">
-      <a:schemeClr val="tx1"/>
-    </cs:fontRef>
-    <cs:spPr>
-      <a:ln w="9525" cap="flat" cmpd="sng" algn="ctr">
-        <a:solidFill>
-          <a:schemeClr val="tx1">
-            <a:lumMod val="35000"/>
-            <a:lumOff val="65000"/>
-          </a:schemeClr>
-        </a:solidFill>
-        <a:round/>
-      </a:ln>
-    </cs:spPr>
-  </cs:dropLine>
-  <cs:errorBar>
-    <cs:lnRef idx="0"/>
-    <cs:fillRef idx="0"/>
-    <cs:effectRef idx="0"/>
-    <cs:fontRef idx="minor">
-      <a:schemeClr val="tx1"/>
-    </cs:fontRef>
-    <cs:spPr>
-      <a:ln w="9525" cap="flat" cmpd="sng" algn="ctr">
-        <a:solidFill>
-          <a:schemeClr val="tx1">
-            <a:lumMod val="65000"/>
-            <a:lumOff val="35000"/>
-          </a:schemeClr>
-        </a:solidFill>
-        <a:round/>
-      </a:ln>
-    </cs:spPr>
-  </cs:errorBar>
-  <cs:floor>
-    <cs:lnRef idx="0"/>
-    <cs:fillRef idx="0"/>
-    <cs:effectRef idx="0"/>
-    <cs:fontRef idx="minor">
-      <a:schemeClr val="tx1"/>
-    </cs:fontRef>
-    <cs:spPr>
-      <a:noFill/>
-      <a:ln>
-        <a:noFill/>
-      </a:ln>
-    </cs:spPr>
-  </cs:floor>
-  <cs:gridlineMajor>
-    <cs:lnRef idx="0"/>
-    <cs:fillRef idx="0"/>
-    <cs:effectRef idx="0"/>
-    <cs:fontRef idx="minor">
-      <a:schemeClr val="tx1"/>
-    </cs:fontRef>
-    <cs:spPr>
-      <a:ln w="9525" cap="flat" cmpd="sng" algn="ctr">
-        <a:solidFill>
-          <a:schemeClr val="tx1">
-            <a:lumMod val="15000"/>
-            <a:lumOff val="85000"/>
-          </a:schemeClr>
-        </a:solidFill>
-        <a:round/>
-      </a:ln>
-    </cs:spPr>
-  </cs:gridlineMajor>
-  <cs:gridlineMinor>
-    <cs:lnRef idx="0"/>
-    <cs:fillRef idx="0"/>
-    <cs:effectRef idx="0"/>
-    <cs:fontRef idx="minor">
-      <a:schemeClr val="tx1"/>
-    </cs:fontRef>
-    <cs:spPr>
-      <a:ln w="9525" cap="flat" cmpd="sng" algn="ctr">
-        <a:solidFill>
-          <a:schemeClr val="tx1">
-            <a:lumMod val="5000"/>
-            <a:lumOff val="95000"/>
-          </a:schemeClr>
-        </a:solidFill>
-        <a:round/>
-      </a:ln>
-    </cs:spPr>
-  </cs:gridlineMinor>
-  <cs:hiLoLine>
-    <cs:lnRef idx="0"/>
-    <cs:fillRef idx="0"/>
-    <cs:effectRef idx="0"/>
-    <cs:fontRef idx="minor">
-      <a:schemeClr val="tx1"/>
-    </cs:fontRef>
-    <cs:spPr>
-      <a:ln w="9525" cap="flat" cmpd="sng" algn="ctr">
-        <a:solidFill>
-          <a:schemeClr val="tx1">
-            <a:lumMod val="75000"/>
-            <a:lumOff val="25000"/>
-          </a:schemeClr>
-        </a:solidFill>
-        <a:round/>
-      </a:ln>
-    </cs:spPr>
-  </cs:hiLoLine>
-  <cs:leaderLine>
-    <cs:lnRef idx="0"/>
-    <cs:fillRef idx="0"/>
-    <cs:effectRef idx="0"/>
-    <cs:fontRef idx="minor">
-      <a:schemeClr val="tx1"/>
-    </cs:fontRef>
-    <cs:spPr>
-      <a:ln w="9525" cap="flat" cmpd="sng" algn="ctr">
-        <a:solidFill>
-          <a:schemeClr val="tx1">
-            <a:lumMod val="35000"/>
-            <a:lumOff val="65000"/>
-          </a:schemeClr>
-        </a:solidFill>
-        <a:round/>
-      </a:ln>
-    </cs:spPr>
-  </cs:leaderLine>
-  <cs:legend>
-    <cs:lnRef idx="0"/>
-    <cs:fillRef idx="0"/>
-    <cs:effectRef idx="0"/>
-    <cs:fontRef idx="minor">
-      <a:schemeClr val="tx1">
-        <a:lumMod val="65000"/>
-        <a:lumOff val="35000"/>
-      </a:schemeClr>
-    </cs:fontRef>
-    <cs:defRPr sz="900" kern="1200"/>
-  </cs:legend>
-  <cs:plotArea mods="allowNoFillOverride allowNoLineOverride">
-    <cs:lnRef idx="0"/>
-    <cs:fillRef idx="0"/>
-    <cs:effectRef idx="0"/>
-    <cs:fontRef idx="minor">
-      <a:schemeClr val="tx1"/>
-    </cs:fontRef>
-  </cs:plotArea>
-  <cs:plotArea3D mods="allowNoFillOverride allowNoLineOverride">
-    <cs:lnRef idx="0"/>
-    <cs:fillRef idx="0"/>
-    <cs:effectRef idx="0"/>
-    <cs:fontRef idx="minor">
-      <a:schemeClr val="tx1"/>
-    </cs:fontRef>
-  </cs:plotArea3D>
-  <cs:seriesAxis>
-    <cs:lnRef idx="0"/>
-    <cs:fillRef idx="0"/>
-    <cs:effectRef idx="0"/>
-    <cs:fontRef idx="minor">
-      <a:schemeClr val="tx1">
-        <a:lumMod val="65000"/>
-        <a:lumOff val="35000"/>
-      </a:schemeClr>
-    </cs:fontRef>
-    <cs:defRPr sz="900" kern="1200"/>
-  </cs:seriesAxis>
-  <cs:seriesLine>
-    <cs:lnRef idx="0"/>
-    <cs:fillRef idx="0"/>
-    <cs:effectRef idx="0"/>
-    <cs:fontRef idx="minor">
-      <a:schemeClr val="tx1"/>
-    </cs:fontRef>
-    <cs:spPr>
-      <a:ln w="9525" cap="flat" cmpd="sng" algn="ctr">
-        <a:solidFill>
-          <a:schemeClr val="tx1">
-            <a:lumMod val="35000"/>
-            <a:lumOff val="65000"/>
-          </a:schemeClr>
-        </a:solidFill>
-        <a:round/>
-      </a:ln>
-    </cs:spPr>
-  </cs:seriesLine>
-  <cs:title>
-    <cs:lnRef idx="0"/>
-    <cs:fillRef idx="0"/>
-    <cs:effectRef idx="0"/>
-    <cs:fontRef idx="minor">
-      <a:schemeClr val="tx1">
-        <a:lumMod val="65000"/>
-        <a:lumOff val="35000"/>
-      </a:schemeClr>
-    </cs:fontRef>
-    <cs:defRPr sz="1400" b="0" kern="1200" spc="0" baseline="0"/>
-  </cs:title>
-  <cs:trendline>
-    <cs:lnRef idx="0">
-      <cs:styleClr val="auto"/>
-    </cs:lnRef>
-    <cs:fillRef idx="0"/>
-    <cs:effectRef idx="0"/>
-    <cs:fontRef idx="minor">
-      <a:schemeClr val="tx1"/>
-    </cs:fontRef>
-    <cs:spPr>
-      <a:ln w="19050" cap="rnd">
-        <a:solidFill>
-          <a:schemeClr val="phClr"/>
-        </a:solidFill>
-        <a:prstDash val="sysDot"/>
-      </a:ln>
-    </cs:spPr>
-  </cs:trendline>
-  <cs:trendlineLabel>
-    <cs:lnRef idx="0"/>
-    <cs:fillRef idx="0"/>
-    <cs:effectRef idx="0"/>
-    <cs:fontRef idx="minor">
-      <a:schemeClr val="tx1">
-        <a:lumMod val="65000"/>
-        <a:lumOff val="35000"/>
-      </a:schemeClr>
-    </cs:fontRef>
-    <cs:defRPr sz="900" kern="1200"/>
-  </cs:trendlineLabel>
-  <cs:upBar>
-    <cs:lnRef idx="0"/>
-    <cs:fillRef idx="0"/>
-    <cs:effectRef idx="0"/>
-    <cs:fontRef idx="minor">
-      <a:schemeClr val="dk1"/>
-    </cs:fontRef>
-    <cs:spPr>
-      <a:solidFill>
-        <a:schemeClr val="lt1"/>
-      </a:solidFill>
-      <a:ln w="9525">
-        <a:solidFill>
-          <a:schemeClr val="tx1">
-            <a:lumMod val="15000"/>
-            <a:lumOff val="85000"/>
-          </a:schemeClr>
-        </a:solidFill>
-      </a:ln>
-    </cs:spPr>
-  </cs:upBar>
-  <cs:valueAxis>
-    <cs:lnRef idx="0"/>
-    <cs:fillRef idx="0"/>
-    <cs:effectRef idx="0"/>
-    <cs:fontRef idx="minor">
-      <a:schemeClr val="tx1">
-        <a:lumMod val="65000"/>
-        <a:lumOff val="35000"/>
-      </a:schemeClr>
-    </cs:fontRef>
-    <cs:defRPr sz="900" kern="1200"/>
-  </cs:valueAxis>
-  <cs:wall>
-    <cs:lnRef idx="0"/>
-    <cs:fillRef idx="0"/>
-    <cs:effectRef idx="0"/>
-    <cs:fontRef idx="minor">
-      <a:schemeClr val="tx1"/>
-    </cs:fontRef>
-    <cs:spPr>
-      <a:noFill/>
-      <a:ln>
-        <a:noFill/>
-      </a:ln>
-    </cs:spPr>
-  </cs:wall>
-</cs:chartStyle>
 </file>
 
 <file path=ppt/charts/style2.xml><?xml version="1.0" encoding="utf-8"?>
@@ -2595,7 +1210,7 @@
           <a:p>
             <a:r>
               <a:rPr lang="en-US"/>
-              <a:t>MBB đang được định giá đúng, hay thị trường chưa trả đủ cho ngân hàng có chi phí vốn rẻ nhất? P/B dự phóng 2026 ~1,2x đi cùng ROE trên 21%.</a:t>
+              <a:t>MBB đang được định giá đúng, hay thị trường chưa trả đủ cho ngân hàng có chi phí vốn rẻ nhất? P/B dự phóng 2026 ~1,2x đi cùng ROE 21,1%.</a:t>
             </a:r>
           </a:p>
         </p:txBody>
@@ -2682,7 +1297,7 @@
           <a:p>
             <a:r>
               <a:rPr lang="en-US"/>
-              <a:t>P/B dự phóng 2026 ~1,2x trên ROE trên 21%. CASA ~38% cuối 2025, cao nhất hệ thống. LNTT 2026 dự phóng 40.726 tỷ, tăng 18,8% so với cùng kỳ.</a:t>
+              <a:t>Ba lý do: P/B dự phóng 2026 ~1,2x trên ROE 21,1%; CASA ~38% cuối 2025 dẫn đầu hệ thống; room tín dụng 30-35% nhờ nhận chuyển giao MBV.</a:t>
             </a:r>
           </a:p>
         </p:txBody>
@@ -2705,204 +1320,6 @@
             <a:fld id="{F7021451-1387-4CA6-816F-3879F97B5CBC}" type="slidenum">
               <a:rPr lang="en-US"/>
               <a:t>2</a:t>
-            </a:fld>
-            <a:endParaRPr lang="en-US"/>
-          </a:p>
-        </p:txBody>
-      </p:sp>
-    </p:spTree>
-    <p:extLst>
-      <p:ext uri="{BB962C8B-B14F-4D97-AF65-F5344CB8AC3E}">
-        <p14:creationId xmlns:p14="http://schemas.microsoft.com/office/powerpoint/2010/main" val="1024086991"/>
-      </p:ext>
-    </p:extLst>
-  </p:cSld>
-  <p:clrMapOvr>
-    <a:masterClrMapping/>
-  </p:clrMapOvr>
-</p:notes>
-</file>
-
-<file path=ppt/notesSlides/notesSlide3.xml><?xml version="1.0" encoding="utf-8"?>
-<p:notes xmlns:a="http://schemas.openxmlformats.org/drawingml/2006/main" xmlns:r="http://schemas.openxmlformats.org/officeDocument/2006/relationships" xmlns:p="http://schemas.openxmlformats.org/presentationml/2006/main">
-  <p:cSld>
-    <p:spTree>
-      <p:nvGrpSpPr>
-        <p:cNvPr id="1" name="">
-          <a:extLst>
-            <a:ext uri="{FF2B5EF4-FFF2-40B4-BE49-F238E27FC236}">
-              <a16:creationId xmlns:a16="http://schemas.microsoft.com/office/drawing/2014/main" id="{18C6DC42-0573-292F-026B-3AF257B721BA}"/>
-            </a:ext>
-          </a:extLst>
-        </p:cNvPr>
-        <p:cNvGrpSpPr/>
-        <p:nvPr/>
-      </p:nvGrpSpPr>
-      <p:grpSpPr>
-        <a:xfrm>
-          <a:off x="0" y="0"/>
-          <a:ext cx="0" cy="0"/>
-          <a:chOff x="0" y="0"/>
-          <a:chExt cx="0" cy="0"/>
-        </a:xfrm>
-      </p:grpSpPr>
-      <p:sp>
-        <p:nvSpPr>
-          <p:cNvPr id="2" name="Slide Image Placeholder 1">
-            <a:extLst>
-              <a:ext uri="{FF2B5EF4-FFF2-40B4-BE49-F238E27FC236}">
-                <a16:creationId xmlns:a16="http://schemas.microsoft.com/office/drawing/2014/main" id="{A57F64CF-C0A2-07FC-9AE5-06D45A9C8EDA}"/>
-              </a:ext>
-            </a:extLst>
-          </p:cNvPr>
-          <p:cNvSpPr>
-            <a:spLocks noGrp="1" noRot="1" noChangeAspect="1"/>
-          </p:cNvSpPr>
-          <p:nvPr>
-            <p:ph type="sldImg"/>
-          </p:nvPr>
-        </p:nvSpPr>
-        <p:spPr/>
-      </p:sp>
-      <p:sp>
-        <p:nvSpPr>
-          <p:cNvPr id="3" name="Notes Placeholder 2">
-            <a:extLst>
-              <a:ext uri="{FF2B5EF4-FFF2-40B4-BE49-F238E27FC236}">
-                <a16:creationId xmlns:a16="http://schemas.microsoft.com/office/drawing/2014/main" id="{FB395494-1AD9-8D9B-8D52-52D98750A1AE}"/>
-              </a:ext>
-            </a:extLst>
-          </p:cNvPr>
-          <p:cNvSpPr>
-            <a:spLocks noGrp="1"/>
-          </p:cNvSpPr>
-          <p:nvPr>
-            <p:ph type="body" idx="1"/>
-          </p:nvPr>
-        </p:nvSpPr>
-        <p:spPr/>
-        <p:txBody>
-          <a:bodyPr/>
-          <a:lstStyle/>
-          <a:p>
-            <a:r>
-              <a:rPr lang="en-US"/>
-              <a:t>Tổng tài sản tăng từ 728.532 tỷ (2022) lên 1.615.764 tỷ cuối 2025, tăng 43%. Mục tiêu vượt 2,1 triệu tỷ năm 2026, vốn điều lệ lên tối đa 102.687 tỷ.</a:t>
-            </a:r>
-          </a:p>
-        </p:txBody>
-      </p:sp>
-      <p:sp>
-        <p:nvSpPr>
-          <p:cNvPr id="4" name="Slide Number Placeholder 3">
-            <a:extLst>
-              <a:ext uri="{FF2B5EF4-FFF2-40B4-BE49-F238E27FC236}">
-                <a16:creationId xmlns:a16="http://schemas.microsoft.com/office/drawing/2014/main" id="{91FBF06F-ECE5-07D6-2C87-DB97E147C0C5}"/>
-              </a:ext>
-            </a:extLst>
-          </p:cNvPr>
-          <p:cNvSpPr>
-            <a:spLocks noGrp="1"/>
-          </p:cNvSpPr>
-          <p:nvPr>
-            <p:ph type="sldNum" sz="quarter" idx="10"/>
-          </p:nvPr>
-        </p:nvSpPr>
-        <p:spPr/>
-        <p:txBody>
-          <a:bodyPr/>
-          <a:lstStyle/>
-          <a:p>
-            <a:fld id="{F7021451-1387-4CA6-816F-3879F97B5CBC}" type="slidenum">
-              <a:rPr lang="en-US"/>
-              <a:t>3</a:t>
-            </a:fld>
-            <a:endParaRPr lang="en-US"/>
-          </a:p>
-        </p:txBody>
-      </p:sp>
-    </p:spTree>
-    <p:extLst>
-      <p:ext uri="{BB962C8B-B14F-4D97-AF65-F5344CB8AC3E}">
-        <p14:creationId xmlns:p14="http://schemas.microsoft.com/office/powerpoint/2010/main" val="4218633515"/>
-      </p:ext>
-    </p:extLst>
-  </p:cSld>
-  <p:clrMapOvr>
-    <a:masterClrMapping/>
-  </p:clrMapOvr>
-</p:notes>
-</file>
-
-<file path=ppt/notesSlides/notesSlide4.xml><?xml version="1.0" encoding="utf-8"?>
-<p:notes xmlns:a="http://schemas.openxmlformats.org/drawingml/2006/main" xmlns:r="http://schemas.openxmlformats.org/officeDocument/2006/relationships" xmlns:p="http://schemas.openxmlformats.org/presentationml/2006/main">
-  <p:cSld>
-    <p:spTree>
-      <p:nvGrpSpPr>
-        <p:cNvPr id="1" name=""/>
-        <p:cNvGrpSpPr/>
-        <p:nvPr/>
-      </p:nvGrpSpPr>
-      <p:grpSpPr>
-        <a:xfrm>
-          <a:off x="0" y="0"/>
-          <a:ext cx="0" cy="0"/>
-          <a:chOff x="0" y="0"/>
-          <a:chExt cx="0" cy="0"/>
-        </a:xfrm>
-      </p:grpSpPr>
-      <p:sp>
-        <p:nvSpPr>
-          <p:cNvPr id="2" name="Slide Image Placeholder 1"/>
-          <p:cNvSpPr>
-            <a:spLocks noGrp="1" noRot="1" noChangeAspect="1"/>
-          </p:cNvSpPr>
-          <p:nvPr>
-            <p:ph type="sldImg"/>
-          </p:nvPr>
-        </p:nvSpPr>
-        <p:spPr/>
-      </p:sp>
-      <p:sp>
-        <p:nvSpPr>
-          <p:cNvPr id="3" name="Notes Placeholder 2"/>
-          <p:cNvSpPr>
-            <a:spLocks noGrp="1"/>
-          </p:cNvSpPr>
-          <p:nvPr>
-            <p:ph type="body" idx="1"/>
-          </p:nvPr>
-        </p:nvSpPr>
-        <p:spPr/>
-        <p:txBody>
-          <a:bodyPr/>
-          <a:lstStyle/>
-          <a:p>
-            <a:r>
-              <a:rPr lang="en-US"/>
-              <a:t>CASA ~38% cuối 2025, dẫn đầu hệ thống. Nhận chuyển giao MBV nên được giao room tín dụng nhóm cao nhất 2026-2028, mục tiêu 30-35%. ROE 2025 đạt 21,1%.</a:t>
-            </a:r>
-          </a:p>
-        </p:txBody>
-      </p:sp>
-      <p:sp>
-        <p:nvSpPr>
-          <p:cNvPr id="4" name="Slide Number Placeholder 3"/>
-          <p:cNvSpPr>
-            <a:spLocks noGrp="1"/>
-          </p:cNvSpPr>
-          <p:nvPr>
-            <p:ph type="sldNum" sz="quarter" idx="10"/>
-          </p:nvPr>
-        </p:nvSpPr>
-        <p:spPr/>
-        <p:txBody>
-          <a:bodyPr/>
-          <a:lstStyle/>
-          <a:p>
-            <a:fld id="{F7021451-1387-4CA6-816F-3879F97B5CBC}" type="slidenum">
-              <a:rPr lang="en-US"/>
-              <a:t>4</a:t>
             </a:fld>
             <a:endParaRPr lang="en-US"/>
           </a:p>
@@ -2985,7 +1402,7 @@
           <a:p>
             <a:r>
               <a:rPr lang="en-US"/>
-              <a:t>LNTT tăng liên tục: 22.729 tỷ (2022), 26.306 tỷ (2023), 28.829 tỷ (2024), 34.268 tỷ (2025) và dự phóng 40.726 tỷ cho năm 2026.</a:t>
+              <a:t>LNTT tăng liên tục: 22.729 tỷ (2022), 26.306 tỷ (2023), 28.829 tỷ (2024), 34.268 tỷ (2025) và dự phóng 40.726 tỷ cho 2026, tương đương gấp 1,8 lần sau 4 năm.</a:t>
             </a:r>
           </a:p>
         </p:txBody>
@@ -4226,7 +2643,7 @@
                 <a:ea typeface="Lora" pitchFamily="34" charset="-122"/>
                 <a:cs typeface="Lora" pitchFamily="34" charset="-120"/>
               </a:rPr>
-              <a:t>CASA ~38% — chi phí vốn rẻ nhất toàn hệ thống.</a:t>
+              <a:t>Vốn rẻ nhất hệ thống, room tín dụng cao nhất thị trường.</a:t>
             </a:r>
             <a:endParaRPr lang="en-US" sz="2700" dirty="0"/>
           </a:p>
@@ -4315,7 +2732,7 @@
               <a:buNone/>
             </a:pPr>
             <a:r>
-              <a:rPr lang="en-US" sz="1950" b="1" kern="0" spc="300" dirty="0">
+              <a:rPr lang="en-US" sz="1950" b="1" kern="0" spc="300">
                 <a:solidFill>
                   <a:srgbClr val="F48120"/>
                 </a:solidFill>
@@ -4323,7 +2740,7 @@
                 <a:ea typeface="Calibri" pitchFamily="34" charset="-122"/>
                 <a:cs typeface="Calibri" pitchFamily="34" charset="-120"/>
               </a:rPr>
-              <a:t>① ĐỊNH GIÁ</a:t>
+              <a:t>ĐỊNH GIÁ</a:t>
             </a:r>
             <a:endParaRPr lang="en-US" sz="1950" dirty="0"/>
           </a:p>
@@ -4408,7 +2825,7 @@
                 <a:ea typeface="Calibri" pitchFamily="34" charset="-122"/>
                 <a:cs typeface="Calibri" pitchFamily="34" charset="-120"/>
               </a:rPr>
-              <a:t>P/B fwd ~1,2x · ROE 21%</a:t>
+              <a:t>P/B fwd ~1,2x · ROE 21,1%</a:t>
             </a:r>
             <a:endParaRPr lang="en-US" sz="2100" dirty="0"/>
           </a:p>
@@ -4497,7 +2914,7 @@
               <a:buNone/>
             </a:pPr>
             <a:r>
-              <a:rPr lang="en-US" sz="1950" b="1" kern="0" spc="300" dirty="0">
+              <a:rPr lang="en-US" sz="1950" b="1" kern="0" spc="300">
                 <a:solidFill>
                   <a:srgbClr val="F48120"/>
                 </a:solidFill>
@@ -4505,7 +2922,7 @@
                 <a:ea typeface="Calibri" pitchFamily="34" charset="-122"/>
                 <a:cs typeface="Calibri" pitchFamily="34" charset="-120"/>
               </a:rPr>
-              <a:t>② CATALYST</a:t>
+              <a:t>TĂNG TRƯỞNG</a:t>
             </a:r>
             <a:endParaRPr lang="en-US" sz="1950" dirty="0"/>
           </a:p>
@@ -4590,7 +3007,7 @@
                 <a:ea typeface="Calibri" pitchFamily="34" charset="-122"/>
                 <a:cs typeface="Calibri" pitchFamily="34" charset="-120"/>
               </a:rPr>
-              <a:t>Room tín dụng cao nhất · tăng vốn</a:t>
+              <a:t>Tín dụng 30–35% · LNTT +18,8%</a:t>
             </a:r>
             <a:endParaRPr lang="en-US" sz="2100" dirty="0"/>
           </a:p>
@@ -4814,7 +3231,7 @@
               <a:buNone/>
             </a:pPr>
             <a:r>
-              <a:rPr lang="en-US" sz="1500" kern="0" spc="75" dirty="0">
+              <a:rPr lang="en-US" sz="1500" kern="0" spc="75">
                 <a:solidFill>
                   <a:srgbClr val="FFE6AB"/>
                 </a:solidFill>
@@ -4822,7 +3239,7 @@
                 <a:ea typeface="Calibri" pitchFamily="34" charset="-122"/>
                 <a:cs typeface="Calibri" pitchFamily="34" charset="-120"/>
               </a:rPr>
-              <a:t>01 / METRICS</a:t>
+              <a:t>01 / THESIS</a:t>
             </a:r>
             <a:endParaRPr lang="en-US" sz="1500" dirty="0"/>
           </a:p>
@@ -4863,7 +3280,7 @@
                 <a:ea typeface="Lora" pitchFamily="34" charset="-122"/>
                 <a:cs typeface="Lora" pitchFamily="34" charset="-120"/>
               </a:rPr>
-              <a:t>Định giá hợp lý trên nền sinh lời đầu ngành</a:t>
+              <a:t>Ba lý do MBB đáng theo dõi</a:t>
             </a:r>
             <a:endParaRPr lang="en-US" sz="2325" dirty="0"/>
           </a:p>
@@ -5122,7 +3539,7 @@
                 <a:ea typeface="Calibri" pitchFamily="34" charset="-122"/>
                 <a:cs typeface="Calibri" pitchFamily="34" charset="-120"/>
               </a:rPr>
-              <a:t>P/B DỰ PHÓNG</a:t>
+              <a:t>① ĐỊNH GIÁ</a:t>
             </a:r>
             <a:endParaRPr lang="en-US" sz="2400" dirty="0"/>
           </a:p>
@@ -5166,7 +3583,7 @@
                 <a:ea typeface="Calibri" pitchFamily="34" charset="-122"/>
                 <a:cs typeface="Calibri" pitchFamily="34" charset="-120"/>
               </a:rPr>
-              <a:t>Trên giá trị sổ sách dự phóng năm 2026</a:t>
+              <a:t>P/B dự phóng 2026 trên ROE 21,1%</a:t>
             </a:r>
             <a:endParaRPr lang="en-US" sz="1800" dirty="0"/>
           </a:p>
@@ -5316,7 +3733,7 @@
                 <a:ea typeface="Calibri" pitchFamily="34" charset="-122"/>
                 <a:cs typeface="Calibri" pitchFamily="34" charset="-120"/>
               </a:rPr>
-              <a:t>CASA 2025</a:t>
+              <a:t>② VỐN RẺ</a:t>
             </a:r>
             <a:endParaRPr lang="en-US" sz="2400" dirty="0"/>
           </a:p>
@@ -5360,7 +3777,7 @@
                 <a:ea typeface="Calibri" pitchFamily="34" charset="-122"/>
                 <a:cs typeface="Calibri" pitchFamily="34" charset="-120"/>
               </a:rPr>
-              <a:t>Tỷ lệ tiền gửi không kỳ hạn cao nhất hệ thống</a:t>
+              <a:t>CASA cuối 2025, dẫn đầu toàn hệ thống</a:t>
             </a:r>
             <a:endParaRPr lang="en-US" sz="1800" dirty="0"/>
           </a:p>
@@ -5469,7 +3886,7 @@
                 <a:ea typeface="Lora" pitchFamily="34" charset="-122"/>
                 <a:cs typeface="Lora" pitchFamily="34" charset="-120"/>
               </a:rPr>
-              <a:t>+18,8%</a:t>
+              <a:t>30–35%</a:t>
             </a:r>
             <a:endParaRPr lang="en-US" sz="7800" dirty="0"/>
           </a:p>
@@ -5510,7 +3927,7 @@
                 <a:ea typeface="Calibri" pitchFamily="34" charset="-122"/>
                 <a:cs typeface="Calibri" pitchFamily="34" charset="-120"/>
               </a:rPr>
-              <a:t>LNTT 2026F</a:t>
+              <a:t>③ TĂNG TRƯỞNG</a:t>
             </a:r>
             <a:endParaRPr lang="en-US" sz="2400" dirty="0"/>
           </a:p>
@@ -5554,7 +3971,7 @@
                 <a:ea typeface="Calibri" pitchFamily="34" charset="-122"/>
                 <a:cs typeface="Calibri" pitchFamily="34" charset="-120"/>
               </a:rPr>
-              <a:t>Lợi nhuận trước thuế dự phóng 40.726 tỷ đồng</a:t>
+              <a:t>Room tín dụng 2026, nhóm cao nhất thị trường</a:t>
             </a:r>
             <a:endParaRPr lang="en-US" sz="1800" dirty="0"/>
           </a:p>
@@ -5595,7 +4012,7 @@
                 <a:ea typeface="Calibri" pitchFamily="34" charset="-122"/>
                 <a:cs typeface="Calibri" pitchFamily="34" charset="-120"/>
               </a:rPr>
-              <a:t>Định giá &amp; sinh lời</a:t>
+              <a:t>Ba lý do đầu tư</a:t>
             </a:r>
             <a:endParaRPr lang="en-US" sz="1350" dirty="0"/>
           </a:p>
@@ -5637,1466 +4054,6 @@
                 <a:cs typeface="Calibri" pitchFamily="34" charset="-120"/>
               </a:rPr>
               <a:t>01 / 03</a:t>
-            </a:r>
-            <a:endParaRPr lang="en-US" sz="1350" dirty="0"/>
-          </a:p>
-        </p:txBody>
-      </p:sp>
-    </p:spTree>
-  </p:cSld>
-  <p:clrMapOvr>
-    <a:masterClrMapping/>
-  </p:clrMapOvr>
-</p:sld>
-</file>
-
-<file path=ppt/slides/slide3.xml><?xml version="1.0" encoding="utf-8"?>
-<p:sld xmlns:a="http://schemas.openxmlformats.org/drawingml/2006/main" xmlns:r="http://schemas.openxmlformats.org/officeDocument/2006/relationships" xmlns:p="http://schemas.openxmlformats.org/presentationml/2006/main">
-  <p:cSld>
-    <p:spTree>
-      <p:nvGrpSpPr>
-        <p:cNvPr id="1" name="">
-          <a:extLst>
-            <a:ext uri="{FF2B5EF4-FFF2-40B4-BE49-F238E27FC236}">
-              <a16:creationId xmlns:a16="http://schemas.microsoft.com/office/drawing/2014/main" id="{0DFC1BF1-7311-7D60-8687-DE26DEBA11D0}"/>
-            </a:ext>
-          </a:extLst>
-        </p:cNvPr>
-        <p:cNvGrpSpPr/>
-        <p:nvPr/>
-      </p:nvGrpSpPr>
-      <p:grpSpPr>
-        <a:xfrm>
-          <a:off x="0" y="0"/>
-          <a:ext cx="0" cy="0"/>
-          <a:chOff x="0" y="0"/>
-          <a:chExt cx="0" cy="0"/>
-        </a:xfrm>
-      </p:grpSpPr>
-      <p:pic>
-        <p:nvPicPr>
-          <p:cNvPr id="2" name="Image 0" descr="preencoded.png">
-            <a:extLst>
-              <a:ext uri="{FF2B5EF4-FFF2-40B4-BE49-F238E27FC236}">
-                <a16:creationId xmlns:a16="http://schemas.microsoft.com/office/drawing/2014/main" id="{67222506-71F1-5459-C1B9-1806AFE7C047}"/>
-              </a:ext>
-            </a:extLst>
-          </p:cNvPr>
-          <p:cNvPicPr>
-            <a:picLocks noChangeAspect="1"/>
-          </p:cNvPicPr>
-          <p:nvPr/>
-        </p:nvPicPr>
-        <p:blipFill>
-          <a:blip r:embed="rId3"/>
-          <a:srcRect t="7" b="7"/>
-          <a:stretch/>
-        </p:blipFill>
-        <p:spPr>
-          <a:xfrm>
-            <a:off x="0" y="0"/>
-            <a:ext cx="10287000" cy="13716000"/>
-          </a:xfrm>
-          <a:prstGeom prst="rect">
-            <a:avLst/>
-          </a:prstGeom>
-        </p:spPr>
-      </p:pic>
-      <p:sp>
-        <p:nvSpPr>
-          <p:cNvPr id="3" name="Shape 0">
-            <a:extLst>
-              <a:ext uri="{FF2B5EF4-FFF2-40B4-BE49-F238E27FC236}">
-                <a16:creationId xmlns:a16="http://schemas.microsoft.com/office/drawing/2014/main" id="{4F48F86E-6F71-E6AB-2879-9464DFC20055}"/>
-              </a:ext>
-            </a:extLst>
-          </p:cNvPr>
-          <p:cNvSpPr/>
-          <p:nvPr/>
-        </p:nvSpPr>
-        <p:spPr>
-          <a:xfrm>
-            <a:off x="590442" y="666750"/>
-            <a:ext cx="9132634" cy="1198337"/>
-          </a:xfrm>
-          <a:prstGeom prst="roundRect">
-            <a:avLst>
-              <a:gd name="adj" fmla="val 20666"/>
-            </a:avLst>
-          </a:prstGeom>
-          <a:gradFill rotWithShape="1">
-            <a:gsLst>
-              <a:gs pos="0">
-                <a:srgbClr val="F48120">
-                  <a:alpha val="100000"/>
-                </a:srgbClr>
-              </a:gs>
-              <a:gs pos="100000">
-                <a:srgbClr val="FE6700">
-                  <a:alpha val="100000"/>
-                </a:srgbClr>
-              </a:gs>
-            </a:gsLst>
-            <a:lin ang="5400000" scaled="0"/>
-          </a:gradFill>
-          <a:ln w="8659">
-            <a:solidFill>
-              <a:srgbClr val="FFE6AB"/>
-            </a:solidFill>
-            <a:prstDash val="solid"/>
-          </a:ln>
-          <a:effectLst>
-            <a:outerShdw blurRad="285750" dist="95250" dir="5400000" algn="bl" rotWithShape="0">
-              <a:srgbClr val="F48120">
-                <a:alpha val="25000"/>
-              </a:srgbClr>
-            </a:outerShdw>
-          </a:effectLst>
-        </p:spPr>
-        <p:txBody>
-          <a:bodyPr/>
-          <a:lstStyle/>
-          <a:p>
-            <a:endParaRPr lang="en-US"/>
-          </a:p>
-        </p:txBody>
-      </p:sp>
-      <p:sp>
-        <p:nvSpPr>
-          <p:cNvPr id="4" name="Text 1">
-            <a:extLst>
-              <a:ext uri="{FF2B5EF4-FFF2-40B4-BE49-F238E27FC236}">
-                <a16:creationId xmlns:a16="http://schemas.microsoft.com/office/drawing/2014/main" id="{55D1179D-75C7-C98D-BC7C-CE4A14365D80}"/>
-              </a:ext>
-            </a:extLst>
-          </p:cNvPr>
-          <p:cNvSpPr/>
-          <p:nvPr/>
-        </p:nvSpPr>
-        <p:spPr>
-          <a:xfrm>
-            <a:off x="952500" y="914346"/>
-            <a:ext cx="1263578" cy="271895"/>
-          </a:xfrm>
-          <a:prstGeom prst="rect">
-            <a:avLst/>
-          </a:prstGeom>
-          <a:noFill/>
-          <a:ln/>
-        </p:spPr>
-        <p:txBody>
-          <a:bodyPr wrap="square" lIns="25400" tIns="25400" rIns="25400" bIns="25400" rtlCol="0" anchor="t">
-            <a:normAutofit lnSpcReduction="10000"/>
-          </a:bodyPr>
-          <a:lstStyle/>
-          <a:p>
-            <a:pPr marL="0" indent="0" algn="l">
-              <a:buNone/>
-            </a:pPr>
-            <a:r>
-              <a:rPr lang="en-US" sz="1500" kern="0" spc="75" dirty="0">
-                <a:solidFill>
-                  <a:srgbClr val="FFE6AB"/>
-                </a:solidFill>
-                <a:latin typeface="Calibri" pitchFamily="34" charset="0"/>
-                <a:ea typeface="Calibri" pitchFamily="34" charset="-122"/>
-                <a:cs typeface="Calibri" pitchFamily="34" charset="-120"/>
-              </a:rPr>
-              <a:t>01 / METRICS</a:t>
-            </a:r>
-            <a:endParaRPr lang="en-US" sz="1500" dirty="0"/>
-          </a:p>
-        </p:txBody>
-      </p:sp>
-      <p:sp>
-        <p:nvSpPr>
-          <p:cNvPr id="5" name="Text 2">
-            <a:extLst>
-              <a:ext uri="{FF2B5EF4-FFF2-40B4-BE49-F238E27FC236}">
-                <a16:creationId xmlns:a16="http://schemas.microsoft.com/office/drawing/2014/main" id="{FA56C3D4-8583-C5A4-FDC5-E708B2C62441}"/>
-              </a:ext>
-            </a:extLst>
-          </p:cNvPr>
-          <p:cNvSpPr/>
-          <p:nvPr/>
-        </p:nvSpPr>
-        <p:spPr>
-          <a:xfrm>
-            <a:off x="952500" y="1219173"/>
-            <a:ext cx="9220199" cy="410441"/>
-          </a:xfrm>
-          <a:prstGeom prst="rect">
-            <a:avLst/>
-          </a:prstGeom>
-          <a:noFill/>
-          <a:ln/>
-        </p:spPr>
-        <p:txBody>
-          <a:bodyPr wrap="square" lIns="25400" tIns="25400" rIns="25400" bIns="25400" rtlCol="0" anchor="t">
-            <a:normAutofit/>
-          </a:bodyPr>
-          <a:lstStyle/>
-          <a:p>
-            <a:pPr marL="0" indent="0" algn="l">
-              <a:buNone/>
-            </a:pPr>
-            <a:r>
-              <a:rPr lang="en-US" sz="2325" b="1">
-                <a:solidFill>
-                  <a:srgbClr val="FFFFFF"/>
-                </a:solidFill>
-                <a:latin typeface="Lora" pitchFamily="34" charset="0"/>
-                <a:ea typeface="Lora" pitchFamily="34" charset="-122"/>
-                <a:cs typeface="Lora" pitchFamily="34" charset="-120"/>
-              </a:rPr>
-              <a:t>Định giá hợp lý trên nền sinh lời đầu ngành</a:t>
-            </a:r>
-            <a:endParaRPr lang="en-US" sz="2325" dirty="0"/>
-          </a:p>
-        </p:txBody>
-      </p:sp>
-      <p:sp>
-        <p:nvSpPr>
-          <p:cNvPr id="6" name="Text 3">
-            <a:extLst>
-              <a:ext uri="{FF2B5EF4-FFF2-40B4-BE49-F238E27FC236}">
-                <a16:creationId xmlns:a16="http://schemas.microsoft.com/office/drawing/2014/main" id="{C4CB425B-C478-E229-F195-782F085097EF}"/>
-              </a:ext>
-            </a:extLst>
-          </p:cNvPr>
-          <p:cNvSpPr/>
-          <p:nvPr/>
-        </p:nvSpPr>
-        <p:spPr>
-          <a:xfrm>
-            <a:off x="590442" y="2190750"/>
-            <a:ext cx="3138934" cy="548986"/>
-          </a:xfrm>
-          <a:prstGeom prst="rect">
-            <a:avLst/>
-          </a:prstGeom>
-          <a:noFill/>
-          <a:ln/>
-        </p:spPr>
-        <p:txBody>
-          <a:bodyPr wrap="square" lIns="25400" tIns="25400" rIns="25400" bIns="25400" rtlCol="0" anchor="t">
-            <a:normAutofit/>
-          </a:bodyPr>
-          <a:lstStyle/>
-          <a:p>
-            <a:pPr marL="0" indent="0" algn="l">
-              <a:buNone/>
-            </a:pPr>
-            <a:r>
-              <a:rPr lang="en-US" sz="3150" b="1" kern="0" spc="150">
-                <a:solidFill>
-                  <a:srgbClr val="1B4F9C"/>
-                </a:solidFill>
-                <a:latin typeface="SVN-Gilroy" panose="00000500000000000000" pitchFamily="50" charset="0"/>
-                <a:ea typeface="Lora" pitchFamily="34" charset="-122"/>
-                <a:cs typeface="Lora" pitchFamily="34" charset="-120"/>
-              </a:rPr>
-              <a:t>Ngân hàng MB</a:t>
-            </a:r>
-            <a:endParaRPr lang="en-US" sz="3150" dirty="0">
-              <a:latin typeface="SVN-Gilroy" panose="00000500000000000000" pitchFamily="50" charset="0"/>
-            </a:endParaRPr>
-          </a:p>
-        </p:txBody>
-      </p:sp>
-      <p:sp>
-        <p:nvSpPr>
-          <p:cNvPr id="7" name="Shape 4">
-            <a:extLst>
-              <a:ext uri="{FF2B5EF4-FFF2-40B4-BE49-F238E27FC236}">
-                <a16:creationId xmlns:a16="http://schemas.microsoft.com/office/drawing/2014/main" id="{A589D896-9616-5F90-D859-BB8C770A6167}"/>
-              </a:ext>
-            </a:extLst>
-          </p:cNvPr>
-          <p:cNvSpPr/>
-          <p:nvPr/>
-        </p:nvSpPr>
-        <p:spPr>
-          <a:xfrm>
-            <a:off x="3615441" y="2342284"/>
-            <a:ext cx="17318" cy="207818"/>
-          </a:xfrm>
-          <a:prstGeom prst="rect">
-            <a:avLst/>
-          </a:prstGeom>
-          <a:solidFill>
-            <a:srgbClr val="D9C9B8"/>
-          </a:solidFill>
-          <a:ln/>
-        </p:spPr>
-        <p:txBody>
-          <a:bodyPr/>
-          <a:lstStyle/>
-          <a:p>
-            <a:endParaRPr lang="en-US"/>
-          </a:p>
-        </p:txBody>
-      </p:sp>
-      <p:sp>
-        <p:nvSpPr>
-          <p:cNvPr id="8" name="Text 5">
-            <a:extLst>
-              <a:ext uri="{FF2B5EF4-FFF2-40B4-BE49-F238E27FC236}">
-                <a16:creationId xmlns:a16="http://schemas.microsoft.com/office/drawing/2014/main" id="{051AA2C3-5386-6A3B-263D-B7CE9755A801}"/>
-              </a:ext>
-            </a:extLst>
-          </p:cNvPr>
-          <p:cNvSpPr/>
-          <p:nvPr/>
-        </p:nvSpPr>
-        <p:spPr>
-          <a:xfrm>
-            <a:off x="3804209" y="2342284"/>
-            <a:ext cx="1191464" cy="245918"/>
-          </a:xfrm>
-          <a:prstGeom prst="rect">
-            <a:avLst/>
-          </a:prstGeom>
-          <a:noFill/>
-          <a:ln/>
-        </p:spPr>
-        <p:txBody>
-          <a:bodyPr wrap="square" lIns="25400" tIns="25400" rIns="25400" bIns="25400" rtlCol="0" anchor="t">
-            <a:normAutofit lnSpcReduction="10000"/>
-          </a:bodyPr>
-          <a:lstStyle/>
-          <a:p>
-            <a:pPr marL="0" indent="0" algn="l">
-              <a:buNone/>
-            </a:pPr>
-            <a:r>
-              <a:rPr lang="en-US" sz="1350" b="1" kern="0" spc="225">
-                <a:solidFill>
-                  <a:srgbClr val="6A6A6A"/>
-                </a:solidFill>
-                <a:latin typeface="Calibri" pitchFamily="34" charset="0"/>
-                <a:ea typeface="Calibri" pitchFamily="34" charset="-122"/>
-                <a:cs typeface="Calibri" pitchFamily="34" charset="-120"/>
-              </a:rPr>
-              <a:t>HOSE · MBB</a:t>
-            </a:r>
-            <a:endParaRPr lang="en-US" sz="1350" dirty="0"/>
-          </a:p>
-        </p:txBody>
-      </p:sp>
-      <p:graphicFrame>
-        <p:nvGraphicFramePr>
-          <p:cNvPr id="26" name="Chart 25">
-            <a:extLst>
-              <a:ext uri="{FF2B5EF4-FFF2-40B4-BE49-F238E27FC236}">
-                <a16:creationId xmlns:a16="http://schemas.microsoft.com/office/drawing/2014/main" id="{0207CCB4-291B-4943-7C6E-F1E60CF8514D}"/>
-              </a:ext>
-            </a:extLst>
-          </p:cNvPr>
-          <p:cNvGraphicFramePr>
-            <a:graphicFrameLocks/>
-          </p:cNvGraphicFramePr>
-          <p:nvPr>
-            <p:extLst>
-              <p:ext uri="{D42A27DB-BD31-4B8C-83A1-F6EECF244321}">
-                <p14:modId xmlns:p14="http://schemas.microsoft.com/office/powerpoint/2010/main" val="4008840466"/>
-              </p:ext>
-            </p:extLst>
-          </p:nvPr>
-        </p:nvGraphicFramePr>
-        <p:xfrm>
-          <a:off x="1138687" y="3554083"/>
-          <a:ext cx="7729268" cy="8747185"/>
-        </p:xfrm>
-        <a:graphic>
-          <a:graphicData uri="http://schemas.openxmlformats.org/drawingml/2006/chart">
-            <c:chart xmlns:c="http://schemas.openxmlformats.org/drawingml/2006/chart" xmlns:r="http://schemas.openxmlformats.org/officeDocument/2006/relationships" r:id="rId4"/>
-          </a:graphicData>
-        </a:graphic>
-      </p:graphicFrame>
-      <p:sp>
-        <p:nvSpPr>
-          <p:cNvPr id="10" name="Text 14">
-            <a:extLst>
-              <a:ext uri="{FF2B5EF4-FFF2-40B4-BE49-F238E27FC236}">
-                <a16:creationId xmlns:a16="http://schemas.microsoft.com/office/drawing/2014/main" id="{F892186C-EE57-E50F-AC36-8083DEFBDE5E}"/>
-              </a:ext>
-            </a:extLst>
-          </p:cNvPr>
-          <p:cNvSpPr/>
-          <p:nvPr/>
-        </p:nvSpPr>
-        <p:spPr>
-          <a:xfrm>
-            <a:off x="2022660" y="2954273"/>
-            <a:ext cx="6672767" cy="971523"/>
-          </a:xfrm>
-          <a:prstGeom prst="rect">
-            <a:avLst/>
-          </a:prstGeom>
-          <a:noFill/>
-          <a:ln/>
-        </p:spPr>
-        <p:txBody>
-          <a:bodyPr wrap="square" lIns="25400" tIns="25400" rIns="25400" bIns="25400" rtlCol="0" anchor="t">
-            <a:normAutofit/>
-          </a:bodyPr>
-          <a:lstStyle/>
-          <a:p>
-            <a:pPr marL="0" indent="0" algn="l">
-              <a:lnSpc>
-                <a:spcPct val="100000"/>
-              </a:lnSpc>
-              <a:buNone/>
-            </a:pPr>
-            <a:r>
-              <a:rPr lang="en-US" sz="2800" b="1" kern="0" spc="-75">
-                <a:solidFill>
-                  <a:srgbClr val="0A2540"/>
-                </a:solidFill>
-                <a:latin typeface="SVN-Gilroy" panose="00000500000000000000" pitchFamily="50" charset="0"/>
-                <a:ea typeface="Lora" pitchFamily="34" charset="-122"/>
-                <a:cs typeface="Lora" pitchFamily="34" charset="-120"/>
-              </a:rPr>
-              <a:t>Quy mô tài sản và vốn tăng tốc </a:t>
-            </a:r>
-            <a:endParaRPr lang="en-US" sz="2800" dirty="0">
-              <a:latin typeface="SVN-Gilroy" panose="00000500000000000000" pitchFamily="50" charset="0"/>
-            </a:endParaRPr>
-          </a:p>
-        </p:txBody>
-      </p:sp>
-    </p:spTree>
-    <p:extLst>
-      <p:ext uri="{BB962C8B-B14F-4D97-AF65-F5344CB8AC3E}">
-        <p14:creationId xmlns:p14="http://schemas.microsoft.com/office/powerpoint/2010/main" val="2972984588"/>
-      </p:ext>
-    </p:extLst>
-  </p:cSld>
-  <p:clrMapOvr>
-    <a:masterClrMapping/>
-  </p:clrMapOvr>
-</p:sld>
-</file>
-
-<file path=ppt/slides/slide4.xml><?xml version="1.0" encoding="utf-8"?>
-<p:sld xmlns:a="http://schemas.openxmlformats.org/drawingml/2006/main" xmlns:r="http://schemas.openxmlformats.org/officeDocument/2006/relationships" xmlns:p="http://schemas.openxmlformats.org/presentationml/2006/main">
-  <p:cSld name="Slide 3">
-    <p:bg>
-      <p:bgPr>
-        <a:solidFill>
-          <a:srgbClr val="CFCFCF"/>
-        </a:solidFill>
-        <a:effectLst/>
-      </p:bgPr>
-    </p:bg>
-    <p:spTree>
-      <p:nvGrpSpPr>
-        <p:cNvPr id="1" name=""/>
-        <p:cNvGrpSpPr/>
-        <p:nvPr/>
-      </p:nvGrpSpPr>
-      <p:grpSpPr>
-        <a:xfrm>
-          <a:off x="0" y="0"/>
-          <a:ext cx="0" cy="0"/>
-          <a:chOff x="0" y="0"/>
-          <a:chExt cx="0" cy="0"/>
-        </a:xfrm>
-      </p:grpSpPr>
-      <p:pic>
-        <p:nvPicPr>
-          <p:cNvPr id="2" name="Image 0" descr="preencoded.png"/>
-          <p:cNvPicPr>
-            <a:picLocks noChangeAspect="1"/>
-          </p:cNvPicPr>
-          <p:nvPr/>
-        </p:nvPicPr>
-        <p:blipFill>
-          <a:blip r:embed="rId3"/>
-          <a:srcRect t="7" b="7"/>
-          <a:stretch/>
-        </p:blipFill>
-        <p:spPr>
-          <a:xfrm>
-            <a:off x="0" y="0"/>
-            <a:ext cx="10287000" cy="13716000"/>
-          </a:xfrm>
-          <a:prstGeom prst="rect">
-            <a:avLst/>
-          </a:prstGeom>
-        </p:spPr>
-      </p:pic>
-      <p:sp>
-        <p:nvSpPr>
-          <p:cNvPr id="3" name="Shape 0"/>
-          <p:cNvSpPr/>
-          <p:nvPr/>
-        </p:nvSpPr>
-        <p:spPr>
-          <a:xfrm>
-            <a:off x="590442" y="666750"/>
-            <a:ext cx="9132634" cy="1198337"/>
-          </a:xfrm>
-          <a:prstGeom prst="roundRect">
-            <a:avLst>
-              <a:gd name="adj" fmla="val 20666"/>
-            </a:avLst>
-          </a:prstGeom>
-          <a:gradFill rotWithShape="1">
-            <a:gsLst>
-              <a:gs pos="0">
-                <a:srgbClr val="F48120">
-                  <a:alpha val="100000"/>
-                </a:srgbClr>
-              </a:gs>
-              <a:gs pos="100000">
-                <a:srgbClr val="FE6700">
-                  <a:alpha val="100000"/>
-                </a:srgbClr>
-              </a:gs>
-            </a:gsLst>
-            <a:lin ang="5400000" scaled="0"/>
-          </a:gradFill>
-          <a:ln w="8659">
-            <a:solidFill>
-              <a:srgbClr val="FFE6AB"/>
-            </a:solidFill>
-            <a:prstDash val="solid"/>
-          </a:ln>
-          <a:effectLst>
-            <a:outerShdw blurRad="285750" dist="95250" dir="5400000" algn="bl" rotWithShape="0">
-              <a:srgbClr val="F48120">
-                <a:alpha val="25000"/>
-              </a:srgbClr>
-            </a:outerShdw>
-          </a:effectLst>
-        </p:spPr>
-        <p:txBody>
-          <a:bodyPr/>
-          <a:lstStyle/>
-          <a:p>
-            <a:endParaRPr lang="en-US"/>
-          </a:p>
-        </p:txBody>
-      </p:sp>
-      <p:sp>
-        <p:nvSpPr>
-          <p:cNvPr id="4" name="Text 1"/>
-          <p:cNvSpPr/>
-          <p:nvPr/>
-        </p:nvSpPr>
-        <p:spPr>
-          <a:xfrm>
-            <a:off x="952499" y="869346"/>
-            <a:ext cx="2673987" cy="349827"/>
-          </a:xfrm>
-          <a:prstGeom prst="rect">
-            <a:avLst/>
-          </a:prstGeom>
-          <a:noFill/>
-          <a:ln/>
-        </p:spPr>
-        <p:txBody>
-          <a:bodyPr wrap="square" lIns="25400" tIns="25400" rIns="25400" bIns="25400" rtlCol="0" anchor="t">
-            <a:normAutofit/>
-          </a:bodyPr>
-          <a:lstStyle/>
-          <a:p>
-            <a:pPr marL="0" indent="0" algn="l">
-              <a:buNone/>
-            </a:pPr>
-            <a:r>
-              <a:rPr lang="en-US" sz="1500" kern="0" spc="75" dirty="0">
-                <a:solidFill>
-                  <a:srgbClr val="FFE6AB"/>
-                </a:solidFill>
-                <a:latin typeface="Calibri" pitchFamily="34" charset="0"/>
-                <a:ea typeface="Calibri" pitchFamily="34" charset="-122"/>
-                <a:cs typeface="Calibri" pitchFamily="34" charset="-120"/>
-              </a:rPr>
-              <a:t>02 / FUNDAMENTALS</a:t>
-            </a:r>
-            <a:endParaRPr lang="en-US" sz="1500" dirty="0"/>
-          </a:p>
-        </p:txBody>
-      </p:sp>
-      <p:sp>
-        <p:nvSpPr>
-          <p:cNvPr id="5" name="Text 2"/>
-          <p:cNvSpPr/>
-          <p:nvPr/>
-        </p:nvSpPr>
-        <p:spPr>
-          <a:xfrm>
-            <a:off x="952500" y="1219173"/>
-            <a:ext cx="9220199" cy="410441"/>
-          </a:xfrm>
-          <a:prstGeom prst="rect">
-            <a:avLst/>
-          </a:prstGeom>
-          <a:noFill/>
-          <a:ln/>
-        </p:spPr>
-        <p:txBody>
-          <a:bodyPr wrap="square" lIns="25400" tIns="25400" rIns="25400" bIns="25400" rtlCol="0" anchor="t">
-            <a:normAutofit/>
-          </a:bodyPr>
-          <a:lstStyle/>
-          <a:p>
-            <a:pPr marL="0" indent="0" algn="l">
-              <a:buNone/>
-            </a:pPr>
-            <a:r>
-              <a:rPr lang="en-US" sz="2325" b="1">
-                <a:solidFill>
-                  <a:srgbClr val="FFFFFF"/>
-                </a:solidFill>
-                <a:latin typeface="Lora" pitchFamily="34" charset="0"/>
-                <a:ea typeface="Lora" pitchFamily="34" charset="-122"/>
-                <a:cs typeface="Lora" pitchFamily="34" charset="-120"/>
-              </a:rPr>
-              <a:t>Lợi thế vốn rẻ và dư địa tín dụng vượt trội</a:t>
-            </a:r>
-            <a:endParaRPr lang="en-US" sz="2325" dirty="0"/>
-          </a:p>
-        </p:txBody>
-      </p:sp>
-      <p:sp>
-        <p:nvSpPr>
-          <p:cNvPr id="6" name="Text 3"/>
-          <p:cNvSpPr/>
-          <p:nvPr/>
-        </p:nvSpPr>
-        <p:spPr>
-          <a:xfrm>
-            <a:off x="590442" y="2247846"/>
-            <a:ext cx="10026848" cy="358216"/>
-          </a:xfrm>
-          <a:prstGeom prst="rect">
-            <a:avLst/>
-          </a:prstGeom>
-          <a:noFill/>
-          <a:ln/>
-        </p:spPr>
-        <p:txBody>
-          <a:bodyPr wrap="square" lIns="25400" tIns="25400" rIns="25400" bIns="25400" rtlCol="0" anchor="t">
-            <a:normAutofit fontScale="92500" lnSpcReduction="20000"/>
-          </a:bodyPr>
-          <a:lstStyle/>
-          <a:p>
-            <a:pPr marL="0" indent="0" algn="l">
-              <a:lnSpc>
-                <a:spcPct val="140000"/>
-              </a:lnSpc>
-              <a:buNone/>
-            </a:pPr>
-            <a:r>
-              <a:rPr lang="en-US" sz="1800">
-                <a:solidFill>
-                  <a:srgbClr val="2A2A2A"/>
-                </a:solidFill>
-                <a:latin typeface="Calibri" pitchFamily="34" charset="0"/>
-                <a:ea typeface="Calibri" pitchFamily="34" charset="-122"/>
-                <a:cs typeface="Calibri" pitchFamily="34" charset="-120"/>
-              </a:rPr>
-              <a:t>CASA dẫn đầu hệ thống giúp MBB giữ chi phí vốn thấp nhất trong khi tín dụng tăng tốc.</a:t>
-            </a:r>
-            <a:endParaRPr lang="en-US" sz="1800" dirty="0"/>
-          </a:p>
-        </p:txBody>
-      </p:sp>
-      <p:sp>
-        <p:nvSpPr>
-          <p:cNvPr id="7" name="Shape 4"/>
-          <p:cNvSpPr/>
-          <p:nvPr/>
-        </p:nvSpPr>
-        <p:spPr>
-          <a:xfrm>
-            <a:off x="580971" y="3790923"/>
-            <a:ext cx="9115316" cy="2695548"/>
-          </a:xfrm>
-          <a:prstGeom prst="roundRect">
-            <a:avLst>
-              <a:gd name="adj" fmla="val 1413"/>
-            </a:avLst>
-          </a:prstGeom>
-          <a:solidFill>
-            <a:srgbClr val="FFFFFF"/>
-          </a:solidFill>
-          <a:ln/>
-          <a:effectLst>
-            <a:outerShdw blurRad="209550" dist="57150" dir="5400000" algn="bl" rotWithShape="0">
-              <a:srgbClr val="0A2540">
-                <a:alpha val="6000"/>
-              </a:srgbClr>
-            </a:outerShdw>
-          </a:effectLst>
-        </p:spPr>
-        <p:txBody>
-          <a:bodyPr/>
-          <a:lstStyle/>
-          <a:p>
-            <a:endParaRPr lang="en-US"/>
-          </a:p>
-        </p:txBody>
-      </p:sp>
-      <p:sp>
-        <p:nvSpPr>
-          <p:cNvPr id="8" name="Shape 5"/>
-          <p:cNvSpPr/>
-          <p:nvPr/>
-        </p:nvSpPr>
-        <p:spPr>
-          <a:xfrm>
-            <a:off x="580971" y="3790923"/>
-            <a:ext cx="142875" cy="2695548"/>
-          </a:xfrm>
-          <a:prstGeom prst="roundRect">
-            <a:avLst>
-              <a:gd name="adj" fmla="val 26667"/>
-            </a:avLst>
-          </a:prstGeom>
-          <a:solidFill>
-            <a:srgbClr val="F48120"/>
-          </a:solidFill>
-          <a:ln/>
-        </p:spPr>
-        <p:txBody>
-          <a:bodyPr/>
-          <a:lstStyle/>
-          <a:p>
-            <a:endParaRPr lang="en-US"/>
-          </a:p>
-        </p:txBody>
-      </p:sp>
-      <p:sp>
-        <p:nvSpPr>
-          <p:cNvPr id="9" name="Text 6"/>
-          <p:cNvSpPr/>
-          <p:nvPr/>
-        </p:nvSpPr>
-        <p:spPr>
-          <a:xfrm>
-            <a:off x="952500" y="4440625"/>
-            <a:ext cx="1571787" cy="800100"/>
-          </a:xfrm>
-          <a:prstGeom prst="rect">
-            <a:avLst/>
-          </a:prstGeom>
-          <a:noFill/>
-          <a:ln/>
-        </p:spPr>
-        <p:txBody>
-          <a:bodyPr wrap="square" lIns="0" tIns="0" rIns="0" bIns="0" rtlCol="0" anchor="t">
-            <a:normAutofit/>
-          </a:bodyPr>
-          <a:lstStyle/>
-          <a:p>
-            <a:pPr marL="0" indent="0" algn="l">
-              <a:lnSpc>
-                <a:spcPct val="105000"/>
-              </a:lnSpc>
-              <a:buNone/>
-            </a:pPr>
-            <a:r>
-              <a:rPr lang="en-US" sz="4650" b="1" kern="0" spc="-75">
-                <a:solidFill>
-                  <a:srgbClr val="0A2540"/>
-                </a:solidFill>
-                <a:latin typeface="Lora" pitchFamily="34" charset="0"/>
-                <a:ea typeface="Lora" pitchFamily="34" charset="-122"/>
-                <a:cs typeface="Lora" pitchFamily="34" charset="-120"/>
-              </a:rPr>
-              <a:t>CASA</a:t>
-            </a:r>
-            <a:endParaRPr lang="en-US" sz="4650" dirty="0"/>
-          </a:p>
-        </p:txBody>
-      </p:sp>
-      <p:sp>
-        <p:nvSpPr>
-          <p:cNvPr id="10" name="Text 7"/>
-          <p:cNvSpPr/>
-          <p:nvPr/>
-        </p:nvSpPr>
-        <p:spPr>
-          <a:xfrm>
-            <a:off x="952500" y="5060697"/>
-            <a:ext cx="2108380" cy="800100"/>
-          </a:xfrm>
-          <a:prstGeom prst="rect">
-            <a:avLst/>
-          </a:prstGeom>
-          <a:noFill/>
-          <a:ln/>
-        </p:spPr>
-        <p:txBody>
-          <a:bodyPr wrap="square" lIns="0" tIns="0" rIns="0" bIns="0" rtlCol="0" anchor="t">
-            <a:normAutofit/>
-          </a:bodyPr>
-          <a:lstStyle/>
-          <a:p>
-            <a:pPr marL="0" indent="0" algn="l">
-              <a:lnSpc>
-                <a:spcPct val="105000"/>
-              </a:lnSpc>
-              <a:buNone/>
-            </a:pPr>
-            <a:r>
-              <a:rPr lang="en-US" sz="4650" b="1" kern="0" spc="-75">
-                <a:solidFill>
-                  <a:srgbClr val="0A2540"/>
-                </a:solidFill>
-                <a:latin typeface="Lora" pitchFamily="34" charset="0"/>
-                <a:ea typeface="Lora" pitchFamily="34" charset="-122"/>
-                <a:cs typeface="Lora" pitchFamily="34" charset="-120"/>
-              </a:rPr>
-              <a:t>số một</a:t>
-            </a:r>
-            <a:endParaRPr lang="en-US" sz="4650" dirty="0"/>
-          </a:p>
-        </p:txBody>
-      </p:sp>
-      <p:sp>
-        <p:nvSpPr>
-          <p:cNvPr id="11" name="Text 8"/>
-          <p:cNvSpPr/>
-          <p:nvPr/>
-        </p:nvSpPr>
-        <p:spPr>
-          <a:xfrm>
-            <a:off x="5600673" y="4381500"/>
-            <a:ext cx="3017193" cy="384464"/>
-          </a:xfrm>
-          <a:prstGeom prst="rect">
-            <a:avLst/>
-          </a:prstGeom>
-          <a:noFill/>
-          <a:ln/>
-        </p:spPr>
-        <p:txBody>
-          <a:bodyPr wrap="square" lIns="25400" tIns="25400" rIns="25400" bIns="25400" rtlCol="0" anchor="t">
-            <a:normAutofit lnSpcReduction="10000"/>
-          </a:bodyPr>
-          <a:lstStyle/>
-          <a:p>
-            <a:pPr marL="0" indent="0" algn="l">
-              <a:buNone/>
-            </a:pPr>
-            <a:r>
-              <a:rPr lang="en-US" sz="2250" b="1" kern="0" spc="150">
-                <a:solidFill>
-                  <a:srgbClr val="FE6700"/>
-                </a:solidFill>
-                <a:latin typeface="Calibri" pitchFamily="34" charset="0"/>
-                <a:ea typeface="Calibri" pitchFamily="34" charset="-122"/>
-                <a:cs typeface="Calibri" pitchFamily="34" charset="-120"/>
-              </a:rPr>
-              <a:t>VỐN RẺ &amp; NIM</a:t>
-            </a:r>
-            <a:endParaRPr lang="en-US" sz="2250" dirty="0"/>
-          </a:p>
-        </p:txBody>
-      </p:sp>
-      <p:sp>
-        <p:nvSpPr>
-          <p:cNvPr id="12" name="Text 9"/>
-          <p:cNvSpPr/>
-          <p:nvPr/>
-        </p:nvSpPr>
-        <p:spPr>
-          <a:xfrm>
-            <a:off x="5600673" y="4953000"/>
-            <a:ext cx="4032162" cy="678331"/>
-          </a:xfrm>
-          <a:prstGeom prst="rect">
-            <a:avLst/>
-          </a:prstGeom>
-          <a:noFill/>
-          <a:ln/>
-        </p:spPr>
-        <p:txBody>
-          <a:bodyPr wrap="square" lIns="25400" tIns="25400" rIns="25400" bIns="25400" rtlCol="0" anchor="t">
-            <a:normAutofit fontScale="92500" lnSpcReduction="20000"/>
-          </a:bodyPr>
-          <a:lstStyle/>
-          <a:p>
-            <a:pPr marL="0" indent="0" algn="l">
-              <a:lnSpc>
-                <a:spcPct val="140000"/>
-              </a:lnSpc>
-              <a:buNone/>
-            </a:pPr>
-            <a:r>
-              <a:rPr lang="en-US" sz="1800">
-                <a:solidFill>
-                  <a:srgbClr val="2A2A2A"/>
-                </a:solidFill>
-                <a:latin typeface="Calibri" pitchFamily="34" charset="0"/>
-                <a:ea typeface="Calibri" pitchFamily="34" charset="-122"/>
-                <a:cs typeface="Calibri" pitchFamily="34" charset="-120"/>
-              </a:rPr>
-              <a:t>CASA ~38% cuối 2025, cao nhất hệ thống, số dư tăng ~27% so với cùng kỳ</a:t>
-            </a:r>
-            <a:endParaRPr lang="en-US" sz="1800" dirty="0"/>
-          </a:p>
-        </p:txBody>
-      </p:sp>
-      <p:sp>
-        <p:nvSpPr>
-          <p:cNvPr id="13" name="Shape 10"/>
-          <p:cNvSpPr/>
-          <p:nvPr/>
-        </p:nvSpPr>
-        <p:spPr>
-          <a:xfrm>
-            <a:off x="580971" y="6810375"/>
-            <a:ext cx="9115316" cy="2695548"/>
-          </a:xfrm>
-          <a:prstGeom prst="roundRect">
-            <a:avLst>
-              <a:gd name="adj" fmla="val 1413"/>
-            </a:avLst>
-          </a:prstGeom>
-          <a:solidFill>
-            <a:srgbClr val="FFFFFF"/>
-          </a:solidFill>
-          <a:ln/>
-          <a:effectLst>
-            <a:outerShdw blurRad="209550" dist="57150" dir="5400000" algn="bl" rotWithShape="0">
-              <a:srgbClr val="0A2540">
-                <a:alpha val="6000"/>
-              </a:srgbClr>
-            </a:outerShdw>
-          </a:effectLst>
-        </p:spPr>
-        <p:txBody>
-          <a:bodyPr/>
-          <a:lstStyle/>
-          <a:p>
-            <a:endParaRPr lang="en-US"/>
-          </a:p>
-        </p:txBody>
-      </p:sp>
-      <p:sp>
-        <p:nvSpPr>
-          <p:cNvPr id="14" name="Shape 11"/>
-          <p:cNvSpPr/>
-          <p:nvPr/>
-        </p:nvSpPr>
-        <p:spPr>
-          <a:xfrm>
-            <a:off x="580971" y="6810375"/>
-            <a:ext cx="142875" cy="2695548"/>
-          </a:xfrm>
-          <a:prstGeom prst="roundRect">
-            <a:avLst>
-              <a:gd name="adj" fmla="val 26667"/>
-            </a:avLst>
-          </a:prstGeom>
-          <a:solidFill>
-            <a:srgbClr val="F48120"/>
-          </a:solidFill>
-          <a:ln/>
-        </p:spPr>
-        <p:txBody>
-          <a:bodyPr/>
-          <a:lstStyle/>
-          <a:p>
-            <a:endParaRPr lang="en-US"/>
-          </a:p>
-        </p:txBody>
-      </p:sp>
-      <p:sp>
-        <p:nvSpPr>
-          <p:cNvPr id="15" name="Text 12"/>
-          <p:cNvSpPr/>
-          <p:nvPr/>
-        </p:nvSpPr>
-        <p:spPr>
-          <a:xfrm>
-            <a:off x="952500" y="7460077"/>
-            <a:ext cx="2673987" cy="800100"/>
-          </a:xfrm>
-          <a:prstGeom prst="rect">
-            <a:avLst/>
-          </a:prstGeom>
-          <a:noFill/>
-          <a:ln/>
-        </p:spPr>
-        <p:txBody>
-          <a:bodyPr wrap="square" lIns="0" tIns="0" rIns="0" bIns="0" rtlCol="0" anchor="t">
-            <a:normAutofit/>
-          </a:bodyPr>
-          <a:lstStyle/>
-          <a:p>
-            <a:pPr marL="0" indent="0" algn="l">
-              <a:lnSpc>
-                <a:spcPct val="105000"/>
-              </a:lnSpc>
-              <a:buNone/>
-            </a:pPr>
-            <a:r>
-              <a:rPr lang="en-US" sz="4650" b="1" kern="0" spc="-75">
-                <a:solidFill>
-                  <a:srgbClr val="0A2540"/>
-                </a:solidFill>
-                <a:latin typeface="Lora" pitchFamily="34" charset="0"/>
-                <a:ea typeface="Lora" pitchFamily="34" charset="-122"/>
-                <a:cs typeface="Lora" pitchFamily="34" charset="-120"/>
-              </a:rPr>
-              <a:t>Tín dụng</a:t>
-            </a:r>
-            <a:endParaRPr lang="en-US" sz="4650" dirty="0"/>
-          </a:p>
-        </p:txBody>
-      </p:sp>
-      <p:sp>
-        <p:nvSpPr>
-          <p:cNvPr id="16" name="Text 13"/>
-          <p:cNvSpPr/>
-          <p:nvPr/>
-        </p:nvSpPr>
-        <p:spPr>
-          <a:xfrm>
-            <a:off x="952500" y="8080149"/>
-            <a:ext cx="1567052" cy="800100"/>
-          </a:xfrm>
-          <a:prstGeom prst="rect">
-            <a:avLst/>
-          </a:prstGeom>
-          <a:noFill/>
-          <a:ln/>
-        </p:spPr>
-        <p:txBody>
-          <a:bodyPr wrap="square" lIns="0" tIns="0" rIns="0" bIns="0" rtlCol="0" anchor="t">
-            <a:normAutofit/>
-          </a:bodyPr>
-          <a:lstStyle/>
-          <a:p>
-            <a:pPr marL="0" indent="0" algn="l">
-              <a:lnSpc>
-                <a:spcPct val="105000"/>
-              </a:lnSpc>
-              <a:buNone/>
-            </a:pPr>
-            <a:r>
-              <a:rPr lang="en-US" sz="4650" b="1" kern="0" spc="-75">
-                <a:solidFill>
-                  <a:srgbClr val="0A2540"/>
-                </a:solidFill>
-                <a:latin typeface="Lora" pitchFamily="34" charset="0"/>
-                <a:ea typeface="Lora" pitchFamily="34" charset="-122"/>
-                <a:cs typeface="Lora" pitchFamily="34" charset="-120"/>
-              </a:rPr>
-              <a:t>bứt tốc</a:t>
-            </a:r>
-            <a:endParaRPr lang="en-US" sz="4650" dirty="0"/>
-          </a:p>
-        </p:txBody>
-      </p:sp>
-      <p:sp>
-        <p:nvSpPr>
-          <p:cNvPr id="17" name="Text 14"/>
-          <p:cNvSpPr/>
-          <p:nvPr/>
-        </p:nvSpPr>
-        <p:spPr>
-          <a:xfrm>
-            <a:off x="5600673" y="7400816"/>
-            <a:ext cx="2636788" cy="384464"/>
-          </a:xfrm>
-          <a:prstGeom prst="rect">
-            <a:avLst/>
-          </a:prstGeom>
-          <a:noFill/>
-          <a:ln/>
-        </p:spPr>
-        <p:txBody>
-          <a:bodyPr wrap="square" lIns="25400" tIns="25400" rIns="25400" bIns="25400" rtlCol="0" anchor="t">
-            <a:normAutofit lnSpcReduction="10000"/>
-          </a:bodyPr>
-          <a:lstStyle/>
-          <a:p>
-            <a:pPr marL="0" indent="0" algn="l">
-              <a:buNone/>
-            </a:pPr>
-            <a:r>
-              <a:rPr lang="en-US" sz="2250" b="1" kern="0" spc="150">
-                <a:solidFill>
-                  <a:srgbClr val="FE6700"/>
-                </a:solidFill>
-                <a:latin typeface="Calibri" pitchFamily="34" charset="0"/>
-                <a:ea typeface="Calibri" pitchFamily="34" charset="-122"/>
-                <a:cs typeface="Calibri" pitchFamily="34" charset="-120"/>
-              </a:rPr>
-              <a:t>CHUYỂN GIAO MBV</a:t>
-            </a:r>
-            <a:endParaRPr lang="en-US" sz="2250" dirty="0"/>
-          </a:p>
-        </p:txBody>
-      </p:sp>
-      <p:sp>
-        <p:nvSpPr>
-          <p:cNvPr id="18" name="Text 15"/>
-          <p:cNvSpPr/>
-          <p:nvPr/>
-        </p:nvSpPr>
-        <p:spPr>
-          <a:xfrm>
-            <a:off x="5600673" y="7972316"/>
-            <a:ext cx="4032162" cy="678331"/>
-          </a:xfrm>
-          <a:prstGeom prst="rect">
-            <a:avLst/>
-          </a:prstGeom>
-          <a:noFill/>
-          <a:ln/>
-        </p:spPr>
-        <p:txBody>
-          <a:bodyPr wrap="square" lIns="25400" tIns="25400" rIns="25400" bIns="25400" rtlCol="0" anchor="t">
-            <a:normAutofit fontScale="92500" lnSpcReduction="20000"/>
-          </a:bodyPr>
-          <a:lstStyle/>
-          <a:p>
-            <a:pPr marL="0" indent="0" algn="l">
-              <a:lnSpc>
-                <a:spcPct val="140000"/>
-              </a:lnSpc>
-              <a:buNone/>
-            </a:pPr>
-            <a:r>
-              <a:rPr lang="en-US" sz="1800">
-                <a:solidFill>
-                  <a:srgbClr val="2A2A2A"/>
-                </a:solidFill>
-                <a:latin typeface="Calibri" pitchFamily="34" charset="0"/>
-                <a:ea typeface="Calibri" pitchFamily="34" charset="-122"/>
-                <a:cs typeface="Calibri" pitchFamily="34" charset="-120"/>
-              </a:rPr>
-              <a:t>Hạn mức tăng trưởng tín dụng nhóm cao nhất giai đoạn 2026–2028</a:t>
-            </a:r>
-            <a:endParaRPr lang="en-US" sz="1800" dirty="0"/>
-          </a:p>
-        </p:txBody>
-      </p:sp>
-      <p:sp>
-        <p:nvSpPr>
-          <p:cNvPr id="19" name="Shape 16"/>
-          <p:cNvSpPr/>
-          <p:nvPr/>
-        </p:nvSpPr>
-        <p:spPr>
-          <a:xfrm>
-            <a:off x="580971" y="9829692"/>
-            <a:ext cx="9115316" cy="2695548"/>
-          </a:xfrm>
-          <a:prstGeom prst="roundRect">
-            <a:avLst>
-              <a:gd name="adj" fmla="val 1413"/>
-            </a:avLst>
-          </a:prstGeom>
-          <a:solidFill>
-            <a:srgbClr val="FFFFFF"/>
-          </a:solidFill>
-          <a:ln/>
-          <a:effectLst>
-            <a:outerShdw blurRad="209550" dist="57150" dir="5400000" algn="bl" rotWithShape="0">
-              <a:srgbClr val="0A2540">
-                <a:alpha val="6000"/>
-              </a:srgbClr>
-            </a:outerShdw>
-          </a:effectLst>
-        </p:spPr>
-        <p:txBody>
-          <a:bodyPr/>
-          <a:lstStyle/>
-          <a:p>
-            <a:endParaRPr lang="en-US"/>
-          </a:p>
-        </p:txBody>
-      </p:sp>
-      <p:sp>
-        <p:nvSpPr>
-          <p:cNvPr id="20" name="Shape 17"/>
-          <p:cNvSpPr/>
-          <p:nvPr/>
-        </p:nvSpPr>
-        <p:spPr>
-          <a:xfrm>
-            <a:off x="580971" y="9829692"/>
-            <a:ext cx="142875" cy="2695548"/>
-          </a:xfrm>
-          <a:prstGeom prst="roundRect">
-            <a:avLst>
-              <a:gd name="adj" fmla="val 26667"/>
-            </a:avLst>
-          </a:prstGeom>
-          <a:solidFill>
-            <a:srgbClr val="F48120"/>
-          </a:solidFill>
-          <a:ln/>
-        </p:spPr>
-        <p:txBody>
-          <a:bodyPr/>
-          <a:lstStyle/>
-          <a:p>
-            <a:endParaRPr lang="en-US"/>
-          </a:p>
-        </p:txBody>
-      </p:sp>
-      <p:sp>
-        <p:nvSpPr>
-          <p:cNvPr id="21" name="Text 18"/>
-          <p:cNvSpPr/>
-          <p:nvPr/>
-        </p:nvSpPr>
-        <p:spPr>
-          <a:xfrm>
-            <a:off x="952500" y="10479394"/>
-            <a:ext cx="1985665" cy="800100"/>
-          </a:xfrm>
-          <a:prstGeom prst="rect">
-            <a:avLst/>
-          </a:prstGeom>
-          <a:noFill/>
-          <a:ln/>
-        </p:spPr>
-        <p:txBody>
-          <a:bodyPr wrap="square" lIns="0" tIns="0" rIns="0" bIns="0" rtlCol="0" anchor="t">
-            <a:normAutofit/>
-          </a:bodyPr>
-          <a:lstStyle/>
-          <a:p>
-            <a:pPr marL="0" indent="0" algn="l">
-              <a:lnSpc>
-                <a:spcPct val="105000"/>
-              </a:lnSpc>
-              <a:buNone/>
-            </a:pPr>
-            <a:r>
-              <a:rPr lang="en-US" sz="4650" b="1" kern="0" spc="-75">
-                <a:solidFill>
-                  <a:srgbClr val="0A2540"/>
-                </a:solidFill>
-                <a:latin typeface="Lora" pitchFamily="34" charset="0"/>
-                <a:ea typeface="Lora" pitchFamily="34" charset="-122"/>
-                <a:cs typeface="Lora" pitchFamily="34" charset="-120"/>
-              </a:rPr>
-              <a:t>ROE</a:t>
-            </a:r>
-            <a:endParaRPr lang="en-US" sz="4650" dirty="0"/>
-          </a:p>
-        </p:txBody>
-      </p:sp>
-      <p:sp>
-        <p:nvSpPr>
-          <p:cNvPr id="22" name="Text 19"/>
-          <p:cNvSpPr/>
-          <p:nvPr/>
-        </p:nvSpPr>
-        <p:spPr>
-          <a:xfrm>
-            <a:off x="952500" y="11099466"/>
-            <a:ext cx="2439591" cy="800100"/>
-          </a:xfrm>
-          <a:prstGeom prst="rect">
-            <a:avLst/>
-          </a:prstGeom>
-          <a:noFill/>
-          <a:ln/>
-        </p:spPr>
-        <p:txBody>
-          <a:bodyPr wrap="square" lIns="0" tIns="0" rIns="0" bIns="0" rtlCol="0" anchor="t">
-            <a:normAutofit/>
-          </a:bodyPr>
-          <a:lstStyle/>
-          <a:p>
-            <a:pPr marL="0" indent="0" algn="l">
-              <a:lnSpc>
-                <a:spcPct val="105000"/>
-              </a:lnSpc>
-              <a:buNone/>
-            </a:pPr>
-            <a:r>
-              <a:rPr lang="en-US" sz="4650" b="1" kern="0" spc="-75">
-                <a:solidFill>
-                  <a:srgbClr val="0A2540"/>
-                </a:solidFill>
-                <a:latin typeface="Lora" pitchFamily="34" charset="0"/>
-                <a:ea typeface="Lora" pitchFamily="34" charset="-122"/>
-                <a:cs typeface="Lora" pitchFamily="34" charset="-120"/>
-              </a:rPr>
-              <a:t>21,1%</a:t>
-            </a:r>
-            <a:endParaRPr lang="en-US" sz="4650" dirty="0"/>
-          </a:p>
-        </p:txBody>
-      </p:sp>
-      <p:sp>
-        <p:nvSpPr>
-          <p:cNvPr id="23" name="Text 20"/>
-          <p:cNvSpPr/>
-          <p:nvPr/>
-        </p:nvSpPr>
-        <p:spPr>
-          <a:xfrm>
-            <a:off x="5600673" y="10401192"/>
-            <a:ext cx="3639592" cy="349827"/>
-          </a:xfrm>
-          <a:prstGeom prst="rect">
-            <a:avLst/>
-          </a:prstGeom>
-          <a:noFill/>
-          <a:ln/>
-        </p:spPr>
-        <p:txBody>
-          <a:bodyPr wrap="square" lIns="25400" tIns="25400" rIns="25400" bIns="25400" rtlCol="0" anchor="t">
-            <a:normAutofit lnSpcReduction="10000"/>
-          </a:bodyPr>
-          <a:lstStyle/>
-          <a:p>
-            <a:pPr marL="0" indent="0" algn="l">
-              <a:buNone/>
-            </a:pPr>
-            <a:r>
-              <a:rPr lang="en-US" sz="2025" b="1" kern="0" spc="75">
-                <a:solidFill>
-                  <a:srgbClr val="FE6700"/>
-                </a:solidFill>
-                <a:latin typeface="Calibri" pitchFamily="34" charset="0"/>
-                <a:ea typeface="Calibri" pitchFamily="34" charset="-122"/>
-                <a:cs typeface="Calibri" pitchFamily="34" charset="-120"/>
-              </a:rPr>
-              <a:t>SINH LỜI · HIỆU QUẢ VỐN</a:t>
-            </a:r>
-            <a:endParaRPr lang="en-US" sz="2025" dirty="0"/>
-          </a:p>
-        </p:txBody>
-      </p:sp>
-      <p:sp>
-        <p:nvSpPr>
-          <p:cNvPr id="24" name="Text 21"/>
-          <p:cNvSpPr/>
-          <p:nvPr/>
-        </p:nvSpPr>
-        <p:spPr>
-          <a:xfrm>
-            <a:off x="5600673" y="10934672"/>
-            <a:ext cx="4120515" cy="678331"/>
-          </a:xfrm>
-          <a:prstGeom prst="rect">
-            <a:avLst/>
-          </a:prstGeom>
-          <a:noFill/>
-          <a:ln/>
-        </p:spPr>
-        <p:txBody>
-          <a:bodyPr wrap="square" lIns="25400" tIns="25400" rIns="25400" bIns="25400" rtlCol="0" anchor="t">
-            <a:normAutofit fontScale="92500" lnSpcReduction="20000"/>
-          </a:bodyPr>
-          <a:lstStyle/>
-          <a:p>
-            <a:pPr marL="0" indent="0" algn="l">
-              <a:lnSpc>
-                <a:spcPct val="140000"/>
-              </a:lnSpc>
-              <a:buNone/>
-            </a:pPr>
-            <a:r>
-              <a:rPr lang="en-US" sz="1800">
-                <a:solidFill>
-                  <a:srgbClr val="2A2A2A"/>
-                </a:solidFill>
-                <a:latin typeface="Calibri" pitchFamily="34" charset="0"/>
-                <a:ea typeface="Calibri" pitchFamily="34" charset="-122"/>
-                <a:cs typeface="Calibri" pitchFamily="34" charset="-120"/>
-              </a:rPr>
-              <a:t>ROE 2025 thuộc nhóm cao nhất khối ngân hàng lớn</a:t>
-            </a:r>
-            <a:endParaRPr lang="en-US" sz="1800" dirty="0"/>
-          </a:p>
-        </p:txBody>
-      </p:sp>
-      <p:sp>
-        <p:nvSpPr>
-          <p:cNvPr id="25" name="Text 22"/>
-          <p:cNvSpPr/>
-          <p:nvPr/>
-        </p:nvSpPr>
-        <p:spPr>
-          <a:xfrm>
-            <a:off x="590442" y="13222431"/>
-            <a:ext cx="1388566" cy="245918"/>
-          </a:xfrm>
-          <a:prstGeom prst="rect">
-            <a:avLst/>
-          </a:prstGeom>
-          <a:noFill/>
-          <a:ln/>
-        </p:spPr>
-        <p:txBody>
-          <a:bodyPr wrap="square" lIns="25400" tIns="25400" rIns="25400" bIns="25400" rtlCol="0" anchor="t">
-            <a:normAutofit lnSpcReduction="10000"/>
-          </a:bodyPr>
-          <a:lstStyle/>
-          <a:p>
-            <a:pPr marL="0" indent="0" algn="l">
-              <a:buNone/>
-            </a:pPr>
-            <a:r>
-              <a:rPr lang="en-US" sz="1350">
-                <a:solidFill>
-                  <a:srgbClr val="6A6A6A"/>
-                </a:solidFill>
-                <a:latin typeface="Calibri" pitchFamily="34" charset="0"/>
-                <a:ea typeface="Calibri" pitchFamily="34" charset="-122"/>
-                <a:cs typeface="Calibri" pitchFamily="34" charset="-120"/>
-              </a:rPr>
-              <a:t>Lợi thế cạnh tranh</a:t>
-            </a:r>
-            <a:endParaRPr lang="en-US" sz="1350" dirty="0"/>
-          </a:p>
-        </p:txBody>
-      </p:sp>
-      <p:sp>
-        <p:nvSpPr>
-          <p:cNvPr id="26" name="Text 23"/>
-          <p:cNvSpPr/>
-          <p:nvPr/>
-        </p:nvSpPr>
-        <p:spPr>
-          <a:xfrm>
-            <a:off x="9214355" y="13222431"/>
-            <a:ext cx="567603" cy="245918"/>
-          </a:xfrm>
-          <a:prstGeom prst="rect">
-            <a:avLst/>
-          </a:prstGeom>
-          <a:noFill/>
-          <a:ln/>
-        </p:spPr>
-        <p:txBody>
-          <a:bodyPr wrap="square" lIns="25400" tIns="25400" rIns="25400" bIns="25400" rtlCol="0" anchor="t">
-            <a:normAutofit lnSpcReduction="10000"/>
-          </a:bodyPr>
-          <a:lstStyle/>
-          <a:p>
-            <a:pPr marL="0" indent="0" algn="l">
-              <a:buNone/>
-            </a:pPr>
-            <a:r>
-              <a:rPr lang="en-US" sz="1350" dirty="0">
-                <a:solidFill>
-                  <a:srgbClr val="6A6A6A"/>
-                </a:solidFill>
-                <a:latin typeface="Calibri" pitchFamily="34" charset="0"/>
-                <a:ea typeface="Calibri" pitchFamily="34" charset="-122"/>
-                <a:cs typeface="Calibri" pitchFamily="34" charset="-120"/>
-              </a:rPr>
-              <a:t>02 / 03</a:t>
             </a:r>
             <a:endParaRPr lang="en-US" sz="1350" dirty="0"/>
           </a:p>
@@ -7254,7 +4211,7 @@
               <a:buNone/>
             </a:pPr>
             <a:r>
-              <a:rPr lang="en-US" sz="1500" kern="0" spc="75" dirty="0">
+              <a:rPr lang="en-US" sz="1500" kern="0" spc="75">
                 <a:solidFill>
                   <a:srgbClr val="FFE6AB"/>
                 </a:solidFill>
@@ -7262,7 +4219,7 @@
                 <a:ea typeface="Calibri" pitchFamily="34" charset="-122"/>
                 <a:cs typeface="Calibri" pitchFamily="34" charset="-120"/>
               </a:rPr>
-              <a:t>02 / FUNDAMENTALS</a:t>
+              <a:t>02 / EARNINGS</a:t>
             </a:r>
             <a:endParaRPr lang="en-US" sz="1500" dirty="0"/>
           </a:p>
@@ -7309,7 +4266,7 @@
                 <a:ea typeface="Lora" pitchFamily="34" charset="-122"/>
                 <a:cs typeface="Lora" pitchFamily="34" charset="-120"/>
               </a:rPr>
-              <a:t>Lợi thế vốn rẻ và dư địa tín dụng vượt trội</a:t>
+              <a:t>Lợi nhuận trước thuế tăng liên tục</a:t>
             </a:r>
             <a:endParaRPr lang="en-US" sz="2325" dirty="0"/>
           </a:p>
@@ -7389,7 +4346,7 @@
                 <a:ea typeface="Lora" pitchFamily="34" charset="-122"/>
                 <a:cs typeface="Lora" pitchFamily="34" charset="-120"/>
               </a:rPr>
-              <a:t>Lợi nhuận trước thuế nối dài chuỗi tăng trưởng, dự phóng vượt 40.000 tỷ đồng trong năm 2026.</a:t>
+              <a:t>LNTT gấp gần 1,8 lần chỉ sau 4 năm, dự phóng vượt 40.000 tỷ đồng trong năm 2026.</a:t>
             </a:r>
           </a:p>
         </p:txBody>

--- a/hotstock-mbb/Ngan_hang_MBB_Hotstock.pptx
+++ b/hotstock-mbb/Ngan_hang_MBB_Hotstock.pptx
@@ -9,9 +9,9 @@
   </p:notesMasterIdLst>
   <p:sldIdLst>
     <p:sldId id="405" r:id="rId2"/>
+    <p:sldId id="417" r:id="rId9"/>
+    <p:sldId id="401" r:id="rId4"/>
     <p:sldId id="416" r:id="rId8"/>
-    <p:sldId id="417" r:id="rId9"/>
-    <p:sldId id="420" r:id="rId10"/>
   </p:sldIdLst>
   <p:sldSz cx="10287000" cy="13716000"/>
   <p:notesSz cx="6858000" cy="9144000"/>
@@ -216,7 +216,7 @@
           <c:idx val="0"/>
           <c:order val="0"/>
           <c:tx>
-            <c:v>Tổng tài sản</c:v>
+            <c:v>Dư nợ tín dụng</c:v>
           </c:tx>
           <c:spPr>
             <a:solidFill>
@@ -643,19 +643,19 @@
                 <c:formatCode>#,##0</c:formatCode>
                 <c:ptCount val="5"/>
                 <c:pt idx="0">
-                  <c:v>728.532</c:v>
+                  <c:v>460.574</c:v>
                 </c:pt>
                 <c:pt idx="1">
-                  <c:v>944.954</c:v>
+                  <c:v>611.049</c:v>
                 </c:pt>
                 <c:pt idx="2">
-                  <c:v>1133.797</c:v>
+                  <c:v>776.658</c:v>
                 </c:pt>
                 <c:pt idx="3">
-                  <c:v>1615.764</c:v>
+                  <c:v>1048.247</c:v>
                 </c:pt>
                 <c:pt idx="4">
-                  <c:v>2100.0</c:v>
+                  <c:v>1344.157</c:v>
                 </c:pt>
               </c:numCache>
             </c:numRef>
@@ -701,6 +701,506 @@
             </c:ext>
             <c:ext xmlns:c16="http://schemas.microsoft.com/office/drawing/2014/chart" uri="{C3380CC4-5D6E-409C-BE32-E72D297353CC}">
               <c16:uniqueId val="{0000000A-5EB3-4EA8-B62C-82B52FF47658}"/>
+            </c:ext>
+          </c:extLst>
+        </c:ser>
+        <c:ser>
+          <c:idx val="1"/>
+          <c:order val="1"/>
+          <c:tx>
+            <c:v>Tiền gửi khách hàng</c:v>
+          </c:tx>
+          <c:spPr>
+            <a:solidFill>
+              <a:srgbClr val="8DC8E8">
+                <a:lumMod val="60000"/>
+                <a:lumOff val="40000"/>
+              </a:srgbClr>
+            </a:solidFill>
+            <a:ln>
+              <a:noFill/>
+            </a:ln>
+            <a:effectLst/>
+          </c:spPr>
+          <c:invertIfNegative val="0"/>
+          <c:dLbls>
+            <c:dLbl>
+              <c:idx val="0"/>
+              <c:tx>
+                <c:rich>
+                  <a:bodyPr/>
+                  <a:lstStyle/>
+                  <a:p>
+                    <a:fld id="{22D3100C-1B24-4522-97C0-49299C754A5F}" type="CELLRANGE">
+                      <a:rPr lang="en-US"/>
+                      <a:pPr/>
+                      <a:t>[CELLRANGE]</a:t>
+                    </a:fld>
+                    <a:endParaRPr lang="en-US"/>
+                  </a:p>
+                </c:rich>
+              </c:tx>
+              <c:dLblPos val="inEnd"/>
+              <c:showLegendKey val="0"/>
+              <c:showVal val="1"/>
+              <c:showCatName val="0"/>
+              <c:showSerName val="0"/>
+              <c:showPercent val="0"/>
+              <c:showBubbleSize val="0"/>
+              <c:extLst>
+                <c:ext xmlns:c15="http://schemas.microsoft.com/office/drawing/2012/chart" uri="{CE6537A1-D6FC-4f65-9D91-7224C49458BB}">
+                  <c15:dlblFieldTable/>
+                  <c15:showDataLabelsRange val="1"/>
+                </c:ext>
+                <c:ext xmlns:c16="http://schemas.microsoft.com/office/drawing/2014/chart" uri="{C3380CC4-5D6E-409C-BE32-E72D297353CC}">
+                  <c16:uniqueId val="{0000000B-5EB3-4EA8-B62C-82B52FF47658}"/>
+                </c:ext>
+              </c:extLst>
+            </c:dLbl>
+            <c:dLbl>
+              <c:idx val="1"/>
+              <c:tx>
+                <c:rich>
+                  <a:bodyPr/>
+                  <a:lstStyle/>
+                  <a:p>
+                    <a:fld id="{82B26DAD-9DB5-46B0-8F5A-7B69FD6732D4}" type="CELLRANGE">
+                      <a:rPr lang="en-US"/>
+                      <a:pPr/>
+                      <a:t>[CELLRANGE]</a:t>
+                    </a:fld>
+                    <a:endParaRPr lang="en-US"/>
+                  </a:p>
+                </c:rich>
+              </c:tx>
+              <c:dLblPos val="inEnd"/>
+              <c:showLegendKey val="0"/>
+              <c:showVal val="1"/>
+              <c:showCatName val="0"/>
+              <c:showSerName val="0"/>
+              <c:showPercent val="0"/>
+              <c:showBubbleSize val="0"/>
+              <c:extLst>
+                <c:ext xmlns:c15="http://schemas.microsoft.com/office/drawing/2012/chart" uri="{CE6537A1-D6FC-4f65-9D91-7224C49458BB}">
+                  <c15:dlblFieldTable/>
+                  <c15:showDataLabelsRange val="1"/>
+                </c:ext>
+                <c:ext xmlns:c16="http://schemas.microsoft.com/office/drawing/2014/chart" uri="{C3380CC4-5D6E-409C-BE32-E72D297353CC}">
+                  <c16:uniqueId val="{0000000C-5EB3-4EA8-B62C-82B52FF47658}"/>
+                </c:ext>
+              </c:extLst>
+            </c:dLbl>
+            <c:dLbl>
+              <c:idx val="2"/>
+              <c:tx>
+                <c:rich>
+                  <a:bodyPr/>
+                  <a:lstStyle/>
+                  <a:p>
+                    <a:fld id="{F5B2894D-A2EE-4F2A-95BC-97C51B8BF4A0}" type="CELLRANGE">
+                      <a:rPr lang="en-US"/>
+                      <a:pPr/>
+                      <a:t>[CELLRANGE]</a:t>
+                    </a:fld>
+                    <a:endParaRPr lang="en-US"/>
+                  </a:p>
+                </c:rich>
+              </c:tx>
+              <c:dLblPos val="inEnd"/>
+              <c:showLegendKey val="0"/>
+              <c:showVal val="1"/>
+              <c:showCatName val="0"/>
+              <c:showSerName val="0"/>
+              <c:showPercent val="0"/>
+              <c:showBubbleSize val="0"/>
+              <c:extLst>
+                <c:ext xmlns:c15="http://schemas.microsoft.com/office/drawing/2012/chart" uri="{CE6537A1-D6FC-4f65-9D91-7224C49458BB}">
+                  <c15:dlblFieldTable/>
+                  <c15:showDataLabelsRange val="1"/>
+                </c:ext>
+                <c:ext xmlns:c16="http://schemas.microsoft.com/office/drawing/2014/chart" uri="{C3380CC4-5D6E-409C-BE32-E72D297353CC}">
+                  <c16:uniqueId val="{0000000D-5EB3-4EA8-B62C-82B52FF47658}"/>
+                </c:ext>
+              </c:extLst>
+            </c:dLbl>
+            <c:dLbl>
+              <c:idx val="3"/>
+              <c:tx>
+                <c:rich>
+                  <a:bodyPr/>
+                  <a:lstStyle/>
+                  <a:p>
+                    <a:fld id="{693FBA2D-02FC-4D17-8F06-0907AEEBF2BF}" type="CELLRANGE">
+                      <a:rPr lang="en-US"/>
+                      <a:pPr/>
+                      <a:t>[CELLRANGE]</a:t>
+                    </a:fld>
+                    <a:endParaRPr lang="en-US"/>
+                  </a:p>
+                </c:rich>
+              </c:tx>
+              <c:dLblPos val="inBase"/>
+              <c:showLegendKey val="0"/>
+              <c:showVal val="1"/>
+              <c:showCatName val="0"/>
+              <c:showSerName val="0"/>
+              <c:showPercent val="0"/>
+              <c:showBubbleSize val="0"/>
+              <c:extLst>
+                <c:ext xmlns:c15="http://schemas.microsoft.com/office/drawing/2012/chart" uri="{CE6537A1-D6FC-4f65-9D91-7224C49458BB}">
+                  <c15:dlblFieldTable/>
+                  <c15:showDataLabelsRange val="1"/>
+                </c:ext>
+                <c:ext xmlns:c16="http://schemas.microsoft.com/office/drawing/2014/chart" uri="{C3380CC4-5D6E-409C-BE32-E72D297353CC}">
+                  <c16:uniqueId val="{0000000E-5EB3-4EA8-B62C-82B52FF47658}"/>
+                </c:ext>
+              </c:extLst>
+            </c:dLbl>
+            <c:dLbl>
+              <c:idx val="4"/>
+              <c:tx>
+                <c:rich>
+                  <a:bodyPr/>
+                  <a:lstStyle/>
+                  <a:p>
+                    <a:fld id="{4C6E25A6-ECE9-42D1-A7F1-8513B1AA85B4}" type="CELLRANGE">
+                      <a:rPr lang="en-US"/>
+                      <a:pPr/>
+                      <a:t>[CELLRANGE]</a:t>
+                    </a:fld>
+                    <a:endParaRPr lang="en-US"/>
+                  </a:p>
+                </c:rich>
+              </c:tx>
+              <c:dLblPos val="ctr"/>
+              <c:showLegendKey val="0"/>
+              <c:showVal val="1"/>
+              <c:showCatName val="0"/>
+              <c:showSerName val="0"/>
+              <c:showPercent val="0"/>
+              <c:showBubbleSize val="0"/>
+              <c:extLst>
+                <c:ext xmlns:c15="http://schemas.microsoft.com/office/drawing/2012/chart" uri="{CE6537A1-D6FC-4f65-9D91-7224C49458BB}">
+                  <c15:dlblFieldTable/>
+                  <c15:xForSave val="1"/>
+                  <c15:showDataLabelsRange val="1"/>
+                </c:ext>
+                <c:ext xmlns:c16="http://schemas.microsoft.com/office/drawing/2014/chart" uri="{C3380CC4-5D6E-409C-BE32-E72D297353CC}">
+                  <c16:uniqueId val="{0000000F-5EB3-4EA8-B62C-82B52FF47658}"/>
+                </c:ext>
+              </c:extLst>
+            </c:dLbl>
+            <c:dLbl>
+              <c:idx val="5"/>
+              <c:tx>
+                <c:rich>
+                  <a:bodyPr/>
+                  <a:lstStyle/>
+                  <a:p>
+                    <a:fld id="{426B2E89-CA2C-4336-89CB-48201905CC53}" type="CELLRANGE">
+                      <a:rPr lang="en-US"/>
+                      <a:pPr/>
+                      <a:t>[CELLRANGE]</a:t>
+                    </a:fld>
+                    <a:endParaRPr lang="en-US"/>
+                  </a:p>
+                </c:rich>
+              </c:tx>
+              <c:dLblPos val="ctr"/>
+              <c:showLegendKey val="0"/>
+              <c:showVal val="1"/>
+              <c:showCatName val="0"/>
+              <c:showSerName val="0"/>
+              <c:showPercent val="0"/>
+              <c:showBubbleSize val="0"/>
+              <c:extLst>
+                <c:ext xmlns:c15="http://schemas.microsoft.com/office/drawing/2012/chart" uri="{CE6537A1-D6FC-4f65-9D91-7224C49458BB}">
+                  <c15:dlblFieldTable/>
+                  <c15:xForSave val="1"/>
+                  <c15:showDataLabelsRange val="1"/>
+                </c:ext>
+                <c:ext xmlns:c16="http://schemas.microsoft.com/office/drawing/2014/chart" uri="{C3380CC4-5D6E-409C-BE32-E72D297353CC}">
+                  <c16:uniqueId val="{00000010-5EB3-4EA8-B62C-82B52FF47658}"/>
+                </c:ext>
+              </c:extLst>
+            </c:dLbl>
+            <c:dLbl>
+              <c:idx val="6"/>
+              <c:tx>
+                <c:rich>
+                  <a:bodyPr/>
+                  <a:lstStyle/>
+                  <a:p>
+                    <a:fld id="{0C3807C8-D88F-4929-96FF-81C6F29841D5}" type="CELLRANGE">
+                      <a:rPr lang="en-US"/>
+                      <a:pPr/>
+                      <a:t>[CELLRANGE]</a:t>
+                    </a:fld>
+                    <a:endParaRPr lang="en-US"/>
+                  </a:p>
+                </c:rich>
+              </c:tx>
+              <c:dLblPos val="ctr"/>
+              <c:showLegendKey val="0"/>
+              <c:showVal val="1"/>
+              <c:showCatName val="0"/>
+              <c:showSerName val="0"/>
+              <c:showPercent val="0"/>
+              <c:showBubbleSize val="0"/>
+              <c:extLst>
+                <c:ext xmlns:c15="http://schemas.microsoft.com/office/drawing/2012/chart" uri="{CE6537A1-D6FC-4f65-9D91-7224C49458BB}">
+                  <c15:dlblFieldTable/>
+                  <c15:xForSave val="1"/>
+                  <c15:showDataLabelsRange val="1"/>
+                </c:ext>
+                <c:ext xmlns:c16="http://schemas.microsoft.com/office/drawing/2014/chart" uri="{C3380CC4-5D6E-409C-BE32-E72D297353CC}">
+                  <c16:uniqueId val="{00000011-5EB3-4EA8-B62C-82B52FF47658}"/>
+                </c:ext>
+              </c:extLst>
+            </c:dLbl>
+            <c:dLbl>
+              <c:idx val="7"/>
+              <c:tx>
+                <c:rich>
+                  <a:bodyPr/>
+                  <a:lstStyle/>
+                  <a:p>
+                    <a:fld id="{BC0212B8-BBBE-4753-8126-124C1AFEC228}" type="CELLRANGE">
+                      <a:rPr lang="en-US"/>
+                      <a:pPr/>
+                      <a:t>[CELLRANGE]</a:t>
+                    </a:fld>
+                    <a:endParaRPr lang="en-US"/>
+                  </a:p>
+                </c:rich>
+              </c:tx>
+              <c:dLblPos val="ctr"/>
+              <c:showLegendKey val="0"/>
+              <c:showVal val="1"/>
+              <c:showCatName val="0"/>
+              <c:showSerName val="0"/>
+              <c:showPercent val="0"/>
+              <c:showBubbleSize val="0"/>
+              <c:extLst>
+                <c:ext xmlns:c15="http://schemas.microsoft.com/office/drawing/2012/chart" uri="{CE6537A1-D6FC-4f65-9D91-7224C49458BB}">
+                  <c15:dlblFieldTable/>
+                  <c15:xForSave val="1"/>
+                  <c15:showDataLabelsRange val="1"/>
+                </c:ext>
+                <c:ext xmlns:c16="http://schemas.microsoft.com/office/drawing/2014/chart" uri="{C3380CC4-5D6E-409C-BE32-E72D297353CC}">
+                  <c16:uniqueId val="{00000012-5EB3-4EA8-B62C-82B52FF47658}"/>
+                </c:ext>
+              </c:extLst>
+            </c:dLbl>
+            <c:dLbl>
+              <c:idx val="8"/>
+              <c:tx>
+                <c:rich>
+                  <a:bodyPr/>
+                  <a:lstStyle/>
+                  <a:p>
+                    <a:fld id="{4D751840-3E75-4CAD-BAC7-DD5DDE31D3D4}" type="CELLRANGE">
+                      <a:rPr lang="en-US"/>
+                      <a:pPr/>
+                      <a:t>[CELLRANGE]</a:t>
+                    </a:fld>
+                    <a:endParaRPr lang="en-US"/>
+                  </a:p>
+                </c:rich>
+              </c:tx>
+              <c:dLblPos val="ctr"/>
+              <c:showLegendKey val="0"/>
+              <c:showVal val="1"/>
+              <c:showCatName val="0"/>
+              <c:showSerName val="0"/>
+              <c:showPercent val="0"/>
+              <c:showBubbleSize val="0"/>
+              <c:extLst>
+                <c:ext xmlns:c15="http://schemas.microsoft.com/office/drawing/2012/chart" uri="{CE6537A1-D6FC-4f65-9D91-7224C49458BB}">
+                  <c15:dlblFieldTable/>
+                  <c15:xForSave val="1"/>
+                  <c15:showDataLabelsRange val="1"/>
+                </c:ext>
+                <c:ext xmlns:c16="http://schemas.microsoft.com/office/drawing/2014/chart" uri="{C3380CC4-5D6E-409C-BE32-E72D297353CC}">
+                  <c16:uniqueId val="{00000013-5EB3-4EA8-B62C-82B52FF47658}"/>
+                </c:ext>
+              </c:extLst>
+            </c:dLbl>
+            <c:dLbl>
+              <c:idx val="9"/>
+              <c:tx>
+                <c:rich>
+                  <a:bodyPr/>
+                  <a:lstStyle/>
+                  <a:p>
+                    <a:fld id="{92016E4B-4EEA-4454-8ED5-B10A7AE10693}" type="CELLRANGE">
+                      <a:rPr lang="en-US"/>
+                      <a:pPr/>
+                      <a:t>[CELLRANGE]</a:t>
+                    </a:fld>
+                    <a:endParaRPr lang="en-US"/>
+                  </a:p>
+                </c:rich>
+              </c:tx>
+              <c:dLblPos val="ctr"/>
+              <c:showLegendKey val="0"/>
+              <c:showVal val="1"/>
+              <c:showCatName val="0"/>
+              <c:showSerName val="0"/>
+              <c:showPercent val="0"/>
+              <c:showBubbleSize val="0"/>
+              <c:extLst>
+                <c:ext xmlns:c15="http://schemas.microsoft.com/office/drawing/2012/chart" uri="{CE6537A1-D6FC-4f65-9D91-7224C49458BB}">
+                  <c15:dlblFieldTable/>
+                  <c15:xForSave val="1"/>
+                  <c15:showDataLabelsRange val="1"/>
+                </c:ext>
+                <c:ext xmlns:c16="http://schemas.microsoft.com/office/drawing/2014/chart" uri="{C3380CC4-5D6E-409C-BE32-E72D297353CC}">
+                  <c16:uniqueId val="{00000014-5EB3-4EA8-B62C-82B52FF47658}"/>
+                </c:ext>
+              </c:extLst>
+            </c:dLbl>
+            <c:spPr>
+              <a:noFill/>
+              <a:ln>
+                <a:noFill/>
+              </a:ln>
+              <a:effectLst/>
+            </c:spPr>
+            <c:txPr>
+              <a:bodyPr rot="0" spcFirstLastPara="1" vertOverflow="ellipsis" vert="horz" wrap="square" anchor="ctr" anchorCtr="1"/>
+              <a:lstStyle/>
+              <a:p>
+                <a:pPr>
+                  <a:defRPr sz="2000" b="0" i="0" u="none" strike="noStrike" kern="1200" baseline="0">
+                    <a:solidFill>
+                      <a:srgbClr val="0070C0"/>
+                    </a:solidFill>
+                    <a:latin typeface="Noto Sans" panose="020B0502040504020204" pitchFamily="34" charset="0"/>
+                    <a:ea typeface="Noto Sans" panose="020B0502040504020204" pitchFamily="34" charset="0"/>
+                    <a:cs typeface="+mn-cs"/>
+                  </a:defRPr>
+                </a:pPr>
+                <a:endParaRPr lang="en-US"/>
+              </a:p>
+            </c:txPr>
+            <c:dLblPos val="ctr"/>
+            <c:showLegendKey val="0"/>
+            <c:showVal val="1"/>
+            <c:showCatName val="0"/>
+            <c:showSerName val="0"/>
+            <c:showPercent val="0"/>
+            <c:showBubbleSize val="0"/>
+            <c:showLeaderLines val="0"/>
+            <c:extLst>
+              <c:ext xmlns:c15="http://schemas.microsoft.com/office/drawing/2012/chart" uri="{CE6537A1-D6FC-4f65-9D91-7224C49458BB}">
+                <c15:showDataLabelsRange val="1"/>
+                <c15:showLeaderLines val="1"/>
+                <c15:leaderLines>
+                  <c:spPr>
+                    <a:ln w="9525" cap="flat" cmpd="sng" algn="ctr">
+                      <a:solidFill>
+                        <a:schemeClr val="tx1">
+                          <a:lumMod val="35000"/>
+                          <a:lumOff val="65000"/>
+                        </a:schemeClr>
+                      </a:solidFill>
+                      <a:round/>
+                    </a:ln>
+                    <a:effectLst/>
+                  </c:spPr>
+                </c15:leaderLines>
+              </c:ext>
+            </c:extLst>
+          </c:dLbls>
+          <c:cat>
+            <c:strRef>
+              <c:f>'For report'!$G$68:$P$68</c:f>
+              <c:strCache>
+                <c:ptCount val="5"/>
+                <c:pt idx="0">
+                  <c:v>22</c:v>
+                </c:pt>
+                <c:pt idx="1">
+                  <c:v>23</c:v>
+                </c:pt>
+                <c:pt idx="2">
+                  <c:v>24</c:v>
+                </c:pt>
+                <c:pt idx="3">
+                  <c:v>25</c:v>
+                </c:pt>
+                <c:pt idx="4">
+                  <c:v>26F</c:v>
+                </c:pt>
+              </c:strCache>
+            </c:strRef>
+          </c:cat>
+          <c:val>
+            <c:numRef>
+              <c:f>'For report'!$G$73:$P$73</c:f>
+              <c:numCache>
+                <c:formatCode>#,##0</c:formatCode>
+                <c:ptCount val="5"/>
+                <c:pt idx="0">
+                  <c:v>443.606</c:v>
+                </c:pt>
+                <c:pt idx="1">
+                  <c:v>567.533</c:v>
+                </c:pt>
+                <c:pt idx="2">
+                  <c:v>714.154</c:v>
+                </c:pt>
+                <c:pt idx="3">
+                  <c:v>923.46</c:v>
+                </c:pt>
+                <c:pt idx="4">
+                  <c:v>1163.655</c:v>
+                </c:pt>
+              </c:numCache>
+            </c:numRef>
+          </c:val>
+          <c:extLst>
+            <c:ext xmlns:c15="http://schemas.microsoft.com/office/drawing/2012/chart" uri="{02D57815-91ED-43cb-92C2-25804820EDAC}">
+              <c15:datalabelsRange>
+                <c15:f>'For report'!$G$75:$P$75</c15:f>
+                <c15:dlblRangeCache>
+                  <c:ptCount val="10"/>
+                  <c:pt idx="0">
+                    <c:v>3%</c:v>
+                  </c:pt>
+                  <c:pt idx="1">
+                    <c:v>8%</c:v>
+                  </c:pt>
+                  <c:pt idx="2">
+                    <c:v>18%</c:v>
+                  </c:pt>
+                  <c:pt idx="3">
+                    <c:v>31%</c:v>
+                  </c:pt>
+                  <c:pt idx="4">
+                    <c:v>49%</c:v>
+                  </c:pt>
+                  <c:pt idx="5">
+                    <c:v>62%</c:v>
+                  </c:pt>
+                  <c:pt idx="6">
+                    <c:v>67%</c:v>
+                  </c:pt>
+                  <c:pt idx="7">
+                    <c:v>70%</c:v>
+                  </c:pt>
+                  <c:pt idx="8">
+                    <c:v>74%</c:v>
+                  </c:pt>
+                  <c:pt idx="9">
+                    <c:v>76%</c:v>
+                  </c:pt>
+                </c15:dlblRangeCache>
+              </c15:datalabelsRange>
+            </c:ext>
+            <c:ext xmlns:c16="http://schemas.microsoft.com/office/drawing/2014/chart" uri="{C3380CC4-5D6E-409C-BE32-E72D297353CC}">
+              <c16:uniqueId val="{00000015-5EB3-4EA8-B62C-82B52FF47658}"/>
             </c:ext>
           </c:extLst>
         </c:ser>
@@ -887,6 +1387,427 @@
 </c:chartSpace>
 </file>
 
+<file path=ppt/charts/chart3.xml><?xml version="1.0" encoding="utf-8"?>
+<c:chartSpace xmlns:c="http://schemas.openxmlformats.org/drawingml/2006/chart" xmlns:a="http://schemas.openxmlformats.org/drawingml/2006/main" xmlns:r="http://schemas.openxmlformats.org/officeDocument/2006/relationships" xmlns:c16r2="http://schemas.microsoft.com/office/drawing/2015/06/chart">
+  <c:date1904 val="0"/>
+  <c:lang val="en-US"/>
+  <c:roundedCorners val="0"/>
+  <mc:AlternateContent xmlns:mc="http://schemas.openxmlformats.org/markup-compatibility/2006">
+    <mc:Choice xmlns:c14="http://schemas.microsoft.com/office/drawing/2007/8/2/chart" Requires="c14">
+      <c14:style val="102"/>
+    </mc:Choice>
+    <mc:Fallback>
+      <c:style val="2"/>
+    </mc:Fallback>
+  </mc:AlternateContent>
+  <c:clrMapOvr bg1="lt1" tx1="dk1" bg2="lt2" tx2="dk2" accent1="accent1" accent2="accent2" accent3="accent3" accent4="accent4" accent5="accent5" accent6="accent6" hlink="hlink" folHlink="folHlink"/>
+  <c:chart>
+    <c:title>
+      <c:tx>
+        <c:rich>
+          <a:bodyPr rot="0" spcFirstLastPara="1" vertOverflow="ellipsis" vert="horz" wrap="square" anchor="ctr" anchorCtr="1"/>
+          <a:lstStyle/>
+          <a:p>
+            <a:pPr>
+              <a:defRPr sz="2000" b="0" i="0" u="none" strike="noStrike" kern="1200" spc="0" baseline="0">
+                <a:solidFill>
+                  <a:schemeClr val="tx1"/>
+                </a:solidFill>
+                <a:latin typeface="Noto Sans" panose="020B0502040504020204" pitchFamily="34" charset="0"/>
+                <a:ea typeface="Noto Sans" panose="020B0502040504020204" pitchFamily="34" charset="0"/>
+                <a:cs typeface="Noto Sans" panose="020B0502040504020204" pitchFamily="34" charset="0"/>
+              </a:defRPr>
+            </a:pPr>
+            <a:r>
+              <a:rPr lang="en-US" sz="2000"/>
+              <a:t>(%)</a:t>
+            </a:r>
+          </a:p>
+        </c:rich>
+      </c:tx>
+      <c:layout>
+        <c:manualLayout>
+          <c:xMode val="edge"/>
+          <c:yMode val="edge"/>
+          <c:x val="7.5678040244966385E-4"/>
+          <c:y val="0"/>
+        </c:manualLayout>
+      </c:layout>
+      <c:overlay val="0"/>
+      <c:spPr>
+        <a:noFill/>
+        <a:ln>
+          <a:noFill/>
+        </a:ln>
+        <a:effectLst/>
+      </c:spPr>
+      <c:txPr>
+        <a:bodyPr rot="0" spcFirstLastPara="1" vertOverflow="ellipsis" vert="horz" wrap="square" anchor="ctr" anchorCtr="1"/>
+        <a:lstStyle/>
+        <a:p>
+          <a:pPr>
+            <a:defRPr sz="2000" b="0" i="0" u="none" strike="noStrike" kern="1200" spc="0" baseline="0">
+              <a:solidFill>
+                <a:schemeClr val="tx1"/>
+              </a:solidFill>
+              <a:latin typeface="Noto Sans" panose="020B0502040504020204" pitchFamily="34" charset="0"/>
+              <a:ea typeface="Noto Sans" panose="020B0502040504020204" pitchFamily="34" charset="0"/>
+              <a:cs typeface="Noto Sans" panose="020B0502040504020204" pitchFamily="34" charset="0"/>
+            </a:defRPr>
+          </a:pPr>
+          <a:endParaRPr lang="en-US"/>
+        </a:p>
+      </c:txPr>
+    </c:title>
+    <c:autoTitleDeleted val="0"/>
+    <c:plotArea>
+      <c:layout>
+        <c:manualLayout>
+          <c:layoutTarget val="inner"/>
+          <c:xMode val="edge"/>
+          <c:yMode val="edge"/>
+          <c:x val="0.10232291941506386"/>
+          <c:y val="0.17797488600083666"/>
+          <c:w val="0.90297462817147855"/>
+          <c:h val="0.72055395166374214"/>
+        </c:manualLayout>
+      </c:layout>
+      <c:barChart>
+        <c:barDir val="col"/>
+        <c:grouping val="clustered"/>
+        <c:varyColors val="0"/>
+        <c:ser>
+          <c:idx val="0"/>
+          <c:order val="0"/>
+          <c:tx>
+            <c:v>Tỷ lệ nợ xấu</c:v>
+          </c:tx>
+          <c:spPr>
+            <a:solidFill>
+              <a:srgbClr val="84888B">
+                <a:lumMod val="40000"/>
+                <a:lumOff val="60000"/>
+              </a:srgbClr>
+            </a:solidFill>
+            <a:ln>
+              <a:noFill/>
+            </a:ln>
+            <a:effectLst/>
+          </c:spPr>
+          <c:invertIfNegative val="0"/>
+          <c:dLbls>
+            <c:delete val="1"/>
+          </c:dLbls>
+          <c:cat>
+            <c:strRef>
+              <c:f>Sheet5!$D$6:$D$8</c:f>
+              <c:strCache>
+                <c:ptCount val="5"/>
+                <c:pt idx="0">
+                  <c:v>22</c:v>
+                </c:pt>
+                <c:pt idx="1">
+                  <c:v>23</c:v>
+                </c:pt>
+                <c:pt idx="2">
+                  <c:v>24</c:v>
+                </c:pt>
+                <c:pt idx="3">
+                  <c:v>25</c:v>
+                </c:pt>
+                <c:pt idx="4">
+                  <c:v>26F</c:v>
+                </c:pt>
+              </c:strCache>
+            </c:strRef>
+          </c:cat>
+          <c:val>
+            <c:numRef>
+              <c:f>Sheet5!$E$6:$E$8</c:f>
+              <c:numCache>
+                <c:formatCode>#,##0.0</c:formatCode>
+                <c:ptCount val="5"/>
+                <c:pt idx="0">
+                  <c:v>1.09</c:v>
+                </c:pt>
+                <c:pt idx="1">
+                  <c:v>1.61</c:v>
+                </c:pt>
+                <c:pt idx="2">
+                  <c:v>1.62</c:v>
+                </c:pt>
+                <c:pt idx="3">
+                  <c:v>1.9</c:v>
+                </c:pt>
+                <c:pt idx="4">
+                  <c:v>1.5</c:v>
+                </c:pt>
+              </c:numCache>
+            </c:numRef>
+          </c:val>
+          <c:extLst>
+            <c:ext xmlns:c16="http://schemas.microsoft.com/office/drawing/2014/chart" uri="{C3380CC4-5D6E-409C-BE32-E72D297353CC}">
+              <c16:uniqueId val="{00000000-CB42-4D5C-9E2D-9A3216E5B34D}"/>
+            </c:ext>
+          </c:extLst>
+        </c:ser>
+        <c:ser>
+          <c:idx val="1"/>
+          <c:order val="1"/>
+          <c:tx>
+            <c:v>Chi phí tín dụng</c:v>
+          </c:tx>
+          <c:spPr>
+            <a:solidFill>
+              <a:srgbClr val="84888B"/>
+            </a:solidFill>
+            <a:ln>
+              <a:noFill/>
+            </a:ln>
+            <a:effectLst/>
+          </c:spPr>
+          <c:invertIfNegative val="0"/>
+          <c:dLbls>
+            <c:delete val="1"/>
+          </c:dLbls>
+          <c:cat>
+            <c:strRef>
+              <c:f>Sheet5!$D$6:$D$8</c:f>
+              <c:strCache>
+                <c:ptCount val="5"/>
+                <c:pt idx="0">
+                  <c:v>22</c:v>
+                </c:pt>
+                <c:pt idx="1">
+                  <c:v>23</c:v>
+                </c:pt>
+                <c:pt idx="2">
+                  <c:v>24</c:v>
+                </c:pt>
+                <c:pt idx="3">
+                  <c:v>25</c:v>
+                </c:pt>
+                <c:pt idx="4">
+                  <c:v>26F</c:v>
+                </c:pt>
+              </c:strCache>
+            </c:strRef>
+          </c:cat>
+          <c:val>
+            <c:numRef>
+              <c:f>Sheet5!$F$6:$F$8</c:f>
+              <c:numCache>
+                <c:formatCode>#,##0.0</c:formatCode>
+                <c:ptCount val="5"/>
+                <c:pt idx="0">
+                  <c:v>1.75</c:v>
+                </c:pt>
+                <c:pt idx="1">
+                  <c:v>1.0</c:v>
+                </c:pt>
+                <c:pt idx="2">
+                  <c:v>1.23</c:v>
+                </c:pt>
+                <c:pt idx="3">
+                  <c:v>1.57</c:v>
+                </c:pt>
+                <c:pt idx="4">
+                  <c:v>1.22</c:v>
+                </c:pt>
+              </c:numCache>
+            </c:numRef>
+          </c:val>
+          <c:extLst>
+            <c:ext xmlns:c16="http://schemas.microsoft.com/office/drawing/2014/chart" uri="{C3380CC4-5D6E-409C-BE32-E72D297353CC}">
+              <c16:uniqueId val="{00000001-CB42-4D5C-9E2D-9A3216E5B34D}"/>
+            </c:ext>
+          </c:extLst>
+        </c:ser>
+        <c:dLbls>
+          <c:dLblPos val="outEnd"/>
+          <c:showLegendKey val="0"/>
+          <c:showVal val="1"/>
+          <c:showCatName val="0"/>
+          <c:showSerName val="0"/>
+          <c:showPercent val="0"/>
+          <c:showBubbleSize val="0"/>
+        </c:dLbls>
+        <c:gapWidth val="219"/>
+        <c:overlap val="-27"/>
+        <c:axId val="510957903"/>
+        <c:axId val="510959823"/>
+      </c:barChart>
+      <c:catAx>
+        <c:axId val="510957903"/>
+        <c:scaling>
+          <c:orientation val="minMax"/>
+        </c:scaling>
+        <c:delete val="0"/>
+        <c:axPos val="b"/>
+        <c:numFmt formatCode="General" sourceLinked="1"/>
+        <c:majorTickMark val="out"/>
+        <c:minorTickMark val="none"/>
+        <c:tickLblPos val="nextTo"/>
+        <c:spPr>
+          <a:noFill/>
+          <a:ln w="9525" cap="flat" cmpd="sng" algn="ctr">
+            <a:solidFill>
+              <a:schemeClr val="bg1">
+                <a:lumMod val="65000"/>
+              </a:schemeClr>
+            </a:solidFill>
+            <a:round/>
+          </a:ln>
+          <a:effectLst/>
+        </c:spPr>
+        <c:txPr>
+          <a:bodyPr rot="-60000000" spcFirstLastPara="1" vertOverflow="ellipsis" vert="horz" wrap="square" anchor="ctr" anchorCtr="1"/>
+          <a:lstStyle/>
+          <a:p>
+            <a:pPr>
+              <a:defRPr sz="2000" b="0" i="0" u="none" strike="noStrike" kern="1200" baseline="0">
+                <a:solidFill>
+                  <a:schemeClr val="tx1"/>
+                </a:solidFill>
+                <a:latin typeface="Noto Sans" panose="020B0502040504020204" pitchFamily="34" charset="0"/>
+                <a:ea typeface="Noto Sans" panose="020B0502040504020204" pitchFamily="34" charset="0"/>
+                <a:cs typeface="Noto Sans" panose="020B0502040504020204" pitchFamily="34" charset="0"/>
+              </a:defRPr>
+            </a:pPr>
+            <a:endParaRPr lang="en-US"/>
+          </a:p>
+        </c:txPr>
+        <c:crossAx val="510959823"/>
+        <c:crosses val="autoZero"/>
+        <c:auto val="1"/>
+        <c:lblAlgn val="ctr"/>
+        <c:lblOffset val="100"/>
+        <c:noMultiLvlLbl val="0"/>
+      </c:catAx>
+      <c:valAx>
+        <c:axId val="510959823"/>
+        <c:scaling>
+          <c:orientation val="minMax"/>
+        </c:scaling>
+        <c:delete val="0"/>
+        <c:axPos val="l"/>
+        <c:numFmt formatCode="#,##0.0" sourceLinked="0"/>
+        <c:majorTickMark val="out"/>
+        <c:minorTickMark val="none"/>
+        <c:tickLblPos val="nextTo"/>
+        <c:spPr>
+          <a:noFill/>
+          <a:ln>
+            <a:solidFill>
+              <a:schemeClr val="bg1">
+                <a:lumMod val="65000"/>
+              </a:schemeClr>
+            </a:solidFill>
+          </a:ln>
+          <a:effectLst/>
+        </c:spPr>
+        <c:txPr>
+          <a:bodyPr rot="-60000000" spcFirstLastPara="1" vertOverflow="ellipsis" vert="horz" wrap="square" anchor="ctr" anchorCtr="1"/>
+          <a:lstStyle/>
+          <a:p>
+            <a:pPr>
+              <a:defRPr sz="2000" b="0" i="0" u="none" strike="noStrike" kern="1200" baseline="0">
+                <a:solidFill>
+                  <a:schemeClr val="tx1"/>
+                </a:solidFill>
+                <a:latin typeface="Noto Sans" panose="020B0502040504020204" pitchFamily="34" charset="0"/>
+                <a:ea typeface="Noto Sans" panose="020B0502040504020204" pitchFamily="34" charset="0"/>
+                <a:cs typeface="Noto Sans" panose="020B0502040504020204" pitchFamily="34" charset="0"/>
+              </a:defRPr>
+            </a:pPr>
+            <a:endParaRPr lang="en-US"/>
+          </a:p>
+        </c:txPr>
+        <c:crossAx val="510957903"/>
+        <c:crosses val="autoZero"/>
+        <c:crossBetween val="between"/>
+      </c:valAx>
+      <c:spPr>
+        <a:noFill/>
+        <a:ln>
+          <a:noFill/>
+        </a:ln>
+        <a:effectLst/>
+      </c:spPr>
+    </c:plotArea>
+    <c:legend>
+      <c:legendPos val="t"/>
+      <c:layout>
+        <c:manualLayout>
+          <c:xMode val="edge"/>
+          <c:yMode val="edge"/>
+          <c:x val="0.49415809236254299"/>
+          <c:y val="3.9012716475203416E-3"/>
+          <c:w val="0.50267955690272459"/>
+          <c:h val="0.10958677365850102"/>
+        </c:manualLayout>
+      </c:layout>
+      <c:overlay val="0"/>
+      <c:spPr>
+        <a:noFill/>
+        <a:ln>
+          <a:noFill/>
+        </a:ln>
+        <a:effectLst/>
+      </c:spPr>
+      <c:txPr>
+        <a:bodyPr rot="0" spcFirstLastPara="1" vertOverflow="ellipsis" vert="horz" wrap="square" anchor="ctr" anchorCtr="1"/>
+        <a:lstStyle/>
+        <a:p>
+          <a:pPr>
+            <a:defRPr sz="2000" b="0" i="0" u="none" strike="noStrike" kern="1200" baseline="0">
+              <a:solidFill>
+                <a:schemeClr val="tx1"/>
+              </a:solidFill>
+              <a:latin typeface="Noto Sans" panose="020B0502040504020204" pitchFamily="34" charset="0"/>
+              <a:ea typeface="Noto Sans" panose="020B0502040504020204" pitchFamily="34" charset="0"/>
+              <a:cs typeface="Noto Sans" panose="020B0502040504020204" pitchFamily="34" charset="0"/>
+            </a:defRPr>
+          </a:pPr>
+          <a:endParaRPr lang="en-US"/>
+        </a:p>
+      </c:txPr>
+    </c:legend>
+    <c:plotVisOnly val="1"/>
+    <c:dispBlanksAs val="gap"/>
+    <c:showDLblsOverMax val="0"/>
+  </c:chart>
+  <c:spPr>
+    <a:noFill/>
+    <a:ln w="9525" cap="flat" cmpd="sng" algn="ctr">
+      <a:noFill/>
+      <a:round/>
+    </a:ln>
+    <a:effectLst/>
+  </c:spPr>
+  <c:txPr>
+    <a:bodyPr/>
+    <a:lstStyle/>
+    <a:p>
+      <a:pPr algn="just">
+        <a:defRPr sz="2000">
+          <a:solidFill>
+            <a:schemeClr val="tx1"/>
+          </a:solidFill>
+          <a:latin typeface="Noto Sans" panose="020B0502040504020204" pitchFamily="34" charset="0"/>
+          <a:ea typeface="Noto Sans" panose="020B0502040504020204" pitchFamily="34" charset="0"/>
+          <a:cs typeface="Noto Sans" panose="020B0502040504020204" pitchFamily="34" charset="0"/>
+        </a:defRPr>
+      </a:pPr>
+      <a:endParaRPr lang="en-US"/>
+    </a:p>
+  </c:txPr>
+  <c:externalData r:id="rId4">
+    <c:autoUpdate val="0"/>
+  </c:externalData>
+</c:chartSpace>
+</file>
+
 <file path=ppt/charts/chart7.xml><?xml version="1.0" encoding="utf-8"?>
 <c:chartSpace xmlns:c="http://schemas.openxmlformats.org/drawingml/2006/chart" xmlns:a="http://schemas.openxmlformats.org/drawingml/2006/main" xmlns:r="http://schemas.openxmlformats.org/officeDocument/2006/relationships" xmlns:c16r2="http://schemas.microsoft.com/office/drawing/2015/06/chart">
   <c:date1904 val="0"/>
@@ -920,11 +1841,7 @@
             </a:pPr>
             <a:r>
               <a:rPr lang="en-US"/>
-              <a:t>(Nghìn</a:t>
-            </a:r>
-            <a:r>
-              <a:rPr lang="en-US" baseline="0"/>
-              <a:t> tỷ đồng)</a:t>
+              <a:t>(%)</a:t>
             </a:r>
             <a:endParaRPr lang="en-US"/>
           </a:p>
@@ -985,7 +1902,7 @@
           <c:idx val="0"/>
           <c:order val="0"/>
           <c:tx>
-            <c:v>Lợi nhuận trước thuế</c:v>
+            <c:v>ROE</c:v>
           </c:tx>
           <c:spPr>
             <a:solidFill>
@@ -1273,19 +2190,19 @@
                 <c:formatCode>#,##0.0</c:formatCode>
                 <c:ptCount val="5"/>
                 <c:pt idx="0">
-                  <c:v>22.729</c:v>
+                  <c:v>24.61</c:v>
                 </c:pt>
                 <c:pt idx="1">
-                  <c:v>26.306</c:v>
+                  <c:v>23.45</c:v>
                 </c:pt>
                 <c:pt idx="2">
-                  <c:v>28.829</c:v>
+                  <c:v>21.18</c:v>
                 </c:pt>
                 <c:pt idx="3">
-                  <c:v>34.268</c:v>
+                  <c:v>20.67</c:v>
                 </c:pt>
                 <c:pt idx="4">
-                  <c:v>40.726</c:v>
+                  <c:v>20.51</c:v>
                 </c:pt>
               </c:numCache>
             </c:numRef>
@@ -1476,7 +2393,7 @@
             </a:pPr>
             <a:r>
               <a:rPr lang="en-US" sz="2000"/>
-              <a:t>(Nghìn tỷ đồng)</a:t>
+              <a:t>(%)</a:t>
             </a:r>
             <a:endParaRPr lang="en-US" sz="2000"/>
           </a:p>
@@ -1537,7 +2454,7 @@
           <c:idx val="0"/>
           <c:order val="0"/>
           <c:tx>
-            <c:v>Vốn điều lệ</c:v>
+            <c:v>NIM</c:v>
           </c:tx>
           <c:spPr>
             <a:solidFill>
@@ -1632,19 +2549,19 @@
                 <c:formatCode>#,##0.0</c:formatCode>
                 <c:ptCount val="5"/>
                 <c:pt idx="0">
-                  <c:v>45.34</c:v>
+                  <c:v>5.76</c:v>
                 </c:pt>
                 <c:pt idx="1">
-                  <c:v>52.141</c:v>
+                  <c:v>4.87</c:v>
                 </c:pt>
                 <c:pt idx="2">
-                  <c:v>53.063</c:v>
+                  <c:v>4.13</c:v>
                 </c:pt>
                 <c:pt idx="3">
-                  <c:v>80.55</c:v>
+                  <c:v>3.76</c:v>
                 </c:pt>
                 <c:pt idx="4">
-                  <c:v>102.687</c:v>
+                  <c:v>3.69</c:v>
                 </c:pt>
               </c:numCache>
             </c:numRef>
@@ -1652,6 +2569,75 @@
           <c:extLst>
             <c:ext xmlns:c16="http://schemas.microsoft.com/office/drawing/2014/chart" uri="{C3380CC4-5D6E-409C-BE32-E72D297353CC}">
               <c16:uniqueId val="{00000000-3037-4845-9C92-8BCCB9F5CFF7}"/>
+            </c:ext>
+          </c:extLst>
+        </c:ser>
+        <c:ser>
+          <c:idx val="1"/>
+          <c:order val="1"/>
+          <c:tx>
+            <c:v>Chi phí vốn</c:v>
+          </c:tx>
+          <c:spPr>
+            <a:solidFill>
+              <a:srgbClr val="FE6700"/>
+            </a:solidFill>
+            <a:ln>
+              <a:noFill/>
+            </a:ln>
+            <a:effectLst/>
+          </c:spPr>
+          <c:invertIfNegative val="0"/>
+          <c:cat>
+            <c:strRef>
+              <c:f>Sheet10!$E$12:$N$12</c:f>
+              <c:strCache>
+                <c:ptCount val="5"/>
+                <c:pt idx="0">
+                  <c:v>22</c:v>
+                </c:pt>
+                <c:pt idx="1">
+                  <c:v>23</c:v>
+                </c:pt>
+                <c:pt idx="2">
+                  <c:v>24</c:v>
+                </c:pt>
+                <c:pt idx="3">
+                  <c:v>25</c:v>
+                </c:pt>
+                <c:pt idx="4">
+                  <c:v>26F</c:v>
+                </c:pt>
+              </c:strCache>
+            </c:strRef>
+          </c:cat>
+          <c:val>
+            <c:numRef>
+              <c:f>Sheet10!$E$14:$N$14</c:f>
+              <c:numCache>
+                <c:formatCode>#,##0.0</c:formatCode>
+                <c:ptCount val="5"/>
+                <c:pt idx="0">
+                  <c:v>2.83</c:v>
+                </c:pt>
+                <c:pt idx="1">
+                  <c:v>4.3</c:v>
+                </c:pt>
+                <c:pt idx="2">
+                  <c:v>3.51</c:v>
+                </c:pt>
+                <c:pt idx="3">
+                  <c:v>3.24</c:v>
+                </c:pt>
+                <c:pt idx="4">
+                  <c:v>3.1</c:v>
+                </c:pt>
+              </c:numCache>
+            </c:numRef>
+          </c:val>
+          <c:extLst>
+            <c:ext xmlns:c16="http://schemas.microsoft.com/office/drawing/2014/chart" uri="{C3380CC4-5D6E-409C-BE32-E72D297353CC}">
+              <c16:uniqueId val="{00000001-3037-4845-9C92-8BCCB9F5CFF7}"/>
             </c:ext>
           </c:extLst>
         </c:ser>
@@ -1675,7 +2661,7 @@
         </c:scaling>
         <c:delete val="0"/>
         <c:axPos val="b"/>
-        <c:numFmt formatCode="#,##0" sourceLinked="1"/>
+        <c:numFmt formatCode="#,##0.0" sourceLinked="0"/>
         <c:majorTickMark val="none"/>
         <c:minorTickMark val="none"/>
         <c:tickLblPos val="nextTo"/>
@@ -1851,6 +2837,46 @@
 </cs:colorStyle>
 </file>
 
+<file path=ppt/charts/colors3.xml><?xml version="1.0" encoding="utf-8"?>
+<cs:colorStyle xmlns:cs="http://schemas.microsoft.com/office/drawing/2012/chartStyle" xmlns:a="http://schemas.openxmlformats.org/drawingml/2006/main" meth="cycle" id="10">
+  <a:schemeClr val="accent1"/>
+  <a:schemeClr val="accent2"/>
+  <a:schemeClr val="accent3"/>
+  <a:schemeClr val="accent4"/>
+  <a:schemeClr val="accent5"/>
+  <a:schemeClr val="accent6"/>
+  <cs:variation/>
+  <cs:variation>
+    <a:lumMod val="60000"/>
+  </cs:variation>
+  <cs:variation>
+    <a:lumMod val="80000"/>
+    <a:lumOff val="20000"/>
+  </cs:variation>
+  <cs:variation>
+    <a:lumMod val="80000"/>
+  </cs:variation>
+  <cs:variation>
+    <a:lumMod val="60000"/>
+    <a:lumOff val="40000"/>
+  </cs:variation>
+  <cs:variation>
+    <a:lumMod val="50000"/>
+  </cs:variation>
+  <cs:variation>
+    <a:lumMod val="70000"/>
+    <a:lumOff val="30000"/>
+  </cs:variation>
+  <cs:variation>
+    <a:lumMod val="70000"/>
+  </cs:variation>
+  <cs:variation>
+    <a:lumMod val="50000"/>
+    <a:lumOff val="50000"/>
+  </cs:variation>
+</cs:colorStyle>
+</file>
+
 <file path=ppt/charts/colors7.xml><?xml version="1.0" encoding="utf-8"?>
 <cs:colorStyle xmlns:cs="http://schemas.microsoft.com/office/drawing/2012/chartStyle" xmlns:a="http://schemas.openxmlformats.org/drawingml/2006/main" meth="cycle" id="10">
   <a:schemeClr val="accent1"/>
@@ -1932,6 +2958,509 @@
 </file>
 
 <file path=ppt/charts/style1.xml><?xml version="1.0" encoding="utf-8"?>
+<cs:chartStyle xmlns:cs="http://schemas.microsoft.com/office/drawing/2012/chartStyle" xmlns:a="http://schemas.openxmlformats.org/drawingml/2006/main" id="201">
+  <cs:axisTitle>
+    <cs:lnRef idx="0"/>
+    <cs:fillRef idx="0"/>
+    <cs:effectRef idx="0"/>
+    <cs:fontRef idx="minor">
+      <a:schemeClr val="tx1">
+        <a:lumMod val="65000"/>
+        <a:lumOff val="35000"/>
+      </a:schemeClr>
+    </cs:fontRef>
+    <cs:defRPr sz="1000" kern="1200"/>
+  </cs:axisTitle>
+  <cs:categoryAxis>
+    <cs:lnRef idx="0"/>
+    <cs:fillRef idx="0"/>
+    <cs:effectRef idx="0"/>
+    <cs:fontRef idx="minor">
+      <a:schemeClr val="tx1">
+        <a:lumMod val="65000"/>
+        <a:lumOff val="35000"/>
+      </a:schemeClr>
+    </cs:fontRef>
+    <cs:spPr>
+      <a:ln w="9525" cap="flat" cmpd="sng" algn="ctr">
+        <a:solidFill>
+          <a:schemeClr val="tx1">
+            <a:lumMod val="15000"/>
+            <a:lumOff val="85000"/>
+          </a:schemeClr>
+        </a:solidFill>
+        <a:round/>
+      </a:ln>
+    </cs:spPr>
+    <cs:defRPr sz="900" kern="1200"/>
+  </cs:categoryAxis>
+  <cs:chartArea mods="allowNoFillOverride allowNoLineOverride">
+    <cs:lnRef idx="0"/>
+    <cs:fillRef idx="0"/>
+    <cs:effectRef idx="0"/>
+    <cs:fontRef idx="minor">
+      <a:schemeClr val="tx1"/>
+    </cs:fontRef>
+    <cs:spPr>
+      <a:solidFill>
+        <a:schemeClr val="bg1"/>
+      </a:solidFill>
+      <a:ln w="9525" cap="flat" cmpd="sng" algn="ctr">
+        <a:solidFill>
+          <a:schemeClr val="tx1">
+            <a:lumMod val="15000"/>
+            <a:lumOff val="85000"/>
+          </a:schemeClr>
+        </a:solidFill>
+        <a:round/>
+      </a:ln>
+    </cs:spPr>
+    <cs:defRPr sz="1000" kern="1200"/>
+  </cs:chartArea>
+  <cs:dataLabel>
+    <cs:lnRef idx="0"/>
+    <cs:fillRef idx="0"/>
+    <cs:effectRef idx="0"/>
+    <cs:fontRef idx="minor">
+      <a:schemeClr val="tx1">
+        <a:lumMod val="75000"/>
+        <a:lumOff val="25000"/>
+      </a:schemeClr>
+    </cs:fontRef>
+    <cs:defRPr sz="900" kern="1200"/>
+  </cs:dataLabel>
+  <cs:dataLabelCallout>
+    <cs:lnRef idx="0"/>
+    <cs:fillRef idx="0"/>
+    <cs:effectRef idx="0"/>
+    <cs:fontRef idx="minor">
+      <a:schemeClr val="dk1">
+        <a:lumMod val="65000"/>
+        <a:lumOff val="35000"/>
+      </a:schemeClr>
+    </cs:fontRef>
+    <cs:spPr>
+      <a:solidFill>
+        <a:schemeClr val="lt1"/>
+      </a:solidFill>
+      <a:ln>
+        <a:solidFill>
+          <a:schemeClr val="dk1">
+            <a:lumMod val="25000"/>
+            <a:lumOff val="75000"/>
+          </a:schemeClr>
+        </a:solidFill>
+      </a:ln>
+    </cs:spPr>
+    <cs:defRPr sz="900" kern="1200"/>
+    <cs:bodyPr rot="0" spcFirstLastPara="1" vertOverflow="clip" horzOverflow="clip" vert="horz" wrap="square" lIns="36576" tIns="18288" rIns="36576" bIns="18288" anchor="ctr" anchorCtr="1">
+      <a:spAutoFit/>
+    </cs:bodyPr>
+  </cs:dataLabelCallout>
+  <cs:dataPoint>
+    <cs:lnRef idx="0"/>
+    <cs:fillRef idx="1">
+      <cs:styleClr val="auto"/>
+    </cs:fillRef>
+    <cs:effectRef idx="0"/>
+    <cs:fontRef idx="minor">
+      <a:schemeClr val="tx1"/>
+    </cs:fontRef>
+  </cs:dataPoint>
+  <cs:dataPoint3D>
+    <cs:lnRef idx="0"/>
+    <cs:fillRef idx="1">
+      <cs:styleClr val="auto"/>
+    </cs:fillRef>
+    <cs:effectRef idx="0"/>
+    <cs:fontRef idx="minor">
+      <a:schemeClr val="tx1"/>
+    </cs:fontRef>
+  </cs:dataPoint3D>
+  <cs:dataPointLine>
+    <cs:lnRef idx="0">
+      <cs:styleClr val="auto"/>
+    </cs:lnRef>
+    <cs:fillRef idx="1"/>
+    <cs:effectRef idx="0"/>
+    <cs:fontRef idx="minor">
+      <a:schemeClr val="tx1"/>
+    </cs:fontRef>
+    <cs:spPr>
+      <a:ln w="28575" cap="rnd">
+        <a:solidFill>
+          <a:schemeClr val="phClr"/>
+        </a:solidFill>
+        <a:round/>
+      </a:ln>
+    </cs:spPr>
+  </cs:dataPointLine>
+  <cs:dataPointMarker>
+    <cs:lnRef idx="0">
+      <cs:styleClr val="auto"/>
+    </cs:lnRef>
+    <cs:fillRef idx="1">
+      <cs:styleClr val="auto"/>
+    </cs:fillRef>
+    <cs:effectRef idx="0"/>
+    <cs:fontRef idx="minor">
+      <a:schemeClr val="tx1"/>
+    </cs:fontRef>
+    <cs:spPr>
+      <a:ln w="9525">
+        <a:solidFill>
+          <a:schemeClr val="phClr"/>
+        </a:solidFill>
+      </a:ln>
+    </cs:spPr>
+  </cs:dataPointMarker>
+  <cs:dataPointMarkerLayout symbol="circle" size="5"/>
+  <cs:dataPointWireframe>
+    <cs:lnRef idx="0">
+      <cs:styleClr val="auto"/>
+    </cs:lnRef>
+    <cs:fillRef idx="1"/>
+    <cs:effectRef idx="0"/>
+    <cs:fontRef idx="minor">
+      <a:schemeClr val="tx1"/>
+    </cs:fontRef>
+    <cs:spPr>
+      <a:ln w="9525" cap="rnd">
+        <a:solidFill>
+          <a:schemeClr val="phClr"/>
+        </a:solidFill>
+        <a:round/>
+      </a:ln>
+    </cs:spPr>
+  </cs:dataPointWireframe>
+  <cs:dataTable>
+    <cs:lnRef idx="0"/>
+    <cs:fillRef idx="0"/>
+    <cs:effectRef idx="0"/>
+    <cs:fontRef idx="minor">
+      <a:schemeClr val="tx1">
+        <a:lumMod val="65000"/>
+        <a:lumOff val="35000"/>
+      </a:schemeClr>
+    </cs:fontRef>
+    <cs:spPr>
+      <a:noFill/>
+      <a:ln w="9525" cap="flat" cmpd="sng" algn="ctr">
+        <a:solidFill>
+          <a:schemeClr val="tx1">
+            <a:lumMod val="15000"/>
+            <a:lumOff val="85000"/>
+          </a:schemeClr>
+        </a:solidFill>
+        <a:round/>
+      </a:ln>
+    </cs:spPr>
+    <cs:defRPr sz="900" kern="1200"/>
+  </cs:dataTable>
+  <cs:downBar>
+    <cs:lnRef idx="0"/>
+    <cs:fillRef idx="0"/>
+    <cs:effectRef idx="0"/>
+    <cs:fontRef idx="minor">
+      <a:schemeClr val="dk1"/>
+    </cs:fontRef>
+    <cs:spPr>
+      <a:solidFill>
+        <a:schemeClr val="dk1">
+          <a:lumMod val="65000"/>
+          <a:lumOff val="35000"/>
+        </a:schemeClr>
+      </a:solidFill>
+      <a:ln w="9525">
+        <a:solidFill>
+          <a:schemeClr val="tx1">
+            <a:lumMod val="65000"/>
+            <a:lumOff val="35000"/>
+          </a:schemeClr>
+        </a:solidFill>
+      </a:ln>
+    </cs:spPr>
+  </cs:downBar>
+  <cs:dropLine>
+    <cs:lnRef idx="0"/>
+    <cs:fillRef idx="0"/>
+    <cs:effectRef idx="0"/>
+    <cs:fontRef idx="minor">
+      <a:schemeClr val="tx1"/>
+    </cs:fontRef>
+    <cs:spPr>
+      <a:ln w="9525" cap="flat" cmpd="sng" algn="ctr">
+        <a:solidFill>
+          <a:schemeClr val="tx1">
+            <a:lumMod val="35000"/>
+            <a:lumOff val="65000"/>
+          </a:schemeClr>
+        </a:solidFill>
+        <a:round/>
+      </a:ln>
+    </cs:spPr>
+  </cs:dropLine>
+  <cs:errorBar>
+    <cs:lnRef idx="0"/>
+    <cs:fillRef idx="0"/>
+    <cs:effectRef idx="0"/>
+    <cs:fontRef idx="minor">
+      <a:schemeClr val="tx1"/>
+    </cs:fontRef>
+    <cs:spPr>
+      <a:ln w="9525" cap="flat" cmpd="sng" algn="ctr">
+        <a:solidFill>
+          <a:schemeClr val="tx1">
+            <a:lumMod val="65000"/>
+            <a:lumOff val="35000"/>
+          </a:schemeClr>
+        </a:solidFill>
+        <a:round/>
+      </a:ln>
+    </cs:spPr>
+  </cs:errorBar>
+  <cs:floor>
+    <cs:lnRef idx="0"/>
+    <cs:fillRef idx="0"/>
+    <cs:effectRef idx="0"/>
+    <cs:fontRef idx="minor">
+      <a:schemeClr val="tx1"/>
+    </cs:fontRef>
+    <cs:spPr>
+      <a:noFill/>
+      <a:ln>
+        <a:noFill/>
+      </a:ln>
+    </cs:spPr>
+  </cs:floor>
+  <cs:gridlineMajor>
+    <cs:lnRef idx="0"/>
+    <cs:fillRef idx="0"/>
+    <cs:effectRef idx="0"/>
+    <cs:fontRef idx="minor">
+      <a:schemeClr val="tx1"/>
+    </cs:fontRef>
+    <cs:spPr>
+      <a:ln w="9525" cap="flat" cmpd="sng" algn="ctr">
+        <a:solidFill>
+          <a:schemeClr val="tx1">
+            <a:lumMod val="15000"/>
+            <a:lumOff val="85000"/>
+          </a:schemeClr>
+        </a:solidFill>
+        <a:round/>
+      </a:ln>
+    </cs:spPr>
+  </cs:gridlineMajor>
+  <cs:gridlineMinor>
+    <cs:lnRef idx="0"/>
+    <cs:fillRef idx="0"/>
+    <cs:effectRef idx="0"/>
+    <cs:fontRef idx="minor">
+      <a:schemeClr val="tx1"/>
+    </cs:fontRef>
+    <cs:spPr>
+      <a:ln w="9525" cap="flat" cmpd="sng" algn="ctr">
+        <a:solidFill>
+          <a:schemeClr val="tx1">
+            <a:lumMod val="5000"/>
+            <a:lumOff val="95000"/>
+          </a:schemeClr>
+        </a:solidFill>
+        <a:round/>
+      </a:ln>
+    </cs:spPr>
+  </cs:gridlineMinor>
+  <cs:hiLoLine>
+    <cs:lnRef idx="0"/>
+    <cs:fillRef idx="0"/>
+    <cs:effectRef idx="0"/>
+    <cs:fontRef idx="minor">
+      <a:schemeClr val="tx1"/>
+    </cs:fontRef>
+    <cs:spPr>
+      <a:ln w="9525" cap="flat" cmpd="sng" algn="ctr">
+        <a:solidFill>
+          <a:schemeClr val="tx1">
+            <a:lumMod val="75000"/>
+            <a:lumOff val="25000"/>
+          </a:schemeClr>
+        </a:solidFill>
+        <a:round/>
+      </a:ln>
+    </cs:spPr>
+  </cs:hiLoLine>
+  <cs:leaderLine>
+    <cs:lnRef idx="0"/>
+    <cs:fillRef idx="0"/>
+    <cs:effectRef idx="0"/>
+    <cs:fontRef idx="minor">
+      <a:schemeClr val="tx1"/>
+    </cs:fontRef>
+    <cs:spPr>
+      <a:ln w="9525" cap="flat" cmpd="sng" algn="ctr">
+        <a:solidFill>
+          <a:schemeClr val="tx1">
+            <a:lumMod val="35000"/>
+            <a:lumOff val="65000"/>
+          </a:schemeClr>
+        </a:solidFill>
+        <a:round/>
+      </a:ln>
+    </cs:spPr>
+  </cs:leaderLine>
+  <cs:legend>
+    <cs:lnRef idx="0"/>
+    <cs:fillRef idx="0"/>
+    <cs:effectRef idx="0"/>
+    <cs:fontRef idx="minor">
+      <a:schemeClr val="tx1">
+        <a:lumMod val="65000"/>
+        <a:lumOff val="35000"/>
+      </a:schemeClr>
+    </cs:fontRef>
+    <cs:defRPr sz="900" kern="1200"/>
+  </cs:legend>
+  <cs:plotArea mods="allowNoFillOverride allowNoLineOverride">
+    <cs:lnRef idx="0"/>
+    <cs:fillRef idx="0"/>
+    <cs:effectRef idx="0"/>
+    <cs:fontRef idx="minor">
+      <a:schemeClr val="tx1"/>
+    </cs:fontRef>
+  </cs:plotArea>
+  <cs:plotArea3D mods="allowNoFillOverride allowNoLineOverride">
+    <cs:lnRef idx="0"/>
+    <cs:fillRef idx="0"/>
+    <cs:effectRef idx="0"/>
+    <cs:fontRef idx="minor">
+      <a:schemeClr val="tx1"/>
+    </cs:fontRef>
+  </cs:plotArea3D>
+  <cs:seriesAxis>
+    <cs:lnRef idx="0"/>
+    <cs:fillRef idx="0"/>
+    <cs:effectRef idx="0"/>
+    <cs:fontRef idx="minor">
+      <a:schemeClr val="tx1">
+        <a:lumMod val="65000"/>
+        <a:lumOff val="35000"/>
+      </a:schemeClr>
+    </cs:fontRef>
+    <cs:defRPr sz="900" kern="1200"/>
+  </cs:seriesAxis>
+  <cs:seriesLine>
+    <cs:lnRef idx="0"/>
+    <cs:fillRef idx="0"/>
+    <cs:effectRef idx="0"/>
+    <cs:fontRef idx="minor">
+      <a:schemeClr val="tx1"/>
+    </cs:fontRef>
+    <cs:spPr>
+      <a:ln w="9525" cap="flat" cmpd="sng" algn="ctr">
+        <a:solidFill>
+          <a:schemeClr val="tx1">
+            <a:lumMod val="35000"/>
+            <a:lumOff val="65000"/>
+          </a:schemeClr>
+        </a:solidFill>
+        <a:round/>
+      </a:ln>
+    </cs:spPr>
+  </cs:seriesLine>
+  <cs:title>
+    <cs:lnRef idx="0"/>
+    <cs:fillRef idx="0"/>
+    <cs:effectRef idx="0"/>
+    <cs:fontRef idx="minor">
+      <a:schemeClr val="tx1">
+        <a:lumMod val="65000"/>
+        <a:lumOff val="35000"/>
+      </a:schemeClr>
+    </cs:fontRef>
+    <cs:defRPr sz="1400" b="0" kern="1200" spc="0" baseline="0"/>
+  </cs:title>
+  <cs:trendline>
+    <cs:lnRef idx="0">
+      <cs:styleClr val="auto"/>
+    </cs:lnRef>
+    <cs:fillRef idx="0"/>
+    <cs:effectRef idx="0"/>
+    <cs:fontRef idx="minor">
+      <a:schemeClr val="tx1"/>
+    </cs:fontRef>
+    <cs:spPr>
+      <a:ln w="19050" cap="rnd">
+        <a:solidFill>
+          <a:schemeClr val="phClr"/>
+        </a:solidFill>
+        <a:prstDash val="sysDot"/>
+      </a:ln>
+    </cs:spPr>
+  </cs:trendline>
+  <cs:trendlineLabel>
+    <cs:lnRef idx="0"/>
+    <cs:fillRef idx="0"/>
+    <cs:effectRef idx="0"/>
+    <cs:fontRef idx="minor">
+      <a:schemeClr val="tx1">
+        <a:lumMod val="65000"/>
+        <a:lumOff val="35000"/>
+      </a:schemeClr>
+    </cs:fontRef>
+    <cs:defRPr sz="900" kern="1200"/>
+  </cs:trendlineLabel>
+  <cs:upBar>
+    <cs:lnRef idx="0"/>
+    <cs:fillRef idx="0"/>
+    <cs:effectRef idx="0"/>
+    <cs:fontRef idx="minor">
+      <a:schemeClr val="dk1"/>
+    </cs:fontRef>
+    <cs:spPr>
+      <a:solidFill>
+        <a:schemeClr val="lt1"/>
+      </a:solidFill>
+      <a:ln w="9525">
+        <a:solidFill>
+          <a:schemeClr val="tx1">
+            <a:lumMod val="15000"/>
+            <a:lumOff val="85000"/>
+          </a:schemeClr>
+        </a:solidFill>
+      </a:ln>
+    </cs:spPr>
+  </cs:upBar>
+  <cs:valueAxis>
+    <cs:lnRef idx="0"/>
+    <cs:fillRef idx="0"/>
+    <cs:effectRef idx="0"/>
+    <cs:fontRef idx="minor">
+      <a:schemeClr val="tx1">
+        <a:lumMod val="65000"/>
+        <a:lumOff val="35000"/>
+      </a:schemeClr>
+    </cs:fontRef>
+    <cs:defRPr sz="900" kern="1200"/>
+  </cs:valueAxis>
+  <cs:wall>
+    <cs:lnRef idx="0"/>
+    <cs:fillRef idx="0"/>
+    <cs:effectRef idx="0"/>
+    <cs:fontRef idx="minor">
+      <a:schemeClr val="tx1"/>
+    </cs:fontRef>
+    <cs:spPr>
+      <a:noFill/>
+      <a:ln>
+        <a:noFill/>
+      </a:ln>
+    </cs:spPr>
+  </cs:wall>
+</cs:chartStyle>
+</file>
+
+<file path=ppt/charts/style3.xml><?xml version="1.0" encoding="utf-8"?>
 <cs:chartStyle xmlns:cs="http://schemas.microsoft.com/office/drawing/2012/chartStyle" xmlns:a="http://schemas.openxmlformats.org/drawingml/2006/main" id="201">
   <cs:axisTitle>
     <cs:lnRef idx="0"/>
@@ -7135,7 +8664,7 @@
                 <a:ea typeface="Karla" pitchFamily="2" charset="0"/>
                 <a:cs typeface="Poppins" panose="00000500000000000000" pitchFamily="2" charset="0"/>
               </a:rPr>
-              <a:t>Tổng tài sản tăng 43% trong năm 2025 và hướng tới mốc 2,1 triệu tỷ đồng trong năm 2026</a:t>
+              <a:t>Tín dụng tăng 35% trong năm 2025 và liên tục mở rộng nhanh hơn tốc độ huy động</a:t>
             </a:r>
           </a:p>
         </p:txBody>
@@ -7271,7 +8800,7 @@
                 <a:ea typeface="+mn-ea"/>
                 <a:cs typeface="+mn-cs"/>
               </a:rPr>
-              <a:t>Nguồn: Báo cáo tài chính MB, kế hoạch ĐHĐCĐ 2026</a:t>
+              <a:t>Nguồn: Dữ liệu doanh nghiệp, Mirae Asset Research ước tính</a:t>
             </a:r>
             <a:endParaRPr kumimoji="0" lang="en-US" sz="1200" b="0" i="0" u="none" strike="noStrike" kern="1200" cap="none" spc="0" normalizeH="0" baseline="0" noProof="0" dirty="0">
               <a:ln>
@@ -7294,6 +8823,521 @@
     <p:extLst>
       <p:ext uri="{BB962C8B-B14F-4D97-AF65-F5344CB8AC3E}">
         <p14:creationId xmlns:p14="http://schemas.microsoft.com/office/powerpoint/2010/main" val="2981807948"/>
+      </p:ext>
+    </p:extLst>
+  </p:cSld>
+  <p:clrMapOvr>
+    <a:masterClrMapping/>
+  </p:clrMapOvr>
+</p:sld>
+</file>
+
+<file path=ppt/slides/slide3.xml><?xml version="1.0" encoding="utf-8"?>
+<p:sld xmlns:a="http://schemas.openxmlformats.org/drawingml/2006/main" xmlns:r="http://schemas.openxmlformats.org/officeDocument/2006/relationships" xmlns:p="http://schemas.openxmlformats.org/presentationml/2006/main">
+  <p:cSld>
+    <p:spTree>
+      <p:nvGrpSpPr>
+        <p:cNvPr id="1" name="">
+          <a:extLst>
+            <a:ext uri="{FF2B5EF4-FFF2-40B4-BE49-F238E27FC236}">
+              <a16:creationId xmlns:a16="http://schemas.microsoft.com/office/drawing/2014/main" id="{7F55339C-9C1D-C6E0-C3CE-8803DE8462D7}"/>
+            </a:ext>
+          </a:extLst>
+        </p:cNvPr>
+        <p:cNvGrpSpPr/>
+        <p:nvPr/>
+      </p:nvGrpSpPr>
+      <p:grpSpPr>
+        <a:xfrm>
+          <a:off x="0" y="0"/>
+          <a:ext cx="0" cy="0"/>
+          <a:chOff x="0" y="0"/>
+          <a:chExt cx="0" cy="0"/>
+        </a:xfrm>
+      </p:grpSpPr>
+      <p:pic>
+        <p:nvPicPr>
+          <p:cNvPr id="6" name="Picture 5" descr="A white rectangle with pink border&#10;&#10;Description automatically generated">
+            <a:extLst>
+              <a:ext uri="{FF2B5EF4-FFF2-40B4-BE49-F238E27FC236}">
+                <a16:creationId xmlns:a16="http://schemas.microsoft.com/office/drawing/2014/main" id="{E49371F1-C485-3869-078B-C0B56E527C1D}"/>
+              </a:ext>
+            </a:extLst>
+          </p:cNvPr>
+          <p:cNvPicPr>
+            <a:picLocks noGrp="1" noRot="1" noChangeAspect="1" noMove="1" noResize="1" noEditPoints="1" noAdjustHandles="1" noChangeArrowheads="1" noChangeShapeType="1" noCrop="1"/>
+          </p:cNvPicPr>
+          <p:nvPr/>
+        </p:nvPicPr>
+        <p:blipFill>
+          <a:blip r:embed="rId2">
+            <a:extLst>
+              <a:ext uri="{28A0092B-C50C-407E-A947-70E740481C1C}">
+                <a14:useLocalDpi xmlns:a14="http://schemas.microsoft.com/office/drawing/2010/main" val="0"/>
+              </a:ext>
+            </a:extLst>
+          </a:blip>
+          <a:stretch>
+            <a:fillRect/>
+          </a:stretch>
+        </p:blipFill>
+        <p:spPr>
+          <a:xfrm>
+            <a:off x="0" y="0"/>
+            <a:ext cx="10287000" cy="13716000"/>
+          </a:xfrm>
+          <a:prstGeom prst="rect">
+            <a:avLst/>
+          </a:prstGeom>
+        </p:spPr>
+      </p:pic>
+      <p:sp>
+        <p:nvSpPr>
+          <p:cNvPr id="4" name="Freeform: Shape 3">
+            <a:extLst>
+              <a:ext uri="{FF2B5EF4-FFF2-40B4-BE49-F238E27FC236}">
+                <a16:creationId xmlns:a16="http://schemas.microsoft.com/office/drawing/2014/main" id="{C7CBF741-E10B-B88A-1854-2ABEEA1FD9C3}"/>
+              </a:ext>
+            </a:extLst>
+          </p:cNvPr>
+          <p:cNvSpPr/>
+          <p:nvPr/>
+        </p:nvSpPr>
+        <p:spPr>
+          <a:xfrm>
+            <a:off x="586534" y="668818"/>
+            <a:ext cx="9113926" cy="1177680"/>
+          </a:xfrm>
+          <a:custGeom>
+            <a:avLst/>
+            <a:gdLst>
+              <a:gd name="connsiteX0" fmla="*/ 525894 w 9113926"/>
+              <a:gd name="connsiteY0" fmla="*/ 0 h 1177680"/>
+              <a:gd name="connsiteX1" fmla="*/ 8588032 w 9113926"/>
+              <a:gd name="connsiteY1" fmla="*/ 0 h 1177680"/>
+              <a:gd name="connsiteX2" fmla="*/ 9113925 w 9113926"/>
+              <a:gd name="connsiteY2" fmla="*/ 525893 h 1177680"/>
+              <a:gd name="connsiteX3" fmla="*/ 9113925 w 9113926"/>
+              <a:gd name="connsiteY3" fmla="*/ 609084 h 1177680"/>
+              <a:gd name="connsiteX4" fmla="*/ 9113926 w 9113926"/>
+              <a:gd name="connsiteY4" fmla="*/ 609084 h 1177680"/>
+              <a:gd name="connsiteX5" fmla="*/ 9113926 w 9113926"/>
+              <a:gd name="connsiteY5" fmla="*/ 1177679 h 1177680"/>
+              <a:gd name="connsiteX6" fmla="*/ 8588042 w 9113926"/>
+              <a:gd name="connsiteY6" fmla="*/ 1177679 h 1177680"/>
+              <a:gd name="connsiteX7" fmla="*/ 8588032 w 9113926"/>
+              <a:gd name="connsiteY7" fmla="*/ 1177680 h 1177680"/>
+              <a:gd name="connsiteX8" fmla="*/ 525894 w 9113926"/>
+              <a:gd name="connsiteY8" fmla="*/ 1177680 h 1177680"/>
+              <a:gd name="connsiteX9" fmla="*/ 525884 w 9113926"/>
+              <a:gd name="connsiteY9" fmla="*/ 1177679 h 1177680"/>
+              <a:gd name="connsiteX10" fmla="*/ 0 w 9113926"/>
+              <a:gd name="connsiteY10" fmla="*/ 1177679 h 1177680"/>
+              <a:gd name="connsiteX11" fmla="*/ 0 w 9113926"/>
+              <a:gd name="connsiteY11" fmla="*/ 609084 h 1177680"/>
+              <a:gd name="connsiteX12" fmla="*/ 1 w 9113926"/>
+              <a:gd name="connsiteY12" fmla="*/ 609084 h 1177680"/>
+              <a:gd name="connsiteX13" fmla="*/ 1 w 9113926"/>
+              <a:gd name="connsiteY13" fmla="*/ 525893 h 1177680"/>
+              <a:gd name="connsiteX14" fmla="*/ 525894 w 9113926"/>
+              <a:gd name="connsiteY14" fmla="*/ 0 h 1177680"/>
+            </a:gdLst>
+            <a:ahLst/>
+            <a:cxnLst>
+              <a:cxn ang="0">
+                <a:pos x="connsiteX0" y="connsiteY0"/>
+              </a:cxn>
+              <a:cxn ang="0">
+                <a:pos x="connsiteX1" y="connsiteY1"/>
+              </a:cxn>
+              <a:cxn ang="0">
+                <a:pos x="connsiteX2" y="connsiteY2"/>
+              </a:cxn>
+              <a:cxn ang="0">
+                <a:pos x="connsiteX3" y="connsiteY3"/>
+              </a:cxn>
+              <a:cxn ang="0">
+                <a:pos x="connsiteX4" y="connsiteY4"/>
+              </a:cxn>
+              <a:cxn ang="0">
+                <a:pos x="connsiteX5" y="connsiteY5"/>
+              </a:cxn>
+              <a:cxn ang="0">
+                <a:pos x="connsiteX6" y="connsiteY6"/>
+              </a:cxn>
+              <a:cxn ang="0">
+                <a:pos x="connsiteX7" y="connsiteY7"/>
+              </a:cxn>
+              <a:cxn ang="0">
+                <a:pos x="connsiteX8" y="connsiteY8"/>
+              </a:cxn>
+              <a:cxn ang="0">
+                <a:pos x="connsiteX9" y="connsiteY9"/>
+              </a:cxn>
+              <a:cxn ang="0">
+                <a:pos x="connsiteX10" y="connsiteY10"/>
+              </a:cxn>
+              <a:cxn ang="0">
+                <a:pos x="connsiteX11" y="connsiteY11"/>
+              </a:cxn>
+              <a:cxn ang="0">
+                <a:pos x="connsiteX12" y="connsiteY12"/>
+              </a:cxn>
+              <a:cxn ang="0">
+                <a:pos x="connsiteX13" y="connsiteY13"/>
+              </a:cxn>
+              <a:cxn ang="0">
+                <a:pos x="connsiteX14" y="connsiteY14"/>
+              </a:cxn>
+            </a:cxnLst>
+            <a:rect l="l" t="t" r="r" b="b"/>
+            <a:pathLst>
+              <a:path w="9113926" h="1177680">
+                <a:moveTo>
+                  <a:pt x="525894" y="0"/>
+                </a:moveTo>
+                <a:lnTo>
+                  <a:pt x="8588032" y="0"/>
+                </a:lnTo>
+                <a:cubicBezTo>
+                  <a:pt x="8878475" y="0"/>
+                  <a:pt x="9113925" y="235450"/>
+                  <a:pt x="9113925" y="525893"/>
+                </a:cubicBezTo>
+                <a:lnTo>
+                  <a:pt x="9113925" y="609084"/>
+                </a:lnTo>
+                <a:lnTo>
+                  <a:pt x="9113926" y="609084"/>
+                </a:lnTo>
+                <a:lnTo>
+                  <a:pt x="9113926" y="1177679"/>
+                </a:lnTo>
+                <a:lnTo>
+                  <a:pt x="8588042" y="1177679"/>
+                </a:lnTo>
+                <a:lnTo>
+                  <a:pt x="8588032" y="1177680"/>
+                </a:lnTo>
+                <a:lnTo>
+                  <a:pt x="525894" y="1177680"/>
+                </a:lnTo>
+                <a:lnTo>
+                  <a:pt x="525884" y="1177679"/>
+                </a:lnTo>
+                <a:lnTo>
+                  <a:pt x="0" y="1177679"/>
+                </a:lnTo>
+                <a:lnTo>
+                  <a:pt x="0" y="609084"/>
+                </a:lnTo>
+                <a:lnTo>
+                  <a:pt x="1" y="609084"/>
+                </a:lnTo>
+                <a:lnTo>
+                  <a:pt x="1" y="525893"/>
+                </a:lnTo>
+                <a:cubicBezTo>
+                  <a:pt x="1" y="235450"/>
+                  <a:pt x="235451" y="0"/>
+                  <a:pt x="525894" y="0"/>
+                </a:cubicBezTo>
+                <a:close/>
+              </a:path>
+            </a:pathLst>
+          </a:custGeom>
+          <a:gradFill>
+            <a:gsLst>
+              <a:gs pos="0">
+                <a:srgbClr val="F48120"/>
+              </a:gs>
+              <a:gs pos="100000">
+                <a:srgbClr val="FE6700"/>
+              </a:gs>
+            </a:gsLst>
+            <a:lin ang="5400000" scaled="1"/>
+          </a:gradFill>
+          <a:ln>
+            <a:solidFill>
+              <a:srgbClr val="FFE6AB"/>
+            </a:solidFill>
+          </a:ln>
+        </p:spPr>
+        <p:style>
+          <a:lnRef idx="2">
+            <a:schemeClr val="accent1">
+              <a:shade val="15000"/>
+            </a:schemeClr>
+          </a:lnRef>
+          <a:fillRef idx="1">
+            <a:schemeClr val="accent1"/>
+          </a:fillRef>
+          <a:effectRef idx="0">
+            <a:schemeClr val="accent1"/>
+          </a:effectRef>
+          <a:fontRef idx="minor">
+            <a:schemeClr val="lt1"/>
+          </a:fontRef>
+        </p:style>
+        <p:txBody>
+          <a:bodyPr wrap="square" rtlCol="0" anchor="ctr">
+            <a:noAutofit/>
+          </a:bodyPr>
+          <a:lstStyle/>
+          <a:p>
+            <a:pPr marL="0" marR="0" lvl="0" indent="0" algn="ctr" defTabSz="457200" rtl="0" eaLnBrk="1" fontAlgn="auto" latinLnBrk="0" hangingPunct="1">
+              <a:lnSpc>
+                <a:spcPct val="100000"/>
+              </a:lnSpc>
+              <a:spcBef>
+                <a:spcPts val="0"/>
+              </a:spcBef>
+              <a:spcAft>
+                <a:spcPts val="0"/>
+              </a:spcAft>
+              <a:buClrTx/>
+              <a:buSzTx/>
+              <a:buFontTx/>
+              <a:buNone/>
+              <a:tabLst/>
+              <a:defRPr/>
+            </a:pPr>
+            <a:endParaRPr kumimoji="0" lang="en-US" sz="1800" b="0" i="0" u="none" strike="noStrike" kern="1200" cap="none" spc="0" normalizeH="0" baseline="0" noProof="0" dirty="0">
+              <a:ln>
+                <a:noFill/>
+              </a:ln>
+              <a:solidFill>
+                <a:prstClr val="white"/>
+              </a:solidFill>
+              <a:effectLst/>
+              <a:uLnTx/>
+              <a:uFillTx/>
+              <a:latin typeface="Aptos" panose="02110004020202020204"/>
+              <a:ea typeface="+mn-ea"/>
+              <a:cs typeface="+mn-cs"/>
+            </a:endParaRPr>
+          </a:p>
+        </p:txBody>
+      </p:sp>
+      <p:sp>
+        <p:nvSpPr>
+          <p:cNvPr id="3" name="TextBox 2">
+            <a:extLst>
+              <a:ext uri="{FF2B5EF4-FFF2-40B4-BE49-F238E27FC236}">
+                <a16:creationId xmlns:a16="http://schemas.microsoft.com/office/drawing/2014/main" id="{87A5E763-5BAF-7CBC-AD6B-FD83FCFFD235}"/>
+              </a:ext>
+            </a:extLst>
+          </p:cNvPr>
+          <p:cNvSpPr txBox="1"/>
+          <p:nvPr/>
+        </p:nvSpPr>
+        <p:spPr>
+          <a:xfrm>
+            <a:off x="1165857" y="2186284"/>
+            <a:ext cx="7955280" cy="954107"/>
+          </a:xfrm>
+          <a:prstGeom prst="rect">
+            <a:avLst/>
+          </a:prstGeom>
+          <a:noFill/>
+        </p:spPr>
+        <p:txBody>
+          <a:bodyPr wrap="square" rtlCol="0">
+            <a:spAutoFit/>
+          </a:bodyPr>
+          <a:lstStyle/>
+          <a:p>
+            <a:pPr marL="0" marR="0" lvl="0" indent="0" algn="ctr" defTabSz="457200" rtl="0" eaLnBrk="1" fontAlgn="auto" latinLnBrk="0" hangingPunct="1">
+              <a:lnSpc>
+                <a:spcPct val="100000"/>
+              </a:lnSpc>
+              <a:spcBef>
+                <a:spcPts val="0"/>
+              </a:spcBef>
+              <a:spcAft>
+                <a:spcPts val="0"/>
+              </a:spcAft>
+              <a:buClrTx/>
+              <a:buSzTx/>
+              <a:buFontTx/>
+              <a:buNone/>
+              <a:tabLst/>
+              <a:defRPr/>
+            </a:pPr>
+            <a:r>
+              <a:rPr kumimoji="0" lang="vi-VN" sz="2800" b="1" i="0" u="none" strike="noStrike" kern="1200" cap="none" spc="0" normalizeH="0" baseline="0" noProof="0">
+                <a:ln>
+                  <a:noFill/>
+                </a:ln>
+                <a:solidFill>
+                  <a:srgbClr val="01437C"/>
+                </a:solidFill>
+                <a:effectLst/>
+                <a:uLnTx/>
+                <a:uFillTx/>
+                <a:latin typeface="SVN-Gilroy" panose="00000500000000000000" pitchFamily="50" charset="0"/>
+                <a:ea typeface="Karla" pitchFamily="2" charset="0"/>
+                <a:cs typeface="Poppins" panose="00000500000000000000" pitchFamily="2" charset="0"/>
+              </a:rPr>
+              <a:t>Nợ xấu nhích lên 1,9% trong năm 2025 nhưng chi phí tín dụng được dự báo hạ nhiệt</a:t>
+            </a:r>
+          </a:p>
+        </p:txBody>
+      </p:sp>
+      <p:graphicFrame>
+        <p:nvGraphicFramePr>
+          <p:cNvPr id="8" name="Chart 7">
+            <a:extLst>
+              <a:ext uri="{FF2B5EF4-FFF2-40B4-BE49-F238E27FC236}">
+                <a16:creationId xmlns:a16="http://schemas.microsoft.com/office/drawing/2014/main" id="{D0B3DC17-0C97-DEDE-1292-7CEE9317D578}"/>
+              </a:ext>
+            </a:extLst>
+          </p:cNvPr>
+          <p:cNvGraphicFramePr/>
+          <p:nvPr>
+            <p:extLst>
+              <p:ext uri="{D42A27DB-BD31-4B8C-83A1-F6EECF244321}">
+                <p14:modId xmlns:p14="http://schemas.microsoft.com/office/powerpoint/2010/main" val="1624814127"/>
+              </p:ext>
+            </p:extLst>
+          </p:nvPr>
+        </p:nvGraphicFramePr>
+        <p:xfrm>
+          <a:off x="1165857" y="3381157"/>
+          <a:ext cx="7955280" cy="8778240"/>
+        </p:xfrm>
+        <a:graphic>
+          <a:graphicData uri="http://schemas.openxmlformats.org/drawingml/2006/chart">
+            <c:chart xmlns:c="http://schemas.openxmlformats.org/drawingml/2006/chart" xmlns:r="http://schemas.openxmlformats.org/officeDocument/2006/relationships" r:id="rId3"/>
+          </a:graphicData>
+        </a:graphic>
+      </p:graphicFrame>
+      <p:sp>
+        <p:nvSpPr>
+          <p:cNvPr id="5" name="TextBox 4">
+            <a:extLst>
+              <a:ext uri="{FF2B5EF4-FFF2-40B4-BE49-F238E27FC236}">
+                <a16:creationId xmlns:a16="http://schemas.microsoft.com/office/drawing/2014/main" id="{A946340E-39FF-449E-1E3A-06D50B992A7E}"/>
+              </a:ext>
+            </a:extLst>
+          </p:cNvPr>
+          <p:cNvSpPr txBox="1"/>
+          <p:nvPr/>
+        </p:nvSpPr>
+        <p:spPr>
+          <a:xfrm>
+            <a:off x="586539" y="928966"/>
+            <a:ext cx="9113922" cy="630942"/>
+          </a:xfrm>
+          <a:prstGeom prst="rect">
+            <a:avLst/>
+          </a:prstGeom>
+          <a:noFill/>
+        </p:spPr>
+        <p:txBody>
+          <a:bodyPr wrap="square" rtlCol="0">
+            <a:spAutoFit/>
+          </a:bodyPr>
+          <a:lstStyle/>
+          <a:p>
+            <a:pPr lvl="0" algn="ctr">
+              <a:defRPr/>
+            </a:pPr>
+            <a:r>
+              <a:rPr lang="en-US" sz="3500">
+                <a:solidFill>
+                  <a:prstClr val="white"/>
+                </a:solidFill>
+                <a:latin typeface="SVN-Gilroy XBold" panose="00000900000000000000" pitchFamily="50" charset="0"/>
+              </a:rPr>
+              <a:t>Vốn rẻ dẫn đầu, tăng trưởng vượt trội</a:t>
+            </a:r>
+          </a:p>
+        </p:txBody>
+      </p:sp>
+      <p:sp>
+        <p:nvSpPr>
+          <p:cNvPr id="13" name="TextBox 12">
+            <a:extLst>
+              <a:ext uri="{FF2B5EF4-FFF2-40B4-BE49-F238E27FC236}">
+                <a16:creationId xmlns:a16="http://schemas.microsoft.com/office/drawing/2014/main" id="{A4603ABB-BF9C-CAA7-FD3B-96D3DC993EC2}"/>
+              </a:ext>
+            </a:extLst>
+          </p:cNvPr>
+          <p:cNvSpPr txBox="1"/>
+          <p:nvPr/>
+        </p:nvSpPr>
+        <p:spPr>
+          <a:xfrm>
+            <a:off x="1175001" y="12499183"/>
+            <a:ext cx="4739951" cy="276999"/>
+          </a:xfrm>
+          <a:prstGeom prst="rect">
+            <a:avLst/>
+          </a:prstGeom>
+          <a:noFill/>
+        </p:spPr>
+        <p:txBody>
+          <a:bodyPr wrap="square" rtlCol="0">
+            <a:spAutoFit/>
+          </a:bodyPr>
+          <a:lstStyle/>
+          <a:p>
+            <a:pPr marL="0" marR="0" lvl="0" indent="0" algn="l" defTabSz="457200" rtl="0" eaLnBrk="1" fontAlgn="auto" latinLnBrk="0" hangingPunct="1">
+              <a:lnSpc>
+                <a:spcPct val="100000"/>
+              </a:lnSpc>
+              <a:spcBef>
+                <a:spcPts val="0"/>
+              </a:spcBef>
+              <a:spcAft>
+                <a:spcPts val="0"/>
+              </a:spcAft>
+              <a:buClrTx/>
+              <a:buSzTx/>
+              <a:buFontTx/>
+              <a:buNone/>
+              <a:tabLst/>
+              <a:defRPr/>
+            </a:pPr>
+            <a:r>
+              <a:rPr kumimoji="0" lang="en-US" sz="1200" b="0" i="0" u="none" strike="noStrike" kern="1200" cap="none" spc="0" normalizeH="0" baseline="0" noProof="0">
+                <a:ln>
+                  <a:noFill/>
+                </a:ln>
+                <a:solidFill>
+                  <a:prstClr val="black"/>
+                </a:solidFill>
+                <a:effectLst/>
+                <a:uLnTx/>
+                <a:uFillTx/>
+                <a:latin typeface="SVN-Gilroy" panose="00000500000000000000"/>
+                <a:ea typeface="+mn-ea"/>
+                <a:cs typeface="+mn-cs"/>
+              </a:rPr>
+              <a:t>Nguồn: Dữ liệu doanh nghiệp, Mirae Asset Research ước tính</a:t>
+            </a:r>
+            <a:endParaRPr kumimoji="0" lang="en-US" sz="1200" b="0" i="0" u="none" strike="noStrike" kern="1200" cap="none" spc="0" normalizeH="0" baseline="0" noProof="0" dirty="0">
+              <a:ln>
+                <a:noFill/>
+              </a:ln>
+              <a:solidFill>
+                <a:prstClr val="black"/>
+              </a:solidFill>
+              <a:effectLst/>
+              <a:uLnTx/>
+              <a:uFillTx/>
+              <a:latin typeface="SVN-Gilroy" panose="00000500000000000000"/>
+              <a:ea typeface="+mn-ea"/>
+              <a:cs typeface="+mn-cs"/>
+            </a:endParaRPr>
+          </a:p>
+        </p:txBody>
+      </p:sp>
+    </p:spTree>
+    <p:extLst>
+      <p:ext uri="{BB962C8B-B14F-4D97-AF65-F5344CB8AC3E}">
+        <p14:creationId xmlns:p14="http://schemas.microsoft.com/office/powerpoint/2010/main" val="2841347017"/>
       </p:ext>
     </p:extLst>
   </p:cSld>
@@ -7644,7 +9688,7 @@
                 <a:ea typeface="Karla" pitchFamily="2" charset="0"/>
                 <a:cs typeface="Poppins" panose="00000500000000000000" pitchFamily="2" charset="0"/>
               </a:rPr>
-              <a:t>Lợi nhuận trước thuế gấp gần 1,8 lần chỉ sau 4 năm, dự phóng vượt 40.000 tỷ đồng</a:t>
+              <a:t>ROE duy trì trên 20% suốt chu kỳ, trong khi P/B dự phóng 2026 chỉ quanh 1,2 lần</a:t>
             </a:r>
             <a:endParaRPr kumimoji="0" lang="en-US" sz="2800" b="1" i="0" u="none" strike="noStrike" kern="1200" cap="none" spc="0" normalizeH="0" baseline="0" noProof="0">
               <a:ln>
@@ -7794,7 +9838,7 @@
                 <a:ea typeface="+mn-ea"/>
                 <a:cs typeface="+mn-cs"/>
               </a:rPr>
-              <a:t>Nguồn: Báo cáo tài chính MB, dự phóng Mirae Asset Research</a:t>
+              <a:t>Nguồn: Dữ liệu doanh nghiệp, Mirae Asset Research ước tính</a:t>
             </a:r>
             <a:endParaRPr kumimoji="0" lang="en-US" sz="1200" b="0" i="0" u="none" strike="noStrike" kern="1200" cap="none" spc="0" normalizeH="0" baseline="0" noProof="0" dirty="0">
               <a:ln>
@@ -8167,7 +10211,7 @@
                 <a:ea typeface="Karla" pitchFamily="2" charset="0"/>
                 <a:cs typeface="Poppins" panose="00000500000000000000" pitchFamily="2" charset="0"/>
               </a:rPr>
-              <a:t>Vốn điều lệ tăng hơn gấp đôi sau 4 năm, tạo dư địa cho tín dụng tăng 30–35%</a:t>
+              <a:t>CASA gần 38% kéo chi phí vốn về 3,1%, bù lại phần lớn áp lực thu hẹp của biên lãi ròng</a:t>
             </a:r>
             <a:endParaRPr kumimoji="0" lang="en-US" sz="2800" b="1" i="0" u="none" strike="noStrike" kern="1200" cap="none" spc="0" normalizeH="0" baseline="0" noProof="0">
               <a:ln>
@@ -8317,7 +10361,7 @@
                 <a:ea typeface="+mn-ea"/>
                 <a:cs typeface="+mn-cs"/>
               </a:rPr>
-              <a:t>Nguồn: Công bố thông tin của MB, kế hoạch ĐHĐCĐ 2026</a:t>
+              <a:t>Nguồn: Dữ liệu doanh nghiệp, Mirae Asset Research ước tính</a:t>
             </a:r>
             <a:endParaRPr kumimoji="0" lang="en-US" sz="1200" b="0" i="0" u="none" strike="noStrike" kern="1200" cap="none" spc="0" normalizeH="0" baseline="0" noProof="0" dirty="0">
               <a:ln>
@@ -8340,1511 +10384,6 @@
     <p:extLst>
       <p:ext uri="{BB962C8B-B14F-4D97-AF65-F5344CB8AC3E}">
         <p14:creationId xmlns:p14="http://schemas.microsoft.com/office/powerpoint/2010/main" val="1159577148"/>
-      </p:ext>
-    </p:extLst>
-  </p:cSld>
-  <p:clrMapOvr>
-    <a:masterClrMapping/>
-  </p:clrMapOvr>
-</p:sld>
-</file>
-
-<file path=ppt/slides/slide9.xml><?xml version="1.0" encoding="utf-8"?>
-<p:sld xmlns:a="http://schemas.openxmlformats.org/drawingml/2006/main" xmlns:r="http://schemas.openxmlformats.org/officeDocument/2006/relationships" xmlns:p="http://schemas.openxmlformats.org/presentationml/2006/main">
-  <p:cSld>
-    <p:spTree>
-      <p:nvGrpSpPr>
-        <p:cNvPr id="1" name="">
-          <a:extLst>
-            <a:ext uri="{FF2B5EF4-FFF2-40B4-BE49-F238E27FC236}">
-              <a16:creationId xmlns:a16="http://schemas.microsoft.com/office/drawing/2014/main" id="{99962B25-29AB-83C9-D4F3-0300AAB49C41}"/>
-            </a:ext>
-          </a:extLst>
-        </p:cNvPr>
-        <p:cNvGrpSpPr/>
-        <p:nvPr/>
-      </p:nvGrpSpPr>
-      <p:grpSpPr>
-        <a:xfrm>
-          <a:off x="0" y="0"/>
-          <a:ext cx="0" cy="0"/>
-          <a:chOff x="0" y="0"/>
-          <a:chExt cx="0" cy="0"/>
-        </a:xfrm>
-      </p:grpSpPr>
-      <p:pic>
-        <p:nvPicPr>
-          <p:cNvPr id="6" name="Picture 5" descr="A white rectangle with pink border&#10;&#10;Description automatically generated">
-            <a:extLst>
-              <a:ext uri="{FF2B5EF4-FFF2-40B4-BE49-F238E27FC236}">
-                <a16:creationId xmlns:a16="http://schemas.microsoft.com/office/drawing/2014/main" id="{FD89B21A-0155-7B6B-9EEC-8BD019DCB75F}"/>
-              </a:ext>
-            </a:extLst>
-          </p:cNvPr>
-          <p:cNvPicPr>
-            <a:picLocks noGrp="1" noRot="1" noChangeAspect="1" noMove="1" noResize="1" noEditPoints="1" noAdjustHandles="1" noChangeArrowheads="1" noChangeShapeType="1" noCrop="1"/>
-          </p:cNvPicPr>
-          <p:nvPr/>
-        </p:nvPicPr>
-        <p:blipFill>
-          <a:blip r:embed="rId2">
-            <a:extLst>
-              <a:ext uri="{28A0092B-C50C-407E-A947-70E740481C1C}">
-                <a14:useLocalDpi xmlns:a14="http://schemas.microsoft.com/office/drawing/2010/main" val="0"/>
-              </a:ext>
-            </a:extLst>
-          </a:blip>
-          <a:stretch>
-            <a:fillRect/>
-          </a:stretch>
-        </p:blipFill>
-        <p:spPr>
-          <a:xfrm>
-            <a:off x="0" y="0"/>
-            <a:ext cx="10287000" cy="13716000"/>
-          </a:xfrm>
-          <a:prstGeom prst="rect">
-            <a:avLst/>
-          </a:prstGeom>
-        </p:spPr>
-      </p:pic>
-      <p:sp>
-        <p:nvSpPr>
-          <p:cNvPr id="4" name="Freeform: Shape 3">
-            <a:extLst>
-              <a:ext uri="{FF2B5EF4-FFF2-40B4-BE49-F238E27FC236}">
-                <a16:creationId xmlns:a16="http://schemas.microsoft.com/office/drawing/2014/main" id="{2216192C-4157-3886-057E-A14B4EE69347}"/>
-              </a:ext>
-            </a:extLst>
-          </p:cNvPr>
-          <p:cNvSpPr/>
-          <p:nvPr/>
-        </p:nvSpPr>
-        <p:spPr>
-          <a:xfrm>
-            <a:off x="586534" y="668818"/>
-            <a:ext cx="9113926" cy="1177680"/>
-          </a:xfrm>
-          <a:custGeom>
-            <a:avLst/>
-            <a:gdLst>
-              <a:gd name="connsiteX0" fmla="*/ 525894 w 9113926"/>
-              <a:gd name="connsiteY0" fmla="*/ 0 h 1177680"/>
-              <a:gd name="connsiteX1" fmla="*/ 8588032 w 9113926"/>
-              <a:gd name="connsiteY1" fmla="*/ 0 h 1177680"/>
-              <a:gd name="connsiteX2" fmla="*/ 9113925 w 9113926"/>
-              <a:gd name="connsiteY2" fmla="*/ 525893 h 1177680"/>
-              <a:gd name="connsiteX3" fmla="*/ 9113925 w 9113926"/>
-              <a:gd name="connsiteY3" fmla="*/ 609084 h 1177680"/>
-              <a:gd name="connsiteX4" fmla="*/ 9113926 w 9113926"/>
-              <a:gd name="connsiteY4" fmla="*/ 609084 h 1177680"/>
-              <a:gd name="connsiteX5" fmla="*/ 9113926 w 9113926"/>
-              <a:gd name="connsiteY5" fmla="*/ 1177679 h 1177680"/>
-              <a:gd name="connsiteX6" fmla="*/ 8588042 w 9113926"/>
-              <a:gd name="connsiteY6" fmla="*/ 1177679 h 1177680"/>
-              <a:gd name="connsiteX7" fmla="*/ 8588032 w 9113926"/>
-              <a:gd name="connsiteY7" fmla="*/ 1177680 h 1177680"/>
-              <a:gd name="connsiteX8" fmla="*/ 525894 w 9113926"/>
-              <a:gd name="connsiteY8" fmla="*/ 1177680 h 1177680"/>
-              <a:gd name="connsiteX9" fmla="*/ 525884 w 9113926"/>
-              <a:gd name="connsiteY9" fmla="*/ 1177679 h 1177680"/>
-              <a:gd name="connsiteX10" fmla="*/ 0 w 9113926"/>
-              <a:gd name="connsiteY10" fmla="*/ 1177679 h 1177680"/>
-              <a:gd name="connsiteX11" fmla="*/ 0 w 9113926"/>
-              <a:gd name="connsiteY11" fmla="*/ 609084 h 1177680"/>
-              <a:gd name="connsiteX12" fmla="*/ 1 w 9113926"/>
-              <a:gd name="connsiteY12" fmla="*/ 609084 h 1177680"/>
-              <a:gd name="connsiteX13" fmla="*/ 1 w 9113926"/>
-              <a:gd name="connsiteY13" fmla="*/ 525893 h 1177680"/>
-              <a:gd name="connsiteX14" fmla="*/ 525894 w 9113926"/>
-              <a:gd name="connsiteY14" fmla="*/ 0 h 1177680"/>
-            </a:gdLst>
-            <a:ahLst/>
-            <a:cxnLst>
-              <a:cxn ang="0">
-                <a:pos x="connsiteX0" y="connsiteY0"/>
-              </a:cxn>
-              <a:cxn ang="0">
-                <a:pos x="connsiteX1" y="connsiteY1"/>
-              </a:cxn>
-              <a:cxn ang="0">
-                <a:pos x="connsiteX2" y="connsiteY2"/>
-              </a:cxn>
-              <a:cxn ang="0">
-                <a:pos x="connsiteX3" y="connsiteY3"/>
-              </a:cxn>
-              <a:cxn ang="0">
-                <a:pos x="connsiteX4" y="connsiteY4"/>
-              </a:cxn>
-              <a:cxn ang="0">
-                <a:pos x="connsiteX5" y="connsiteY5"/>
-              </a:cxn>
-              <a:cxn ang="0">
-                <a:pos x="connsiteX6" y="connsiteY6"/>
-              </a:cxn>
-              <a:cxn ang="0">
-                <a:pos x="connsiteX7" y="connsiteY7"/>
-              </a:cxn>
-              <a:cxn ang="0">
-                <a:pos x="connsiteX8" y="connsiteY8"/>
-              </a:cxn>
-              <a:cxn ang="0">
-                <a:pos x="connsiteX9" y="connsiteY9"/>
-              </a:cxn>
-              <a:cxn ang="0">
-                <a:pos x="connsiteX10" y="connsiteY10"/>
-              </a:cxn>
-              <a:cxn ang="0">
-                <a:pos x="connsiteX11" y="connsiteY11"/>
-              </a:cxn>
-              <a:cxn ang="0">
-                <a:pos x="connsiteX12" y="connsiteY12"/>
-              </a:cxn>
-              <a:cxn ang="0">
-                <a:pos x="connsiteX13" y="connsiteY13"/>
-              </a:cxn>
-              <a:cxn ang="0">
-                <a:pos x="connsiteX14" y="connsiteY14"/>
-              </a:cxn>
-            </a:cxnLst>
-            <a:rect l="l" t="t" r="r" b="b"/>
-            <a:pathLst>
-              <a:path w="9113926" h="1177680">
-                <a:moveTo>
-                  <a:pt x="525894" y="0"/>
-                </a:moveTo>
-                <a:lnTo>
-                  <a:pt x="8588032" y="0"/>
-                </a:lnTo>
-                <a:cubicBezTo>
-                  <a:pt x="8878475" y="0"/>
-                  <a:pt x="9113925" y="235450"/>
-                  <a:pt x="9113925" y="525893"/>
-                </a:cubicBezTo>
-                <a:lnTo>
-                  <a:pt x="9113925" y="609084"/>
-                </a:lnTo>
-                <a:lnTo>
-                  <a:pt x="9113926" y="609084"/>
-                </a:lnTo>
-                <a:lnTo>
-                  <a:pt x="9113926" y="1177679"/>
-                </a:lnTo>
-                <a:lnTo>
-                  <a:pt x="8588042" y="1177679"/>
-                </a:lnTo>
-                <a:lnTo>
-                  <a:pt x="8588032" y="1177680"/>
-                </a:lnTo>
-                <a:lnTo>
-                  <a:pt x="525894" y="1177680"/>
-                </a:lnTo>
-                <a:lnTo>
-                  <a:pt x="525884" y="1177679"/>
-                </a:lnTo>
-                <a:lnTo>
-                  <a:pt x="0" y="1177679"/>
-                </a:lnTo>
-                <a:lnTo>
-                  <a:pt x="0" y="609084"/>
-                </a:lnTo>
-                <a:lnTo>
-                  <a:pt x="1" y="609084"/>
-                </a:lnTo>
-                <a:lnTo>
-                  <a:pt x="1" y="525893"/>
-                </a:lnTo>
-                <a:cubicBezTo>
-                  <a:pt x="1" y="235450"/>
-                  <a:pt x="235451" y="0"/>
-                  <a:pt x="525894" y="0"/>
-                </a:cubicBezTo>
-                <a:close/>
-              </a:path>
-            </a:pathLst>
-          </a:custGeom>
-          <a:gradFill>
-            <a:gsLst>
-              <a:gs pos="0">
-                <a:srgbClr val="F48120"/>
-              </a:gs>
-              <a:gs pos="100000">
-                <a:srgbClr val="FE6700"/>
-              </a:gs>
-            </a:gsLst>
-            <a:lin ang="5400000" scaled="1"/>
-          </a:gradFill>
-          <a:ln>
-            <a:solidFill>
-              <a:srgbClr val="FFE6AB"/>
-            </a:solidFill>
-          </a:ln>
-        </p:spPr>
-        <p:style>
-          <a:lnRef idx="2">
-            <a:schemeClr val="accent1">
-              <a:shade val="15000"/>
-            </a:schemeClr>
-          </a:lnRef>
-          <a:fillRef idx="1">
-            <a:schemeClr val="accent1"/>
-          </a:fillRef>
-          <a:effectRef idx="0">
-            <a:schemeClr val="accent1"/>
-          </a:effectRef>
-          <a:fontRef idx="minor">
-            <a:schemeClr val="lt1"/>
-          </a:fontRef>
-        </p:style>
-        <p:txBody>
-          <a:bodyPr wrap="square" rtlCol="0" anchor="ctr">
-            <a:noAutofit/>
-          </a:bodyPr>
-          <a:lstStyle/>
-          <a:p>
-            <a:pPr marL="0" marR="0" lvl="0" indent="0" algn="ctr" defTabSz="457200" rtl="0" eaLnBrk="1" fontAlgn="auto" latinLnBrk="0" hangingPunct="1">
-              <a:lnSpc>
-                <a:spcPct val="100000"/>
-              </a:lnSpc>
-              <a:spcBef>
-                <a:spcPts val="0"/>
-              </a:spcBef>
-              <a:spcAft>
-                <a:spcPts val="0"/>
-              </a:spcAft>
-              <a:buClrTx/>
-              <a:buSzTx/>
-              <a:buFontTx/>
-              <a:buNone/>
-              <a:tabLst/>
-              <a:defRPr/>
-            </a:pPr>
-            <a:endParaRPr kumimoji="0" lang="en-US" sz="1800" b="0" i="0" u="none" strike="noStrike" kern="1200" cap="none" spc="0" normalizeH="0" baseline="0" noProof="0" dirty="0">
-              <a:ln>
-                <a:noFill/>
-              </a:ln>
-              <a:solidFill>
-                <a:prstClr val="white"/>
-              </a:solidFill>
-              <a:effectLst/>
-              <a:uLnTx/>
-              <a:uFillTx/>
-              <a:latin typeface="Aptos" panose="02110004020202020204"/>
-              <a:ea typeface="+mn-ea"/>
-              <a:cs typeface="+mn-cs"/>
-            </a:endParaRPr>
-          </a:p>
-        </p:txBody>
-      </p:sp>
-      <p:sp>
-        <p:nvSpPr>
-          <p:cNvPr id="3" name="TextBox 2">
-            <a:extLst>
-              <a:ext uri="{FF2B5EF4-FFF2-40B4-BE49-F238E27FC236}">
-                <a16:creationId xmlns:a16="http://schemas.microsoft.com/office/drawing/2014/main" id="{0C1AB3A8-71D1-3113-4028-3014A4F4BB44}"/>
-              </a:ext>
-            </a:extLst>
-          </p:cNvPr>
-          <p:cNvSpPr txBox="1"/>
-          <p:nvPr/>
-        </p:nvSpPr>
-        <p:spPr>
-          <a:xfrm>
-            <a:off x="982975" y="2256112"/>
-            <a:ext cx="8321043" cy="954107"/>
-          </a:xfrm>
-          <a:prstGeom prst="rect">
-            <a:avLst/>
-          </a:prstGeom>
-          <a:noFill/>
-        </p:spPr>
-        <p:txBody>
-          <a:bodyPr wrap="square" rtlCol="0">
-            <a:spAutoFit/>
-          </a:bodyPr>
-          <a:lstStyle/>
-          <a:p>
-            <a:pPr marL="0" marR="0" lvl="0" indent="0" algn="ctr" defTabSz="457200" rtl="0" eaLnBrk="1" fontAlgn="auto" latinLnBrk="0" hangingPunct="1">
-              <a:lnSpc>
-                <a:spcPct val="100000"/>
-              </a:lnSpc>
-              <a:spcBef>
-                <a:spcPts val="0"/>
-              </a:spcBef>
-              <a:spcAft>
-                <a:spcPts val="0"/>
-              </a:spcAft>
-              <a:buClrTx/>
-              <a:buSzTx/>
-              <a:buFontTx/>
-              <a:buNone/>
-              <a:tabLst/>
-              <a:defRPr/>
-            </a:pPr>
-            <a:r>
-              <a:rPr kumimoji="0" lang="vi-VN" sz="2800" b="1" i="0" u="none" strike="noStrike" kern="1200" cap="none" spc="0" normalizeH="0" baseline="0" noProof="0">
-                <a:ln>
-                  <a:noFill/>
-                </a:ln>
-                <a:solidFill>
-                  <a:srgbClr val="01437C"/>
-                </a:solidFill>
-                <a:effectLst/>
-                <a:uLnTx/>
-                <a:uFillTx/>
-                <a:latin typeface="SVN-Gilroy" panose="00000500000000000000" pitchFamily="50" charset="0"/>
-                <a:ea typeface="Karla" pitchFamily="2" charset="0"/>
-                <a:cs typeface="Poppins" panose="00000500000000000000" pitchFamily="2" charset="0"/>
-              </a:rPr>
-              <a:t>Định giá dự phóng 2026 lùi về ~1,2 lần P/B trong khi ROE vẫn duy trì trên 21%</a:t>
-            </a:r>
-            <a:endParaRPr kumimoji="0" lang="en-US" sz="2800" b="1" i="0" u="none" strike="noStrike" kern="1200" cap="none" spc="0" normalizeH="0" baseline="0" noProof="0" dirty="0">
-              <a:ln>
-                <a:noFill/>
-              </a:ln>
-              <a:solidFill>
-                <a:srgbClr val="01437C"/>
-              </a:solidFill>
-              <a:effectLst/>
-              <a:uLnTx/>
-              <a:uFillTx/>
-              <a:latin typeface="SVN-Gilroy" panose="00000500000000000000" pitchFamily="50" charset="0"/>
-              <a:ea typeface="Karla" pitchFamily="2" charset="0"/>
-              <a:cs typeface="Poppins" panose="00000500000000000000" pitchFamily="2" charset="0"/>
-            </a:endParaRPr>
-          </a:p>
-        </p:txBody>
-      </p:sp>
-      <p:graphicFrame>
-        <p:nvGraphicFramePr>
-          <p:cNvPr id="2" name="Table 1">
-            <a:extLst>
-              <a:ext uri="{FF2B5EF4-FFF2-40B4-BE49-F238E27FC236}">
-                <a16:creationId xmlns:a16="http://schemas.microsoft.com/office/drawing/2014/main" id="{ACDD825B-81C0-9466-86FE-212438E3EA14}"/>
-              </a:ext>
-            </a:extLst>
-          </p:cNvPr>
-          <p:cNvGraphicFramePr>
-            <a:graphicFrameLocks noGrp="1"/>
-          </p:cNvGraphicFramePr>
-          <p:nvPr>
-            <p:extLst>
-              <p:ext uri="{D42A27DB-BD31-4B8C-83A1-F6EECF244321}">
-                <p14:modId xmlns:p14="http://schemas.microsoft.com/office/powerpoint/2010/main" val="999674275"/>
-              </p:ext>
-            </p:extLst>
-          </p:nvPr>
-        </p:nvGraphicFramePr>
-        <p:xfrm>
-          <a:off x="888996" y="3345282"/>
-          <a:ext cx="8509000" cy="8915143"/>
-        </p:xfrm>
-        <a:graphic>
-          <a:graphicData uri="http://schemas.openxmlformats.org/drawingml/2006/table">
-            <a:tbl>
-              <a:tblPr>
-                <a:tableStyleId>{0E3FDE45-AF77-4B5C-9715-49D594BDF05E}</a:tableStyleId>
-              </a:tblPr>
-              <a:tblGrid>
-                <a:gridCol w="2006600">
-                  <a:extLst>
-                    <a:ext uri="{9D8B030D-6E8A-4147-A177-3AD203B41FA5}">
-                      <a16:colId xmlns:a16="http://schemas.microsoft.com/office/drawing/2014/main" val="1356446340"/>
-                    </a:ext>
-                  </a:extLst>
-                </a:gridCol>
-                <a:gridCol w="914400">
-                  <a:extLst>
-                    <a:ext uri="{9D8B030D-6E8A-4147-A177-3AD203B41FA5}">
-                      <a16:colId xmlns:a16="http://schemas.microsoft.com/office/drawing/2014/main" val="316668557"/>
-                    </a:ext>
-                  </a:extLst>
-                </a:gridCol>
-                <a:gridCol w="2552700">
-                  <a:extLst>
-                    <a:ext uri="{9D8B030D-6E8A-4147-A177-3AD203B41FA5}">
-                      <a16:colId xmlns:a16="http://schemas.microsoft.com/office/drawing/2014/main" val="2570643786"/>
-                    </a:ext>
-                  </a:extLst>
-                </a:gridCol>
-                <a:gridCol w="3035300">
-                  <a:extLst>
-                    <a:ext uri="{9D8B030D-6E8A-4147-A177-3AD203B41FA5}">
-                      <a16:colId xmlns:a16="http://schemas.microsoft.com/office/drawing/2014/main" val="617811"/>
-                    </a:ext>
-                  </a:extLst>
-                </a:gridCol>
-              </a:tblGrid>
-              <a:tr h="578698">
-                <a:tc>
-                  <a:txBody>
-                    <a:bodyPr/>
-                    <a:lstStyle/>
-                    <a:p>
-                      <a:pPr algn="ctr" fontAlgn="base">
-                        <a:buNone/>
-                      </a:pPr>
-                      <a:r>
-                        <a:rPr lang="en-US" sz="1500" b="1" u="none" strike="noStrike">
-                          <a:solidFill>
-                            <a:srgbClr val="FFFFFF"/>
-                          </a:solidFill>
-                          <a:effectLst/>
-                          <a:latin typeface="SVN-Gilroy" panose="00000500000000000000" pitchFamily="50" charset="0"/>
-                        </a:rPr>
-                        <a:t>Luận điểm</a:t>
-                      </a:r>
-                    </a:p>
-                    <a:p>
-                      <a:pPr algn="ctr" fontAlgn="base">
-                        <a:buNone/>
-                      </a:pPr>
-                      <a:r>
-                        <a:rPr lang="en-US" sz="1500" b="1" u="none" strike="noStrike">
-                          <a:solidFill>
-                            <a:srgbClr val="FFFFFF"/>
-                          </a:solidFill>
-                          <a:effectLst/>
-                          <a:latin typeface="SVN-Gilroy" panose="00000500000000000000" pitchFamily="50" charset="0"/>
-                        </a:rPr>
-                        <a:t>đầu tư</a:t>
-                      </a:r>
-                      <a:endParaRPr lang="en-US" sz="1500" b="1" i="0" u="none" strike="noStrike">
-                        <a:solidFill>
-                          <a:srgbClr val="FFFFFF"/>
-                        </a:solidFill>
-                        <a:effectLst/>
-                        <a:latin typeface="SVN-Gilroy" panose="00000500000000000000" pitchFamily="50" charset="0"/>
-                        <a:ea typeface="Noto Sans" panose="020B0502040504020204" pitchFamily="34" charset="0"/>
-                        <a:cs typeface="Noto Sans" panose="020B0502040504020204" pitchFamily="34" charset="0"/>
-                      </a:endParaRPr>
-                    </a:p>
-                  </a:txBody>
-                  <a:tcPr marL="40640" marR="40640" marT="35560" marB="27940" anchor="ctr">
-                    <a:solidFill>
-                      <a:srgbClr val="FE6700"/>
-                    </a:solidFill>
-                  </a:tcPr>
-                </a:tc>
-                <a:tc>
-                  <a:txBody>
-                    <a:bodyPr/>
-                    <a:lstStyle/>
-                    <a:p>
-                      <a:pPr algn="ctr" fontAlgn="base">
-                        <a:buNone/>
-                      </a:pPr>
-                      <a:r>
-                        <a:rPr lang="en-US" sz="1500" b="1" u="none" strike="noStrike">
-                          <a:solidFill>
-                            <a:srgbClr val="FFFFFF"/>
-                          </a:solidFill>
-                          <a:effectLst/>
-                          <a:latin typeface="SVN-Gilroy" panose="00000500000000000000" pitchFamily="50" charset="0"/>
-                        </a:rPr>
-                        <a:t>Số liệu</a:t>
-                      </a:r>
-                      <a:endParaRPr lang="en-US" sz="1500" b="1" i="0" u="none" strike="noStrike">
-                        <a:solidFill>
-                          <a:srgbClr val="FFFFFF"/>
-                        </a:solidFill>
-                        <a:effectLst/>
-                        <a:latin typeface="SVN-Gilroy" panose="00000500000000000000" pitchFamily="50" charset="0"/>
-                        <a:ea typeface="Noto Sans" panose="020B0502040504020204" pitchFamily="34" charset="0"/>
-                        <a:cs typeface="Noto Sans" panose="020B0502040504020204" pitchFamily="34" charset="0"/>
-                      </a:endParaRPr>
-                    </a:p>
-                  </a:txBody>
-                  <a:tcPr marL="40640" marR="40640" marT="35560" marB="27940" anchor="ctr">
-                    <a:solidFill>
-                      <a:srgbClr val="FE6700"/>
-                    </a:solidFill>
-                  </a:tcPr>
-                </a:tc>
-                <a:tc>
-                  <a:txBody>
-                    <a:bodyPr/>
-                    <a:lstStyle/>
-                    <a:p>
-                      <a:pPr algn="ctr" fontAlgn="base">
-                        <a:buNone/>
-                      </a:pPr>
-                      <a:r>
-                        <a:rPr lang="en-US" sz="1500" b="1" u="none" strike="noStrike">
-                          <a:solidFill>
-                            <a:srgbClr val="FFFFFF"/>
-                          </a:solidFill>
-                          <a:effectLst/>
-                          <a:latin typeface="SVN-Gilroy" panose="00000500000000000000" pitchFamily="50" charset="0"/>
-                        </a:rPr>
-                        <a:t>Chỉ tiêu</a:t>
-                      </a:r>
-                      <a:endParaRPr lang="en-US" sz="1500" b="1" i="0" u="none" strike="noStrike">
-                        <a:solidFill>
-                          <a:srgbClr val="FFFFFF"/>
-                        </a:solidFill>
-                        <a:effectLst/>
-                        <a:latin typeface="SVN-Gilroy" panose="00000500000000000000" pitchFamily="50" charset="0"/>
-                        <a:ea typeface="Noto Sans" panose="020B0502040504020204" pitchFamily="34" charset="0"/>
-                        <a:cs typeface="Noto Sans" panose="020B0502040504020204" pitchFamily="34" charset="0"/>
-                      </a:endParaRPr>
-                    </a:p>
-                  </a:txBody>
-                  <a:tcPr marL="40640" marR="40640" marT="35560" marB="27940" anchor="ctr">
-                    <a:solidFill>
-                      <a:srgbClr val="FE6700"/>
-                    </a:solidFill>
-                  </a:tcPr>
-                </a:tc>
-                <a:tc>
-                  <a:txBody>
-                    <a:bodyPr/>
-                    <a:lstStyle/>
-                    <a:p>
-                      <a:pPr algn="ctr" fontAlgn="base">
-                        <a:buNone/>
-                      </a:pPr>
-                      <a:r>
-                        <a:rPr lang="en-US" sz="1500" b="1" u="none" strike="noStrike">
-                          <a:solidFill>
-                            <a:srgbClr val="FFFFFF"/>
-                          </a:solidFill>
-                          <a:effectLst/>
-                          <a:latin typeface="SVN-Gilroy" panose="00000500000000000000" pitchFamily="50" charset="0"/>
-                        </a:rPr>
-                        <a:t>Ý nghĩa với cổ phiếu MBB</a:t>
-                      </a:r>
-                    </a:p>
-                  </a:txBody>
-                  <a:tcPr marL="40640" marR="40640" marT="35560" marB="27940" anchor="ctr">
-                    <a:solidFill>
-                      <a:srgbClr val="FE6700"/>
-                    </a:solidFill>
-                  </a:tcPr>
-                </a:tc>
-                <a:extLst>
-                  <a:ext uri="{0D108BD9-81ED-4DB2-BD59-A6C34878D82A}">
-                    <a16:rowId xmlns:a16="http://schemas.microsoft.com/office/drawing/2014/main" val="3014554586"/>
-                  </a:ext>
-                </a:extLst>
-              </a:tr>
-              <a:tr h="1858766">
-                <a:tc>
-                  <a:txBody>
-                    <a:bodyPr/>
-                    <a:lstStyle/>
-                    <a:p>
-                      <a:pPr algn="l" fontAlgn="base">
-                        <a:buNone/>
-                      </a:pPr>
-                      <a:r>
-                        <a:rPr lang="en-US" sz="1500" b="1" u="none" strike="noStrike">
-                          <a:solidFill>
-                            <a:srgbClr val="111827"/>
-                          </a:solidFill>
-                          <a:effectLst/>
-                          <a:latin typeface="SVN-Gilroy" panose="00000500000000000000" pitchFamily="50" charset="0"/>
-                        </a:rPr>
-                        <a:t>① Định giá</a:t>
-                      </a:r>
-                    </a:p>
-                    <a:p>
-                      <a:pPr algn="l" fontAlgn="base">
-                        <a:buNone/>
-                      </a:pPr>
-                      <a:r>
-                        <a:rPr lang="en-US" sz="1500" b="1" u="none" strike="noStrike">
-                          <a:solidFill>
-                            <a:srgbClr val="111827"/>
-                          </a:solidFill>
-                          <a:effectLst/>
-                          <a:latin typeface="SVN-Gilroy" panose="00000500000000000000" pitchFamily="50" charset="0"/>
-                        </a:rPr>
-                        <a:t>(P/B dự phóng)</a:t>
-                      </a:r>
-                      <a:endParaRPr lang="en-US" sz="1500" b="1" i="0" u="none" strike="noStrike">
-                        <a:solidFill>
-                          <a:srgbClr val="111827"/>
-                        </a:solidFill>
-                        <a:effectLst/>
-                        <a:latin typeface="SVN-Gilroy" panose="00000500000000000000" pitchFamily="50" charset="0"/>
-                        <a:ea typeface="Noto Sans" panose="020B0502040504020204" pitchFamily="34" charset="0"/>
-                        <a:cs typeface="Noto Sans" panose="020B0502040504020204" pitchFamily="34" charset="0"/>
-                      </a:endParaRPr>
-                    </a:p>
-                  </a:txBody>
-                  <a:tcPr marL="40640" marR="40640" marT="35560" marB="27940" anchor="ctr">
-                    <a:solidFill>
-                      <a:schemeClr val="bg1">
-                        <a:lumMod val="95000"/>
-                      </a:schemeClr>
-                    </a:solidFill>
-                  </a:tcPr>
-                </a:tc>
-                <a:tc>
-                  <a:txBody>
-                    <a:bodyPr/>
-                    <a:lstStyle/>
-                    <a:p>
-                      <a:pPr algn="ctr" fontAlgn="base">
-                        <a:buNone/>
-                      </a:pPr>
-                      <a:r>
-                        <a:rPr lang="en-US" sz="1500" b="0" u="none" strike="noStrike">
-                          <a:solidFill>
-                            <a:srgbClr val="111827"/>
-                          </a:solidFill>
-                          <a:effectLst/>
-                          <a:latin typeface="SVN-Gilroy" panose="00000500000000000000" pitchFamily="50" charset="0"/>
-                        </a:rPr>
-                        <a:t>~1,2x</a:t>
-                      </a:r>
-                      <a:endParaRPr lang="en-US" sz="1500" b="0" i="0" u="none" strike="noStrike">
-                        <a:solidFill>
-                          <a:srgbClr val="111827"/>
-                        </a:solidFill>
-                        <a:effectLst/>
-                        <a:latin typeface="SVN-Gilroy" panose="00000500000000000000" pitchFamily="50" charset="0"/>
-                        <a:ea typeface="Noto Sans" panose="020B0502040504020204" pitchFamily="34" charset="0"/>
-                        <a:cs typeface="Noto Sans" panose="020B0502040504020204" pitchFamily="34" charset="0"/>
-                      </a:endParaRPr>
-                    </a:p>
-                  </a:txBody>
-                  <a:tcPr marL="40640" marR="40640" marT="35560" marB="27940" anchor="ctr">
-                    <a:solidFill>
-                      <a:schemeClr val="bg1">
-                        <a:lumMod val="95000"/>
-                      </a:schemeClr>
-                    </a:solidFill>
-                  </a:tcPr>
-                </a:tc>
-                <a:tc>
-                  <a:txBody>
-                    <a:bodyPr/>
-                    <a:lstStyle/>
-                    <a:p>
-                      <a:pPr algn="l" fontAlgn="base">
-                        <a:buNone/>
-                      </a:pPr>
-                      <a:r>
-                        <a:rPr lang="en-US" sz="1500" b="0" u="none" strike="noStrike">
-                          <a:solidFill>
-                            <a:srgbClr val="111827"/>
-                          </a:solidFill>
-                          <a:effectLst/>
-                          <a:latin typeface="SVN-Gilroy" panose="00000500000000000000" pitchFamily="50" charset="0"/>
-                        </a:rPr>
-                        <a:t>P/B trên giá trị sổ sách dự phóng năm 2026, so với 1,39x tại thời điểm hiện tại.</a:t>
-                      </a:r>
-                      <a:endParaRPr lang="en-US" sz="1500" b="0" i="0" u="none" strike="noStrike">
-                        <a:solidFill>
-                          <a:srgbClr val="111827"/>
-                        </a:solidFill>
-                        <a:effectLst/>
-                        <a:latin typeface="SVN-Gilroy" panose="00000500000000000000" pitchFamily="50" charset="0"/>
-                        <a:ea typeface="Noto Sans" panose="020B0502040504020204" pitchFamily="34" charset="0"/>
-                        <a:cs typeface="Noto Sans" panose="020B0502040504020204" pitchFamily="34" charset="0"/>
-                      </a:endParaRPr>
-                    </a:p>
-                  </a:txBody>
-                  <a:tcPr marL="40640" marR="40640" marT="35560" marB="27940">
-                    <a:solidFill>
-                      <a:schemeClr val="bg1">
-                        <a:lumMod val="95000"/>
-                      </a:schemeClr>
-                    </a:solidFill>
-                  </a:tcPr>
-                </a:tc>
-                <a:tc>
-                  <a:txBody>
-                    <a:bodyPr/>
-                    <a:lstStyle/>
-                    <a:p>
-                      <a:pPr algn="l" fontAlgn="base">
-                        <a:buNone/>
-                      </a:pPr>
-                      <a:r>
-                        <a:rPr lang="en-US" sz="1500" b="0" u="none" strike="noStrike">
-                          <a:solidFill>
-                            <a:srgbClr val="111827"/>
-                          </a:solidFill>
-                          <a:effectLst/>
-                          <a:latin typeface="SVN-Gilroy" panose="00000500000000000000" pitchFamily="50" charset="0"/>
-                        </a:rPr>
-                        <a:t>Thấp hơn cả P/B hiện tại lẫn trung bình 5 năm 1,34x, trong khi khả năng sinh lời không suy giảm.</a:t>
-                      </a:r>
-                      <a:endParaRPr lang="en-US" sz="1500" b="0" i="0" u="none" strike="noStrike">
-                        <a:solidFill>
-                          <a:srgbClr val="111827"/>
-                        </a:solidFill>
-                        <a:effectLst/>
-                        <a:latin typeface="SVN-Gilroy" panose="00000500000000000000" pitchFamily="50" charset="0"/>
-                        <a:ea typeface="Noto Sans" panose="020B0502040504020204" pitchFamily="34" charset="0"/>
-                        <a:cs typeface="Noto Sans" panose="020B0502040504020204" pitchFamily="34" charset="0"/>
-                      </a:endParaRPr>
-                    </a:p>
-                  </a:txBody>
-                  <a:tcPr marL="40640" marR="40640" marT="35560" marB="27940">
-                    <a:solidFill>
-                      <a:schemeClr val="bg1">
-                        <a:lumMod val="95000"/>
-                      </a:schemeClr>
-                    </a:solidFill>
-                  </a:tcPr>
-                </a:tc>
-                <a:extLst>
-                  <a:ext uri="{0D108BD9-81ED-4DB2-BD59-A6C34878D82A}">
-                    <a16:rowId xmlns:a16="http://schemas.microsoft.com/office/drawing/2014/main" val="3711596031"/>
-                  </a:ext>
-                </a:extLst>
-              </a:tr>
-              <a:tr h="1602752">
-                <a:tc>
-                  <a:txBody>
-                    <a:bodyPr/>
-                    <a:lstStyle/>
-                    <a:p>
-                      <a:pPr algn="l" fontAlgn="base">
-                        <a:buNone/>
-                      </a:pPr>
-                      <a:r>
-                        <a:rPr lang="en-US" sz="1500" b="1" u="none" strike="noStrike">
-                          <a:solidFill>
-                            <a:srgbClr val="111827"/>
-                          </a:solidFill>
-                          <a:effectLst/>
-                          <a:latin typeface="SVN-Gilroy" panose="00000500000000000000" pitchFamily="50" charset="0"/>
-                        </a:rPr>
-                        <a:t>② Vốn rẻ (CASA)</a:t>
-                      </a:r>
-                      <a:endParaRPr lang="en-US" sz="1500" b="1" i="0" u="none" strike="noStrike">
-                        <a:solidFill>
-                          <a:srgbClr val="111827"/>
-                        </a:solidFill>
-                        <a:effectLst/>
-                        <a:latin typeface="SVN-Gilroy" panose="00000500000000000000" pitchFamily="50" charset="0"/>
-                        <a:ea typeface="Noto Sans" panose="020B0502040504020204" pitchFamily="34" charset="0"/>
-                        <a:cs typeface="Noto Sans" panose="020B0502040504020204" pitchFamily="34" charset="0"/>
-                      </a:endParaRPr>
-                    </a:p>
-                  </a:txBody>
-                  <a:tcPr marL="40640" marR="40640" marT="35560" marB="27940" anchor="ctr"/>
-                </a:tc>
-                <a:tc>
-                  <a:txBody>
-                    <a:bodyPr/>
-                    <a:lstStyle/>
-                    <a:p>
-                      <a:pPr algn="ctr" fontAlgn="base">
-                        <a:buNone/>
-                      </a:pPr>
-                      <a:r>
-                        <a:rPr lang="en-US" sz="1500" b="0" u="none" strike="noStrike">
-                          <a:solidFill>
-                            <a:srgbClr val="111827"/>
-                          </a:solidFill>
-                          <a:effectLst/>
-                          <a:latin typeface="SVN-Gilroy" panose="00000500000000000000" pitchFamily="50" charset="0"/>
-                        </a:rPr>
-                        <a:t>~38%</a:t>
-                      </a:r>
-                      <a:endParaRPr lang="en-US" sz="1500" b="0" i="0" u="none" strike="noStrike">
-                        <a:solidFill>
-                          <a:srgbClr val="111827"/>
-                        </a:solidFill>
-                        <a:effectLst/>
-                        <a:latin typeface="SVN-Gilroy" panose="00000500000000000000" pitchFamily="50" charset="0"/>
-                        <a:ea typeface="Noto Sans" panose="020B0502040504020204" pitchFamily="34" charset="0"/>
-                        <a:cs typeface="Noto Sans" panose="020B0502040504020204" pitchFamily="34" charset="0"/>
-                      </a:endParaRPr>
-                    </a:p>
-                  </a:txBody>
-                  <a:tcPr marL="40640" marR="40640" marT="35560" marB="27940" anchor="ctr"/>
-                </a:tc>
-                <a:tc>
-                  <a:txBody>
-                    <a:bodyPr/>
-                    <a:lstStyle/>
-                    <a:p>
-                      <a:pPr algn="l" fontAlgn="base">
-                        <a:buNone/>
-                      </a:pPr>
-                      <a:r>
-                        <a:rPr lang="en-US" sz="1500" b="0" u="none" strike="noStrike">
-                          <a:solidFill>
-                            <a:srgbClr val="111827"/>
-                          </a:solidFill>
-                          <a:effectLst/>
-                          <a:latin typeface="SVN-Gilroy" panose="00000500000000000000" pitchFamily="50" charset="0"/>
-                        </a:rPr>
-                        <a:t>Tỷ lệ tiền gửi không kỳ hạn tại thời điểm cuối năm 2025.</a:t>
-                      </a:r>
-                      <a:endParaRPr lang="en-US" sz="1500" b="0" i="0" u="none" strike="noStrike">
-                        <a:solidFill>
-                          <a:srgbClr val="111827"/>
-                        </a:solidFill>
-                        <a:effectLst/>
-                        <a:latin typeface="SVN-Gilroy" panose="00000500000000000000" pitchFamily="50" charset="0"/>
-                        <a:ea typeface="Noto Sans" panose="020B0502040504020204" pitchFamily="34" charset="0"/>
-                        <a:cs typeface="Noto Sans" panose="020B0502040504020204" pitchFamily="34" charset="0"/>
-                      </a:endParaRPr>
-                    </a:p>
-                  </a:txBody>
-                  <a:tcPr marL="40640" marR="40640" marT="35560" marB="27940"/>
-                </a:tc>
-                <a:tc>
-                  <a:txBody>
-                    <a:bodyPr/>
-                    <a:lstStyle/>
-                    <a:p>
-                      <a:pPr algn="l" fontAlgn="base">
-                        <a:buNone/>
-                      </a:pPr>
-                      <a:r>
-                        <a:rPr lang="en-US" sz="1500" b="0" u="none" strike="noStrike">
-                          <a:solidFill>
-                            <a:srgbClr val="111827"/>
-                          </a:solidFill>
-                          <a:effectLst/>
-                          <a:latin typeface="SVN-Gilroy" panose="00000500000000000000" pitchFamily="50" charset="0"/>
-                        </a:rPr>
-                        <a:t>Dẫn đầu hệ thống, giúp MBB giữ chi phí huy động ở nhóm thấp nhất khi NIM toàn ngành thu hẹp.</a:t>
-                      </a:r>
-                      <a:endParaRPr lang="en-US" sz="1500" b="0" i="0" u="none" strike="noStrike">
-                        <a:solidFill>
-                          <a:srgbClr val="111827"/>
-                        </a:solidFill>
-                        <a:effectLst/>
-                        <a:latin typeface="SVN-Gilroy" panose="00000500000000000000" pitchFamily="50" charset="0"/>
-                        <a:ea typeface="Noto Sans" panose="020B0502040504020204" pitchFamily="34" charset="0"/>
-                        <a:cs typeface="Noto Sans" panose="020B0502040504020204" pitchFamily="34" charset="0"/>
-                      </a:endParaRPr>
-                    </a:p>
-                  </a:txBody>
-                  <a:tcPr marL="40640" marR="40640" marT="35560" marB="27940"/>
-                </a:tc>
-                <a:extLst>
-                  <a:ext uri="{0D108BD9-81ED-4DB2-BD59-A6C34878D82A}">
-                    <a16:rowId xmlns:a16="http://schemas.microsoft.com/office/drawing/2014/main" val="2376709250"/>
-                  </a:ext>
-                </a:extLst>
-              </a:tr>
-              <a:tr h="1413409">
-                <a:tc>
-                  <a:txBody>
-                    <a:bodyPr/>
-                    <a:lstStyle/>
-                    <a:p>
-                      <a:pPr algn="l" fontAlgn="base">
-                        <a:buNone/>
-                      </a:pPr>
-                      <a:r>
-                        <a:rPr lang="en-US" sz="1500" b="1" u="none" strike="noStrike">
-                          <a:solidFill>
-                            <a:srgbClr val="111827"/>
-                          </a:solidFill>
-                          <a:effectLst/>
-                          <a:latin typeface="SVN-Gilroy" panose="00000500000000000000" pitchFamily="50" charset="0"/>
-                        </a:rPr>
-                        <a:t>③ Tăng trưởng</a:t>
-                      </a:r>
-                    </a:p>
-                    <a:p>
-                      <a:pPr algn="l" fontAlgn="base">
-                        <a:buNone/>
-                      </a:pPr>
-                      <a:r>
-                        <a:rPr lang="en-US" sz="1500" b="1" u="none" strike="noStrike">
-                          <a:solidFill>
-                            <a:srgbClr val="111827"/>
-                          </a:solidFill>
-                          <a:effectLst/>
-                          <a:latin typeface="SVN-Gilroy" panose="00000500000000000000" pitchFamily="50" charset="0"/>
-                        </a:rPr>
-                        <a:t>(room tín dụng)</a:t>
-                      </a:r>
-                      <a:endParaRPr lang="en-US" sz="1500" b="1" i="0" u="none" strike="noStrike">
-                        <a:solidFill>
-                          <a:srgbClr val="111827"/>
-                        </a:solidFill>
-                        <a:effectLst/>
-                        <a:latin typeface="SVN-Gilroy" panose="00000500000000000000" pitchFamily="50" charset="0"/>
-                        <a:ea typeface="Noto Sans" panose="020B0502040504020204" pitchFamily="34" charset="0"/>
-                        <a:cs typeface="Noto Sans" panose="020B0502040504020204" pitchFamily="34" charset="0"/>
-                      </a:endParaRPr>
-                    </a:p>
-                  </a:txBody>
-                  <a:tcPr marL="40640" marR="40640" marT="35560" marB="27940" anchor="ctr">
-                    <a:solidFill>
-                      <a:schemeClr val="bg1">
-                        <a:lumMod val="95000"/>
-                      </a:schemeClr>
-                    </a:solidFill>
-                  </a:tcPr>
-                </a:tc>
-                <a:tc>
-                  <a:txBody>
-                    <a:bodyPr/>
-                    <a:lstStyle/>
-                    <a:p>
-                      <a:pPr algn="ctr" fontAlgn="base">
-                        <a:buNone/>
-                      </a:pPr>
-                      <a:r>
-                        <a:rPr lang="en-US" sz="1500" b="0" u="none" strike="noStrike">
-                          <a:solidFill>
-                            <a:srgbClr val="111827"/>
-                          </a:solidFill>
-                          <a:effectLst/>
-                          <a:latin typeface="SVN-Gilroy" panose="00000500000000000000" pitchFamily="50" charset="0"/>
-                        </a:rPr>
-                        <a:t>30–35%</a:t>
-                      </a:r>
-                      <a:endParaRPr lang="en-US" sz="1500" b="0" i="0" u="none" strike="noStrike">
-                        <a:solidFill>
-                          <a:srgbClr val="111827"/>
-                        </a:solidFill>
-                        <a:effectLst/>
-                        <a:latin typeface="SVN-Gilroy" panose="00000500000000000000" pitchFamily="50" charset="0"/>
-                        <a:ea typeface="Noto Sans" panose="020B0502040504020204" pitchFamily="34" charset="0"/>
-                        <a:cs typeface="Noto Sans" panose="020B0502040504020204" pitchFamily="34" charset="0"/>
-                      </a:endParaRPr>
-                    </a:p>
-                  </a:txBody>
-                  <a:tcPr marL="40640" marR="40640" marT="35560" marB="27940" anchor="ctr">
-                    <a:solidFill>
-                      <a:schemeClr val="bg1">
-                        <a:lumMod val="95000"/>
-                      </a:schemeClr>
-                    </a:solidFill>
-                  </a:tcPr>
-                </a:tc>
-                <a:tc>
-                  <a:txBody>
-                    <a:bodyPr/>
-                    <a:lstStyle/>
-                    <a:p>
-                      <a:pPr algn="l" fontAlgn="base">
-                        <a:buNone/>
-                      </a:pPr>
-                      <a:r>
-                        <a:rPr lang="en-US" sz="1500" b="0" u="none" strike="noStrike">
-                          <a:solidFill>
-                            <a:srgbClr val="111827"/>
-                          </a:solidFill>
-                          <a:effectLst/>
-                          <a:latin typeface="SVN-Gilroy" panose="00000500000000000000" pitchFamily="50" charset="0"/>
-                        </a:rPr>
-                        <a:t>Mục tiêu tăng trưởng tín dụng năm 2026; đã đạt khoảng 10% tính tới tháng 5.</a:t>
-                      </a:r>
-                      <a:endParaRPr lang="en-US" sz="1500" b="0" i="0" u="none" strike="noStrike">
-                        <a:solidFill>
-                          <a:srgbClr val="111827"/>
-                        </a:solidFill>
-                        <a:effectLst/>
-                        <a:latin typeface="SVN-Gilroy" panose="00000500000000000000" pitchFamily="50" charset="0"/>
-                        <a:ea typeface="Noto Sans" panose="020B0502040504020204" pitchFamily="34" charset="0"/>
-                        <a:cs typeface="Noto Sans" panose="020B0502040504020204" pitchFamily="34" charset="0"/>
-                      </a:endParaRPr>
-                    </a:p>
-                  </a:txBody>
-                  <a:tcPr marL="40640" marR="40640" marT="35560" marB="27940">
-                    <a:solidFill>
-                      <a:schemeClr val="bg1">
-                        <a:lumMod val="95000"/>
-                      </a:schemeClr>
-                    </a:solidFill>
-                  </a:tcPr>
-                </a:tc>
-                <a:tc>
-                  <a:txBody>
-                    <a:bodyPr/>
-                    <a:lstStyle/>
-                    <a:p>
-                      <a:pPr algn="l" fontAlgn="base">
-                        <a:buNone/>
-                      </a:pPr>
-                      <a:r>
-                        <a:rPr lang="en-US" sz="1500" b="0" u="none" strike="noStrike">
-                          <a:solidFill>
-                            <a:srgbClr val="111827"/>
-                          </a:solidFill>
-                          <a:effectLst/>
-                          <a:latin typeface="SVN-Gilroy" panose="00000500000000000000" pitchFamily="50" charset="0"/>
-                        </a:rPr>
-                        <a:t>Hạn mức thuộc nhóm cao nhất thị trường cho giai đoạn 2026–2028 sau khi nhận chuyển giao MBV.</a:t>
-                      </a:r>
-                      <a:endParaRPr lang="en-US" sz="1500" b="0" i="0" u="none" strike="noStrike" dirty="0">
-                        <a:solidFill>
-                          <a:srgbClr val="111827"/>
-                        </a:solidFill>
-                        <a:effectLst/>
-                        <a:latin typeface="SVN-Gilroy" panose="00000500000000000000" pitchFamily="50" charset="0"/>
-                        <a:ea typeface="Noto Sans" panose="020B0502040504020204" pitchFamily="34" charset="0"/>
-                        <a:cs typeface="Noto Sans" panose="020B0502040504020204" pitchFamily="34" charset="0"/>
-                      </a:endParaRPr>
-                    </a:p>
-                  </a:txBody>
-                  <a:tcPr marL="40640" marR="40640" marT="35560" marB="27940">
-                    <a:solidFill>
-                      <a:schemeClr val="bg1">
-                        <a:lumMod val="95000"/>
-                      </a:schemeClr>
-                    </a:solidFill>
-                  </a:tcPr>
-                </a:tc>
-                <a:extLst>
-                  <a:ext uri="{0D108BD9-81ED-4DB2-BD59-A6C34878D82A}">
-                    <a16:rowId xmlns:a16="http://schemas.microsoft.com/office/drawing/2014/main" val="3866272996"/>
-                  </a:ext>
-                </a:extLst>
-              </a:tr>
-              <a:tr h="1602752">
-                <a:tc>
-                  <a:txBody>
-                    <a:bodyPr/>
-                    <a:lstStyle/>
-                    <a:p>
-                      <a:pPr algn="l" fontAlgn="base">
-                        <a:buNone/>
-                      </a:pPr>
-                      <a:r>
-                        <a:rPr lang="en-US" sz="1500" b="1" u="none" strike="noStrike">
-                          <a:solidFill>
-                            <a:srgbClr val="111827"/>
-                          </a:solidFill>
-                          <a:effectLst/>
-                          <a:latin typeface="SVN-Gilroy" panose="00000500000000000000" pitchFamily="50" charset="0"/>
-                        </a:rPr>
-                        <a:t>Sinh lời</a:t>
-                      </a:r>
-                    </a:p>
-                    <a:p>
-                      <a:pPr algn="l" fontAlgn="base">
-                        <a:buNone/>
-                      </a:pPr>
-                      <a:r>
-                        <a:rPr lang="en-US" sz="1500" b="1" u="none" strike="noStrike">
-                          <a:solidFill>
-                            <a:srgbClr val="111827"/>
-                          </a:solidFill>
-                          <a:effectLst/>
-                          <a:latin typeface="SVN-Gilroy" panose="00000500000000000000" pitchFamily="50" charset="0"/>
-                        </a:rPr>
-                        <a:t>(ROE 2025)</a:t>
-                      </a:r>
-                      <a:endParaRPr lang="en-US" sz="1500" b="1" i="0" u="none" strike="noStrike">
-                        <a:solidFill>
-                          <a:srgbClr val="111827"/>
-                        </a:solidFill>
-                        <a:effectLst/>
-                        <a:latin typeface="SVN-Gilroy" panose="00000500000000000000" pitchFamily="50" charset="0"/>
-                        <a:ea typeface="Noto Sans" panose="020B0502040504020204" pitchFamily="34" charset="0"/>
-                        <a:cs typeface="Noto Sans" panose="020B0502040504020204" pitchFamily="34" charset="0"/>
-                      </a:endParaRPr>
-                    </a:p>
-                  </a:txBody>
-                  <a:tcPr marL="40640" marR="40640" marT="35560" marB="27940" anchor="ctr"/>
-                </a:tc>
-                <a:tc>
-                  <a:txBody>
-                    <a:bodyPr/>
-                    <a:lstStyle/>
-                    <a:p>
-                      <a:pPr algn="ctr" fontAlgn="base">
-                        <a:buNone/>
-                      </a:pPr>
-                      <a:r>
-                        <a:rPr lang="en-US" sz="1500" b="0" u="none" strike="noStrike">
-                          <a:solidFill>
-                            <a:srgbClr val="111827"/>
-                          </a:solidFill>
-                          <a:effectLst/>
-                          <a:latin typeface="SVN-Gilroy" panose="00000500000000000000" pitchFamily="50" charset="0"/>
-                        </a:rPr>
-                        <a:t>21,1%</a:t>
-                      </a:r>
-                      <a:endParaRPr lang="en-US" sz="1500" b="0" i="0" u="none" strike="noStrike">
-                        <a:solidFill>
-                          <a:srgbClr val="111827"/>
-                        </a:solidFill>
-                        <a:effectLst/>
-                        <a:latin typeface="SVN-Gilroy" panose="00000500000000000000" pitchFamily="50" charset="0"/>
-                        <a:ea typeface="Noto Sans" panose="020B0502040504020204" pitchFamily="34" charset="0"/>
-                        <a:cs typeface="Noto Sans" panose="020B0502040504020204" pitchFamily="34" charset="0"/>
-                      </a:endParaRPr>
-                    </a:p>
-                  </a:txBody>
-                  <a:tcPr marL="40640" marR="40640" marT="35560" marB="27940" anchor="ctr"/>
-                </a:tc>
-                <a:tc>
-                  <a:txBody>
-                    <a:bodyPr/>
-                    <a:lstStyle/>
-                    <a:p>
-                      <a:pPr algn="l" fontAlgn="base">
-                        <a:buNone/>
-                      </a:pPr>
-                      <a:r>
-                        <a:rPr lang="en-US" sz="1500" b="0" u="none" strike="noStrike">
-                          <a:solidFill>
-                            <a:srgbClr val="111827"/>
-                          </a:solidFill>
-                          <a:effectLst/>
-                          <a:latin typeface="SVN-Gilroy" panose="00000500000000000000" pitchFamily="50" charset="0"/>
-                        </a:rPr>
-                        <a:t>Tỷ suất sinh lời trên vốn chủ sở hữu cả năm 2025, theo công bố của MB.</a:t>
-                      </a:r>
-                      <a:endParaRPr lang="en-US" sz="1500" b="0" i="0" u="none" strike="noStrike">
-                        <a:solidFill>
-                          <a:srgbClr val="111827"/>
-                        </a:solidFill>
-                        <a:effectLst/>
-                        <a:latin typeface="SVN-Gilroy" panose="00000500000000000000" pitchFamily="50" charset="0"/>
-                        <a:ea typeface="Noto Sans" panose="020B0502040504020204" pitchFamily="34" charset="0"/>
-                        <a:cs typeface="Noto Sans" panose="020B0502040504020204" pitchFamily="34" charset="0"/>
-                      </a:endParaRPr>
-                    </a:p>
-                  </a:txBody>
-                  <a:tcPr marL="40640" marR="40640" marT="35560" marB="27940"/>
-                </a:tc>
-                <a:tc>
-                  <a:txBody>
-                    <a:bodyPr/>
-                    <a:lstStyle/>
-                    <a:p>
-                      <a:pPr algn="l" fontAlgn="base">
-                        <a:buNone/>
-                      </a:pPr>
-                      <a:r>
-                        <a:rPr lang="en-US" sz="1500" b="0" u="none" strike="noStrike">
-                          <a:solidFill>
-                            <a:srgbClr val="111827"/>
-                          </a:solidFill>
-                          <a:effectLst/>
-                          <a:latin typeface="SVN-Gilroy" panose="00000500000000000000" pitchFamily="50" charset="0"/>
-                        </a:rPr>
-                        <a:t>Thuộc nhóm cao nhất trong các ngân hàng quy mô lớn, hỗ trợ cho một mặt bằng định giá cao hơn.</a:t>
-                      </a:r>
-                      <a:endParaRPr lang="en-US" sz="1500" b="0" i="0" u="none" strike="noStrike">
-                        <a:solidFill>
-                          <a:srgbClr val="111827"/>
-                        </a:solidFill>
-                        <a:effectLst/>
-                        <a:latin typeface="SVN-Gilroy" panose="00000500000000000000" pitchFamily="50" charset="0"/>
-                        <a:ea typeface="Noto Sans" panose="020B0502040504020204" pitchFamily="34" charset="0"/>
-                        <a:cs typeface="Noto Sans" panose="020B0502040504020204" pitchFamily="34" charset="0"/>
-                      </a:endParaRPr>
-                    </a:p>
-                  </a:txBody>
-                  <a:tcPr marL="40640" marR="40640" marT="35560" marB="27940"/>
-                </a:tc>
-                <a:extLst>
-                  <a:ext uri="{0D108BD9-81ED-4DB2-BD59-A6C34878D82A}">
-                    <a16:rowId xmlns:a16="http://schemas.microsoft.com/office/drawing/2014/main" val="3955427424"/>
-                  </a:ext>
-                </a:extLst>
-              </a:tr>
-              <a:tr h="1858766">
-                <a:tc>
-                  <a:txBody>
-                    <a:bodyPr/>
-                    <a:lstStyle/>
-                    <a:p>
-                      <a:pPr algn="l" fontAlgn="base">
-                        <a:buNone/>
-                      </a:pPr>
-                      <a:r>
-                        <a:rPr lang="en-US" sz="1500" b="1" u="none" strike="noStrike">
-                          <a:solidFill>
-                            <a:srgbClr val="111827"/>
-                          </a:solidFill>
-                          <a:effectLst/>
-                          <a:latin typeface="SVN-Gilroy" panose="00000500000000000000" pitchFamily="50" charset="0"/>
-                        </a:rPr>
-                        <a:t>Giá mục tiêu</a:t>
-                      </a:r>
-                    </a:p>
-                    <a:p>
-                      <a:pPr algn="l" fontAlgn="base">
-                        <a:buNone/>
-                      </a:pPr>
-                      <a:r>
-                        <a:rPr lang="en-US" sz="1500" b="1" u="none" strike="noStrike">
-                          <a:solidFill>
-                            <a:srgbClr val="111827"/>
-                          </a:solidFill>
-                          <a:effectLst/>
-                          <a:latin typeface="SVN-Gilroy" panose="00000500000000000000" pitchFamily="50" charset="0"/>
-                        </a:rPr>
-                        <a:t>(đồng/cổ phiếu)</a:t>
-                      </a:r>
-                      <a:endParaRPr lang="en-US" sz="1500" b="1" i="0" u="none" strike="noStrike">
-                        <a:solidFill>
-                          <a:srgbClr val="111827"/>
-                        </a:solidFill>
-                        <a:effectLst/>
-                        <a:latin typeface="SVN-Gilroy" panose="00000500000000000000" pitchFamily="50" charset="0"/>
-                        <a:ea typeface="Noto Sans" panose="020B0502040504020204" pitchFamily="34" charset="0"/>
-                        <a:cs typeface="Noto Sans" panose="020B0502040504020204" pitchFamily="34" charset="0"/>
-                      </a:endParaRPr>
-                    </a:p>
-                  </a:txBody>
-                  <a:tcPr marL="40640" marR="40640" marT="35560" marB="27940" anchor="ctr">
-                    <a:solidFill>
-                      <a:schemeClr val="bg1">
-                        <a:lumMod val="95000"/>
-                      </a:schemeClr>
-                    </a:solidFill>
-                  </a:tcPr>
-                </a:tc>
-                <a:tc>
-                  <a:txBody>
-                    <a:bodyPr/>
-                    <a:lstStyle/>
-                    <a:p>
-                      <a:pPr algn="ctr" fontAlgn="base">
-                        <a:buNone/>
-                      </a:pPr>
-                      <a:r>
-                        <a:rPr lang="en-US" sz="1500" b="0" u="none" strike="noStrike">
-                          <a:solidFill>
-                            <a:srgbClr val="111827"/>
-                          </a:solidFill>
-                          <a:effectLst/>
-                          <a:latin typeface="SVN-Gilroy" panose="00000500000000000000" pitchFamily="50" charset="0"/>
-                        </a:rPr>
-                        <a:t>32.900 – 37.230</a:t>
-                      </a:r>
-                      <a:endParaRPr lang="en-US" sz="1500" b="0" i="0" u="none" strike="noStrike">
-                        <a:solidFill>
-                          <a:srgbClr val="111827"/>
-                        </a:solidFill>
-                        <a:effectLst/>
-                        <a:latin typeface="SVN-Gilroy" panose="00000500000000000000" pitchFamily="50" charset="0"/>
-                        <a:ea typeface="Noto Sans" panose="020B0502040504020204" pitchFamily="34" charset="0"/>
-                        <a:cs typeface="Noto Sans" panose="020B0502040504020204" pitchFamily="34" charset="0"/>
-                      </a:endParaRPr>
-                    </a:p>
-                  </a:txBody>
-                  <a:tcPr marL="40640" marR="40640" marT="35560" marB="27940" anchor="ctr">
-                    <a:solidFill>
-                      <a:schemeClr val="bg1">
-                        <a:lumMod val="95000"/>
-                      </a:schemeClr>
-                    </a:solidFill>
-                  </a:tcPr>
-                </a:tc>
-                <a:tc>
-                  <a:txBody>
-                    <a:bodyPr/>
-                    <a:lstStyle/>
-                    <a:p>
-                      <a:pPr algn="l" fontAlgn="base">
-                        <a:buNone/>
-                      </a:pPr>
-                      <a:r>
-                        <a:rPr lang="en-US" sz="1500" b="0" u="none" strike="noStrike">
-                          <a:solidFill>
-                            <a:srgbClr val="111827"/>
-                          </a:solidFill>
-                          <a:effectLst/>
-                          <a:latin typeface="SVN-Gilroy" panose="00000500000000000000" pitchFamily="50" charset="0"/>
-                        </a:rPr>
-                        <a:t>Vùng giá mục tiêu năm 2026 của BSC, Mirae Asset, KBSV và VCBS.</a:t>
-                      </a:r>
-                      <a:endParaRPr lang="en-US" sz="1500" b="0" i="0" u="none" strike="noStrike">
-                        <a:solidFill>
-                          <a:srgbClr val="111827"/>
-                        </a:solidFill>
-                        <a:effectLst/>
-                        <a:latin typeface="SVN-Gilroy" panose="00000500000000000000" pitchFamily="50" charset="0"/>
-                        <a:ea typeface="Noto Sans" panose="020B0502040504020204" pitchFamily="34" charset="0"/>
-                        <a:cs typeface="Noto Sans" panose="020B0502040504020204" pitchFamily="34" charset="0"/>
-                      </a:endParaRPr>
-                    </a:p>
-                  </a:txBody>
-                  <a:tcPr marL="40640" marR="40640" marT="35560" marB="27940">
-                    <a:solidFill>
-                      <a:schemeClr val="bg1">
-                        <a:lumMod val="95000"/>
-                      </a:schemeClr>
-                    </a:solidFill>
-                  </a:tcPr>
-                </a:tc>
-                <a:tc>
-                  <a:txBody>
-                    <a:bodyPr/>
-                    <a:lstStyle/>
-                    <a:p>
-                      <a:pPr algn="l" fontAlgn="base">
-                        <a:buNone/>
-                      </a:pPr>
-                      <a:r>
-                        <a:rPr lang="en-US" sz="1500" b="0" u="none" strike="noStrike">
-                          <a:solidFill>
-                            <a:srgbClr val="111827"/>
-                          </a:solidFill>
-                          <a:effectLst/>
-                          <a:latin typeface="SVN-Gilroy" panose="00000500000000000000" pitchFamily="50" charset="0"/>
-                        </a:rPr>
-                        <a:t>Cả bốn nhóm phân tích đều đang duy trì khuyến nghị MUA đối với cổ phiếu MBB.</a:t>
-                      </a:r>
-                      <a:endParaRPr lang="en-US" sz="1500" b="1" i="0" u="none" strike="noStrike" dirty="0">
-                        <a:solidFill>
-                          <a:srgbClr val="111827"/>
-                        </a:solidFill>
-                        <a:effectLst/>
-                        <a:latin typeface="SVN-Gilroy" panose="00000500000000000000" pitchFamily="50" charset="0"/>
-                        <a:ea typeface="Noto Sans" panose="020B0502040504020204" pitchFamily="34" charset="0"/>
-                        <a:cs typeface="Noto Sans" panose="020B0502040504020204" pitchFamily="34" charset="0"/>
-                      </a:endParaRPr>
-                    </a:p>
-                  </a:txBody>
-                  <a:tcPr marL="40640" marR="40640" marT="35560" marB="27940">
-                    <a:solidFill>
-                      <a:schemeClr val="bg1">
-                        <a:lumMod val="95000"/>
-                      </a:schemeClr>
-                    </a:solidFill>
-                  </a:tcPr>
-                </a:tc>
-                <a:extLst>
-                  <a:ext uri="{0D108BD9-81ED-4DB2-BD59-A6C34878D82A}">
-                    <a16:rowId xmlns:a16="http://schemas.microsoft.com/office/drawing/2014/main" val="3084792990"/>
-                  </a:ext>
-                </a:extLst>
-              </a:tr>
-            </a:tbl>
-          </a:graphicData>
-        </a:graphic>
-      </p:graphicFrame>
-      <p:sp>
-        <p:nvSpPr>
-          <p:cNvPr id="7" name="TextBox 6">
-            <a:extLst>
-              <a:ext uri="{FF2B5EF4-FFF2-40B4-BE49-F238E27FC236}">
-                <a16:creationId xmlns:a16="http://schemas.microsoft.com/office/drawing/2014/main" id="{32CA5966-3ADD-63D3-D22E-86E91BA0392C}"/>
-              </a:ext>
-            </a:extLst>
-          </p:cNvPr>
-          <p:cNvSpPr txBox="1"/>
-          <p:nvPr/>
-        </p:nvSpPr>
-        <p:spPr>
-          <a:xfrm>
-            <a:off x="586539" y="928966"/>
-            <a:ext cx="9113922" cy="630942"/>
-          </a:xfrm>
-          <a:prstGeom prst="rect">
-            <a:avLst/>
-          </a:prstGeom>
-          <a:noFill/>
-        </p:spPr>
-        <p:txBody>
-          <a:bodyPr wrap="square" rtlCol="0">
-            <a:spAutoFit/>
-          </a:bodyPr>
-          <a:lstStyle/>
-          <a:p>
-            <a:pPr lvl="0" algn="ctr">
-              <a:defRPr/>
-            </a:pPr>
-            <a:r>
-              <a:rPr lang="en-US" sz="3500">
-                <a:solidFill>
-                  <a:prstClr val="white"/>
-                </a:solidFill>
-                <a:latin typeface="SVN-Gilroy XBold" panose="00000900000000000000" pitchFamily="50" charset="0"/>
-              </a:rPr>
-              <a:t>Vốn rẻ dẫn đầu, tăng trưởng vượt trội</a:t>
-            </a:r>
-          </a:p>
-        </p:txBody>
-      </p:sp>
-      <p:sp>
-        <p:nvSpPr>
-          <p:cNvPr id="13" name="TextBox 12">
-            <a:extLst>
-              <a:ext uri="{FF2B5EF4-FFF2-40B4-BE49-F238E27FC236}">
-                <a16:creationId xmlns:a16="http://schemas.microsoft.com/office/drawing/2014/main" id="{3484CDE5-EB89-B3EF-A04F-A43E8DA057BB}"/>
-              </a:ext>
-            </a:extLst>
-          </p:cNvPr>
-          <p:cNvSpPr txBox="1"/>
-          <p:nvPr/>
-        </p:nvSpPr>
-        <p:spPr>
-          <a:xfrm>
-            <a:off x="1175001" y="12499183"/>
-            <a:ext cx="5644899" cy="276999"/>
-          </a:xfrm>
-          <a:prstGeom prst="rect">
-            <a:avLst/>
-          </a:prstGeom>
-          <a:noFill/>
-        </p:spPr>
-        <p:txBody>
-          <a:bodyPr wrap="square" rtlCol="0">
-            <a:spAutoFit/>
-          </a:bodyPr>
-          <a:lstStyle/>
-          <a:p>
-            <a:pPr marL="0" marR="0" lvl="0" indent="0" algn="l" defTabSz="457200" rtl="0" eaLnBrk="1" fontAlgn="auto" latinLnBrk="0" hangingPunct="1">
-              <a:lnSpc>
-                <a:spcPct val="100000"/>
-              </a:lnSpc>
-              <a:spcBef>
-                <a:spcPts val="0"/>
-              </a:spcBef>
-              <a:spcAft>
-                <a:spcPts val="0"/>
-              </a:spcAft>
-              <a:buClrTx/>
-              <a:buSzTx/>
-              <a:buFontTx/>
-              <a:buNone/>
-              <a:tabLst/>
-              <a:defRPr/>
-            </a:pPr>
-            <a:r>
-              <a:rPr kumimoji="0" lang="en-US" sz="1200" b="0" i="0" u="none" strike="noStrike" kern="1200" cap="none" spc="0" normalizeH="0" baseline="0" noProof="0">
-                <a:ln>
-                  <a:noFill/>
-                </a:ln>
-                <a:solidFill>
-                  <a:prstClr val="black"/>
-                </a:solidFill>
-                <a:effectLst/>
-                <a:uLnTx/>
-                <a:uFillTx/>
-                <a:latin typeface="SVN-Gilroy" panose="00000500000000000000"/>
-                <a:ea typeface="+mn-ea"/>
-                <a:cs typeface="+mn-cs"/>
-              </a:rPr>
-              <a:t>Nguồn: BSC, KBSV, Mirae Asset Research, VCBS; Mirae Asset Research tổng hợp</a:t>
-            </a:r>
-            <a:endParaRPr kumimoji="0" lang="en-US" sz="1200" b="0" i="0" u="none" strike="noStrike" kern="1200" cap="none" spc="0" normalizeH="0" baseline="0" noProof="0" dirty="0">
-              <a:ln>
-                <a:noFill/>
-              </a:ln>
-              <a:solidFill>
-                <a:prstClr val="black"/>
-              </a:solidFill>
-              <a:effectLst/>
-              <a:uLnTx/>
-              <a:uFillTx/>
-              <a:latin typeface="SVN-Gilroy" panose="00000500000000000000"/>
-              <a:ea typeface="+mn-ea"/>
-              <a:cs typeface="+mn-cs"/>
-            </a:endParaRPr>
-          </a:p>
-        </p:txBody>
-      </p:sp>
-    </p:spTree>
-    <p:extLst>
-      <p:ext uri="{BB962C8B-B14F-4D97-AF65-F5344CB8AC3E}">
-        <p14:creationId xmlns:p14="http://schemas.microsoft.com/office/powerpoint/2010/main" val="4053188632"/>
       </p:ext>
     </p:extLst>
   </p:cSld>
@@ -10770,6 +11309,292 @@
 </a:themeOverride>
 </file>
 
+<file path=ppt/theme/themeOverride3.xml><?xml version="1.0" encoding="utf-8"?>
+<a:themeOverride xmlns:a="http://schemas.openxmlformats.org/drawingml/2006/main">
+  <a:clrScheme name="미래에셋대우1">
+    <a:dk1>
+      <a:srgbClr val="000000"/>
+    </a:dk1>
+    <a:lt1>
+      <a:sysClr val="window" lastClr="FFFFFF"/>
+    </a:lt1>
+    <a:dk2>
+      <a:srgbClr val="F58220"/>
+    </a:dk2>
+    <a:lt2>
+      <a:srgbClr val="C00000"/>
+    </a:lt2>
+    <a:accent1>
+      <a:srgbClr val="F0B26B"/>
+    </a:accent1>
+    <a:accent2>
+      <a:srgbClr val="C2AC97"/>
+    </a:accent2>
+    <a:accent3>
+      <a:srgbClr val="043B72"/>
+    </a:accent3>
+    <a:accent4>
+      <a:srgbClr val="0086B8"/>
+    </a:accent4>
+    <a:accent5>
+      <a:srgbClr val="8DC8E8"/>
+    </a:accent5>
+    <a:accent6>
+      <a:srgbClr val="84888B"/>
+    </a:accent6>
+    <a:hlink>
+      <a:srgbClr val="FFFFFF"/>
+    </a:hlink>
+    <a:folHlink>
+      <a:srgbClr val="FFFFFF"/>
+    </a:folHlink>
+  </a:clrScheme>
+  <a:fontScheme name="Office">
+    <a:majorFont>
+      <a:latin typeface="맑은 고딕" panose="020F0302020204030204"/>
+      <a:ea typeface=""/>
+      <a:cs typeface=""/>
+      <a:font script="Jpan" typeface="游ゴシック Light"/>
+      <a:font script="Hang" typeface="맑은 고딕"/>
+      <a:font script="Hans" typeface="等线 Light"/>
+      <a:font script="Hant" typeface="新細明體"/>
+      <a:font script="Arab" typeface="Times New Roman"/>
+      <a:font script="Hebr" typeface="Times New Roman"/>
+      <a:font script="Thai" typeface="Angsana New"/>
+      <a:font script="Ethi" typeface="Nyala"/>
+      <a:font script="Beng" typeface="Vrinda"/>
+      <a:font script="Gujr" typeface="Shruti"/>
+      <a:font script="Khmr" typeface="MoolBoran"/>
+      <a:font script="Knda" typeface="Tunga"/>
+      <a:font script="Guru" typeface="Raavi"/>
+      <a:font script="Cans" typeface="Euphemia"/>
+      <a:font script="Cher" typeface="Plantagenet Cherokee"/>
+      <a:font script="Yiii" typeface="Microsoft Yi Baiti"/>
+      <a:font script="Tibt" typeface="Microsoft Himalaya"/>
+      <a:font script="Thaa" typeface="MV Boli"/>
+      <a:font script="Deva" typeface="Mangal"/>
+      <a:font script="Telu" typeface="Gautami"/>
+      <a:font script="Taml" typeface="Latha"/>
+      <a:font script="Syrc" typeface="Estrangelo Edessa"/>
+      <a:font script="Orya" typeface="Kalinga"/>
+      <a:font script="Mlym" typeface="Kartika"/>
+      <a:font script="Laoo" typeface="DokChampa"/>
+      <a:font script="Sinh" typeface="Iskoola Pota"/>
+      <a:font script="Mong" typeface="Mongolian Baiti"/>
+      <a:font script="Viet" typeface="Times New Roman"/>
+      <a:font script="Uigh" typeface="Microsoft Uighur"/>
+      <a:font script="Geor" typeface="Sylfaen"/>
+      <a:font script="Armn" typeface="Arial"/>
+      <a:font script="Bugi" typeface="Leelawadee UI"/>
+      <a:font script="Bopo" typeface="Microsoft JhengHei"/>
+      <a:font script="Java" typeface="Javanese Text"/>
+      <a:font script="Lisu" typeface="Segoe UI"/>
+      <a:font script="Mymr" typeface="Myanmar Text"/>
+      <a:font script="Nkoo" typeface="Ebrima"/>
+      <a:font script="Olck" typeface="Nirmala UI"/>
+      <a:font script="Osma" typeface="Ebrima"/>
+      <a:font script="Phag" typeface="Phagspa"/>
+      <a:font script="Syrn" typeface="Estrangelo Edessa"/>
+      <a:font script="Syrj" typeface="Estrangelo Edessa"/>
+      <a:font script="Syre" typeface="Estrangelo Edessa"/>
+      <a:font script="Sora" typeface="Nirmala UI"/>
+      <a:font script="Tale" typeface="Microsoft Tai Le"/>
+      <a:font script="Talu" typeface="Microsoft New Tai Lue"/>
+      <a:font script="Tfng" typeface="Ebrima"/>
+    </a:majorFont>
+    <a:minorFont>
+      <a:latin typeface="맑은 고딕" panose="020F0502020204030204"/>
+      <a:ea typeface=""/>
+      <a:cs typeface=""/>
+      <a:font script="Jpan" typeface="游明朝"/>
+      <a:font script="Hang" typeface="맑은 고딕"/>
+      <a:font script="Hans" typeface="等线"/>
+      <a:font script="Hant" typeface="新細明體"/>
+      <a:font script="Arab" typeface="Arial"/>
+      <a:font script="Hebr" typeface="Arial"/>
+      <a:font script="Thai" typeface="Cordia New"/>
+      <a:font script="Ethi" typeface="Nyala"/>
+      <a:font script="Beng" typeface="Vrinda"/>
+      <a:font script="Gujr" typeface="Shruti"/>
+      <a:font script="Khmr" typeface="DaunPenh"/>
+      <a:font script="Knda" typeface="Tunga"/>
+      <a:font script="Guru" typeface="Raavi"/>
+      <a:font script="Cans" typeface="Euphemia"/>
+      <a:font script="Cher" typeface="Plantagenet Cherokee"/>
+      <a:font script="Yiii" typeface="Microsoft Yi Baiti"/>
+      <a:font script="Tibt" typeface="Microsoft Himalaya"/>
+      <a:font script="Thaa" typeface="MV Boli"/>
+      <a:font script="Deva" typeface="Mangal"/>
+      <a:font script="Telu" typeface="Gautami"/>
+      <a:font script="Taml" typeface="Latha"/>
+      <a:font script="Syrc" typeface="Estrangelo Edessa"/>
+      <a:font script="Orya" typeface="Kalinga"/>
+      <a:font script="Mlym" typeface="Kartika"/>
+      <a:font script="Laoo" typeface="DokChampa"/>
+      <a:font script="Sinh" typeface="Iskoola Pota"/>
+      <a:font script="Mong" typeface="Mongolian Baiti"/>
+      <a:font script="Viet" typeface="Arial"/>
+      <a:font script="Uigh" typeface="Microsoft Uighur"/>
+      <a:font script="Geor" typeface="Sylfaen"/>
+      <a:font script="Armn" typeface="Arial"/>
+      <a:font script="Bugi" typeface="Leelawadee UI"/>
+      <a:font script="Bopo" typeface="Microsoft JhengHei"/>
+      <a:font script="Java" typeface="Javanese Text"/>
+      <a:font script="Lisu" typeface="Segoe UI"/>
+      <a:font script="Mymr" typeface="Myanmar Text"/>
+      <a:font script="Nkoo" typeface="Ebrima"/>
+      <a:font script="Olck" typeface="Nirmala UI"/>
+      <a:font script="Osma" typeface="Ebrima"/>
+      <a:font script="Phag" typeface="Phagspa"/>
+      <a:font script="Syrn" typeface="Estrangelo Edessa"/>
+      <a:font script="Syrj" typeface="Estrangelo Edessa"/>
+      <a:font script="Syre" typeface="Estrangelo Edessa"/>
+      <a:font script="Sora" typeface="Nirmala UI"/>
+      <a:font script="Tale" typeface="Microsoft Tai Le"/>
+      <a:font script="Talu" typeface="Microsoft New Tai Lue"/>
+      <a:font script="Tfng" typeface="Ebrima"/>
+    </a:minorFont>
+  </a:fontScheme>
+  <a:fmtScheme name="Office">
+    <a:fillStyleLst>
+      <a:solidFill>
+        <a:schemeClr val="phClr"/>
+      </a:solidFill>
+      <a:gradFill rotWithShape="1">
+        <a:gsLst>
+          <a:gs pos="0">
+            <a:schemeClr val="phClr">
+              <a:lumMod val="110000"/>
+              <a:satMod val="105000"/>
+              <a:tint val="67000"/>
+            </a:schemeClr>
+          </a:gs>
+          <a:gs pos="50000">
+            <a:schemeClr val="phClr">
+              <a:lumMod val="105000"/>
+              <a:satMod val="103000"/>
+              <a:tint val="73000"/>
+            </a:schemeClr>
+          </a:gs>
+          <a:gs pos="100000">
+            <a:schemeClr val="phClr">
+              <a:lumMod val="105000"/>
+              <a:satMod val="109000"/>
+              <a:tint val="81000"/>
+            </a:schemeClr>
+          </a:gs>
+        </a:gsLst>
+        <a:lin ang="5400000" scaled="0"/>
+      </a:gradFill>
+      <a:gradFill rotWithShape="1">
+        <a:gsLst>
+          <a:gs pos="0">
+            <a:schemeClr val="phClr">
+              <a:satMod val="103000"/>
+              <a:lumMod val="102000"/>
+              <a:tint val="94000"/>
+            </a:schemeClr>
+          </a:gs>
+          <a:gs pos="50000">
+            <a:schemeClr val="phClr">
+              <a:satMod val="110000"/>
+              <a:lumMod val="100000"/>
+              <a:shade val="100000"/>
+            </a:schemeClr>
+          </a:gs>
+          <a:gs pos="100000">
+            <a:schemeClr val="phClr">
+              <a:lumMod val="99000"/>
+              <a:satMod val="120000"/>
+              <a:shade val="78000"/>
+            </a:schemeClr>
+          </a:gs>
+        </a:gsLst>
+        <a:lin ang="5400000" scaled="0"/>
+      </a:gradFill>
+    </a:fillStyleLst>
+    <a:lnStyleLst>
+      <a:ln w="6350" cap="flat" cmpd="sng" algn="ctr">
+        <a:solidFill>
+          <a:schemeClr val="phClr"/>
+        </a:solidFill>
+        <a:prstDash val="solid"/>
+        <a:miter lim="800000"/>
+      </a:ln>
+      <a:ln w="12700" cap="flat" cmpd="sng" algn="ctr">
+        <a:solidFill>
+          <a:schemeClr val="phClr"/>
+        </a:solidFill>
+        <a:prstDash val="solid"/>
+        <a:miter lim="800000"/>
+      </a:ln>
+      <a:ln w="19050" cap="flat" cmpd="sng" algn="ctr">
+        <a:solidFill>
+          <a:schemeClr val="phClr"/>
+        </a:solidFill>
+        <a:prstDash val="solid"/>
+        <a:miter lim="800000"/>
+      </a:ln>
+    </a:lnStyleLst>
+    <a:effectStyleLst>
+      <a:effectStyle>
+        <a:effectLst/>
+      </a:effectStyle>
+      <a:effectStyle>
+        <a:effectLst/>
+      </a:effectStyle>
+      <a:effectStyle>
+        <a:effectLst>
+          <a:outerShdw blurRad="57150" dist="19050" dir="5400000" algn="ctr" rotWithShape="0">
+            <a:srgbClr val="000000">
+              <a:alpha val="63000"/>
+            </a:srgbClr>
+          </a:outerShdw>
+        </a:effectLst>
+      </a:effectStyle>
+    </a:effectStyleLst>
+    <a:bgFillStyleLst>
+      <a:solidFill>
+        <a:schemeClr val="phClr"/>
+      </a:solidFill>
+      <a:solidFill>
+        <a:schemeClr val="phClr">
+          <a:tint val="95000"/>
+          <a:satMod val="170000"/>
+        </a:schemeClr>
+      </a:solidFill>
+      <a:gradFill rotWithShape="1">
+        <a:gsLst>
+          <a:gs pos="0">
+            <a:schemeClr val="phClr">
+              <a:tint val="93000"/>
+              <a:satMod val="150000"/>
+              <a:shade val="98000"/>
+              <a:lumMod val="102000"/>
+            </a:schemeClr>
+          </a:gs>
+          <a:gs pos="50000">
+            <a:schemeClr val="phClr">
+              <a:tint val="98000"/>
+              <a:satMod val="130000"/>
+              <a:shade val="90000"/>
+              <a:lumMod val="103000"/>
+            </a:schemeClr>
+          </a:gs>
+          <a:gs pos="100000">
+            <a:schemeClr val="phClr">
+              <a:shade val="63000"/>
+              <a:satMod val="120000"/>
+            </a:schemeClr>
+          </a:gs>
+        </a:gsLst>
+        <a:lin ang="5400000" scaled="0"/>
+      </a:gradFill>
+    </a:bgFillStyleLst>
+  </a:fmtScheme>
+</a:themeOverride>
+</file>
+
 <file path=ppt/theme/themeOverride7.xml><?xml version="1.0" encoding="utf-8"?>
 <a:themeOverride xmlns:a="http://schemas.openxmlformats.org/drawingml/2006/main">
   <a:clrScheme name="미래에셋대우1">
